--- a/assets/decks/episodio-09-ci-state-defer.pptx
+++ b/assets/decks/episodio-09-ci-state-defer.pptx
@@ -2,33 +2,33 @@
 <file path=ppt/presentation.xml><?xml version="1.0" encoding="utf-8"?>
 <p:presentation xmlns:p="http://schemas.openxmlformats.org/presentationml/2006/main">
   <p:sldMasterIdLst>
-    <p:sldMasterId xmlns:r="http://schemas.openxmlformats.org/officeDocument/2006/relationships" id="2147483648" r:id="R86d48f315f94450e"/>
-    <p:sldMasterId xmlns:r="http://schemas.openxmlformats.org/officeDocument/2006/relationships" id="2147483650" r:id="Re42df548a1bf4511"/>
+    <p:sldMasterId xmlns:r="http://schemas.openxmlformats.org/officeDocument/2006/relationships" id="2147483648" r:id="Rb2d811504a104ef8"/>
+    <p:sldMasterId xmlns:r="http://schemas.openxmlformats.org/officeDocument/2006/relationships" id="2147483650" r:id="Rb0d5c620a31e4e1c"/>
   </p:sldMasterIdLst>
   <p:notesMasterIdLst>
-    <p:notesMasterId xmlns:r="http://schemas.openxmlformats.org/officeDocument/2006/relationships" r:id="Ra4996a1717e040fc"/>
+    <p:notesMasterId xmlns:r="http://schemas.openxmlformats.org/officeDocument/2006/relationships" r:id="Rcdc4134b08e348a7"/>
   </p:notesMasterIdLst>
   <p:sldIdLst>
-    <p:sldId xmlns:r="http://schemas.openxmlformats.org/officeDocument/2006/relationships" id="256" r:id="Rceeab2e019a34adf"/>
-    <p:sldId xmlns:r="http://schemas.openxmlformats.org/officeDocument/2006/relationships" id="257" r:id="Rad6320d2ab95456b"/>
-    <p:sldId xmlns:r="http://schemas.openxmlformats.org/officeDocument/2006/relationships" id="258" r:id="Rd754461141a045f3"/>
-    <p:sldId xmlns:r="http://schemas.openxmlformats.org/officeDocument/2006/relationships" id="259" r:id="R567171cef41c44b0"/>
-    <p:sldId xmlns:r="http://schemas.openxmlformats.org/officeDocument/2006/relationships" id="260" r:id="R03099dd1a305418e"/>
-    <p:sldId xmlns:r="http://schemas.openxmlformats.org/officeDocument/2006/relationships" id="261" r:id="R760db62120db4691"/>
-    <p:sldId xmlns:r="http://schemas.openxmlformats.org/officeDocument/2006/relationships" id="262" r:id="Rf2feb10649794b35"/>
-    <p:sldId xmlns:r="http://schemas.openxmlformats.org/officeDocument/2006/relationships" id="263" r:id="R660b925f41d940d7"/>
-    <p:sldId xmlns:r="http://schemas.openxmlformats.org/officeDocument/2006/relationships" id="264" r:id="R7e3231d2e8ec4c42"/>
-    <p:sldId xmlns:r="http://schemas.openxmlformats.org/officeDocument/2006/relationships" id="265" r:id="R8fbc3719467e43b9"/>
-    <p:sldId xmlns:r="http://schemas.openxmlformats.org/officeDocument/2006/relationships" id="266" r:id="Re1a86e2a521a440d"/>
-    <p:sldId xmlns:r="http://schemas.openxmlformats.org/officeDocument/2006/relationships" id="267" r:id="Ra56425606e264fbc"/>
-    <p:sldId xmlns:r="http://schemas.openxmlformats.org/officeDocument/2006/relationships" id="268" r:id="Re45a8faf82924496"/>
-    <p:sldId xmlns:r="http://schemas.openxmlformats.org/officeDocument/2006/relationships" id="269" r:id="Rcdb128159fd2437e"/>
-    <p:sldId xmlns:r="http://schemas.openxmlformats.org/officeDocument/2006/relationships" id="270" r:id="R9cefb4ca1bbe40b6"/>
-    <p:sldId xmlns:r="http://schemas.openxmlformats.org/officeDocument/2006/relationships" id="271" r:id="R5394359d71f14271"/>
-    <p:sldId xmlns:r="http://schemas.openxmlformats.org/officeDocument/2006/relationships" id="272" r:id="R76cdae3d4eee46cf"/>
-    <p:sldId xmlns:r="http://schemas.openxmlformats.org/officeDocument/2006/relationships" id="273" r:id="R957fec416081409d"/>
-    <p:sldId xmlns:r="http://schemas.openxmlformats.org/officeDocument/2006/relationships" id="274" r:id="Rd81a715f1ac0457a"/>
-    <p:sldId xmlns:r="http://schemas.openxmlformats.org/officeDocument/2006/relationships" id="275" r:id="Rc9c010e84e244a3a"/>
+    <p:sldId xmlns:r="http://schemas.openxmlformats.org/officeDocument/2006/relationships" id="256" r:id="R4188cfa633914594"/>
+    <p:sldId xmlns:r="http://schemas.openxmlformats.org/officeDocument/2006/relationships" id="257" r:id="Rf268280474d24f0e"/>
+    <p:sldId xmlns:r="http://schemas.openxmlformats.org/officeDocument/2006/relationships" id="258" r:id="R5b46c542d3664005"/>
+    <p:sldId xmlns:r="http://schemas.openxmlformats.org/officeDocument/2006/relationships" id="259" r:id="R65744b1cdf2b4250"/>
+    <p:sldId xmlns:r="http://schemas.openxmlformats.org/officeDocument/2006/relationships" id="260" r:id="R2c3c69e773de4598"/>
+    <p:sldId xmlns:r="http://schemas.openxmlformats.org/officeDocument/2006/relationships" id="261" r:id="R28838d1b672c42bc"/>
+    <p:sldId xmlns:r="http://schemas.openxmlformats.org/officeDocument/2006/relationships" id="262" r:id="Rfa91682e0a3f4f65"/>
+    <p:sldId xmlns:r="http://schemas.openxmlformats.org/officeDocument/2006/relationships" id="263" r:id="Rbeaaeec9426d4307"/>
+    <p:sldId xmlns:r="http://schemas.openxmlformats.org/officeDocument/2006/relationships" id="264" r:id="R42fe266615b44674"/>
+    <p:sldId xmlns:r="http://schemas.openxmlformats.org/officeDocument/2006/relationships" id="265" r:id="Rbe5f8b48e5e143b9"/>
+    <p:sldId xmlns:r="http://schemas.openxmlformats.org/officeDocument/2006/relationships" id="266" r:id="R127aa16d930c4719"/>
+    <p:sldId xmlns:r="http://schemas.openxmlformats.org/officeDocument/2006/relationships" id="267" r:id="Rb7291d1f040a4223"/>
+    <p:sldId xmlns:r="http://schemas.openxmlformats.org/officeDocument/2006/relationships" id="268" r:id="R6b9ac95477794cfd"/>
+    <p:sldId xmlns:r="http://schemas.openxmlformats.org/officeDocument/2006/relationships" id="269" r:id="R9525a5c905604443"/>
+    <p:sldId xmlns:r="http://schemas.openxmlformats.org/officeDocument/2006/relationships" id="270" r:id="Rf429195a82b44a3f"/>
+    <p:sldId xmlns:r="http://schemas.openxmlformats.org/officeDocument/2006/relationships" id="271" r:id="Ref6215d21c7b4a1a"/>
+    <p:sldId xmlns:r="http://schemas.openxmlformats.org/officeDocument/2006/relationships" id="272" r:id="R735d1808f1524046"/>
+    <p:sldId xmlns:r="http://schemas.openxmlformats.org/officeDocument/2006/relationships" id="273" r:id="R7a8951a21602496b"/>
+    <p:sldId xmlns:r="http://schemas.openxmlformats.org/officeDocument/2006/relationships" id="274" r:id="R2d56fa62d3934603"/>
+    <p:sldId xmlns:r="http://schemas.openxmlformats.org/officeDocument/2006/relationships" id="275" r:id="Reb5718b0939e459d"/>
   </p:sldIdLst>
   <p:sldSz cx="12192000" cy="6858000"/>
   <p:notesSz cx="6858000" cy="9144000"/>
@@ -462,7 +462,57 @@
           <a:lstStyle xmlns:a="http://schemas.openxmlformats.org/drawingml/2006/main"/>
           <a:p xmlns:a="http://schemas.openxmlformats.org/drawingml/2006/main">
             <a:r>
-              <a:t>Apresente o objetivo do EPISÓDIO 9 e conecte-o ao checkpoint executável. CI rápida não significa selecionar menos; significa selecionar o impacto correto.</a:t>
+              <a:t>[Roteiro recomendado]</a:t>
+            </a:r>
+          </a:p>
+          <a:p xmlns:a="http://schemas.openxmlformats.org/drawingml/2006/main">
+            <a:r>
+              <a:t>[Tempo sugerido: 00:45]</a:t>
+            </a:r>
+          </a:p>
+          <a:p xmlns:a="http://schemas.openxmlformats.org/drawingml/2006/main">
+            <a:r>
+              <a:t/>
+            </a:r>
+          </a:p>
+          <a:p xmlns:a="http://schemas.openxmlformats.org/drawingml/2006/main">
+            <a:r>
+              <a:t>Fala sugerida:</a:t>
+            </a:r>
+          </a:p>
+          <a:p xmlns:a="http://schemas.openxmlformats.org/drawingml/2006/main">
+            <a:r>
+              <a:t>Bem-vindo ao episódio 9 do dbt Moderno na Prática. Hoje vamos trabalhar o tema “CI inteligente com artifacts, state e defer”. Teste o impacto necessário sem reconstruir o mundo. O objetivo não é apenas conhecer o conceito: vamos conectá-lo ao laboratório e terminar com uma evidência que você consegue reproduzir no seu próprio ambiente. Ao longo da aula, separe sempre o que é recurso aberto e estável daquilo que aparecerá apenas no Radar.</a:t>
+            </a:r>
+          </a:p>
+          <a:p xmlns:a="http://schemas.openxmlformats.org/drawingml/2006/main">
+            <a:r>
+              <a:t/>
+            </a:r>
+          </a:p>
+          <a:p xmlns:a="http://schemas.openxmlformats.org/drawingml/2006/main">
+            <a:r>
+              <a:t>O que destacar:</a:t>
+            </a:r>
+          </a:p>
+          <a:p xmlns:a="http://schemas.openxmlformats.org/drawingml/2006/main">
+            <a:r>
+              <a:t>- Apresente o título, situe o checkpoint 09 e deixe claro que a aula faz parte da trilha open/stable.</a:t>
+            </a:r>
+          </a:p>
+          <a:p xmlns:a="http://schemas.openxmlformats.org/drawingml/2006/main">
+            <a:r>
+              <a:t/>
+            </a:r>
+          </a:p>
+          <a:p xmlns:a="http://schemas.openxmlformats.org/drawingml/2006/main">
+            <a:r>
+              <a:t>Transição:</a:t>
+            </a:r>
+          </a:p>
+          <a:p xmlns:a="http://schemas.openxmlformats.org/drawingml/2006/main">
+            <a:r>
+              <a:t>Com esse ponto estabelecido, avance para “CI rápida não significa selecionar menos; significa selecionar o impacto correto.”.</a:t>
             </a:r>
           </a:p>
           <a:p xmlns:a="http://schemas.openxmlformats.org/drawingml/2006/main">
@@ -572,7 +622,57 @@
           <a:lstStyle xmlns:a="http://schemas.openxmlformats.org/drawingml/2006/main"/>
           <a:p xmlns:a="http://schemas.openxmlformats.org/drawingml/2006/main">
             <a:r>
-              <a:t>Use a composição para explicar visualmente: Modelos não construídos localmente podem apontar para produção ou staging. Resolve refs Evita recomputação Exige estado confiável</a:t>
+              <a:t>[Roteiro recomendado]</a:t>
+            </a:r>
+          </a:p>
+          <a:p xmlns:a="http://schemas.openxmlformats.org/drawingml/2006/main">
+            <a:r>
+              <a:t>[Tempo sugerido: 00:55]</a:t>
+            </a:r>
+          </a:p>
+          <a:p xmlns:a="http://schemas.openxmlformats.org/drawingml/2006/main">
+            <a:r>
+              <a:t/>
+            </a:r>
+          </a:p>
+          <a:p xmlns:a="http://schemas.openxmlformats.org/drawingml/2006/main">
+            <a:r>
+              <a:t>Fala sugerida:</a:t>
+            </a:r>
+          </a:p>
+          <a:p xmlns:a="http://schemas.openxmlformats.org/drawingml/2006/main">
+            <a:r>
+              <a:t>Agora vamos ler a ideia visualmente. Modelos não construídos localmente podem apontar para produção ou staging. Siga a composição na ordem mostrada e conecte os elementos principais. A imagem ou o fluxo não cria uma regra nova; ele torna visível a relação que acabamos de explicar. A figura é identificada como figura oficial da documentação dbt — Apache 2.0</a:t>
+            </a:r>
+          </a:p>
+          <a:p xmlns:a="http://schemas.openxmlformats.org/drawingml/2006/main">
+            <a:r>
+              <a:t/>
+            </a:r>
+          </a:p>
+          <a:p xmlns:a="http://schemas.openxmlformats.org/drawingml/2006/main">
+            <a:r>
+              <a:t>O que destacar:</a:t>
+            </a:r>
+          </a:p>
+          <a:p xmlns:a="http://schemas.openxmlformats.org/drawingml/2006/main">
+            <a:r>
+              <a:t>- Aponte a legenda e deixe explícito quando a figura é oficial; as anotações do curso ficam fora da imagem.</a:t>
+            </a:r>
+          </a:p>
+          <a:p xmlns:a="http://schemas.openxmlformats.org/drawingml/2006/main">
+            <a:r>
+              <a:t/>
+            </a:r>
+          </a:p>
+          <a:p xmlns:a="http://schemas.openxmlformats.org/drawingml/2006/main">
+            <a:r>
+              <a:t>Transição:</a:t>
+            </a:r>
+          </a:p>
+          <a:p xmlns:a="http://schemas.openxmlformats.org/drawingml/2006/main">
+            <a:r>
+              <a:t>Com esse ponto estabelecido, avance para “CI madura tem três níveis”.</a:t>
             </a:r>
           </a:p>
           <a:p xmlns:a="http://schemas.openxmlformats.org/drawingml/2006/main">
@@ -687,7 +787,57 @@
           <a:lstStyle xmlns:a="http://schemas.openxmlformats.org/drawingml/2006/main"/>
           <a:p xmlns:a="http://schemas.openxmlformats.org/drawingml/2006/main">
             <a:r>
-              <a:t>Parse barato, seleção por impacto e validação completa cumprem papéis diferentes. Desenvolva os pontos: PR rápido; Gate de integração; Build completo programado.</a:t>
+              <a:t>[Roteiro recomendado]</a:t>
+            </a:r>
+          </a:p>
+          <a:p xmlns:a="http://schemas.openxmlformats.org/drawingml/2006/main">
+            <a:r>
+              <a:t>[Tempo sugerido: 01:10]</a:t>
+            </a:r>
+          </a:p>
+          <a:p xmlns:a="http://schemas.openxmlformats.org/drawingml/2006/main">
+            <a:r>
+              <a:t/>
+            </a:r>
+          </a:p>
+          <a:p xmlns:a="http://schemas.openxmlformats.org/drawingml/2006/main">
+            <a:r>
+              <a:t>Fala sugerida:</a:t>
+            </a:r>
+          </a:p>
+          <a:p xmlns:a="http://schemas.openxmlformats.org/drawingml/2006/main">
+            <a:r>
+              <a:t>A mensagem principal deste slide é: Parse barato, seleção por impacto e validação completa cumprem papéis diferentes. Para tornar isso concreto, observe PR rápido, Gate de integração e Build completo programado. Esses pontos devem ser entendidos em conjunto; não são funcionalidades isoladas. No projeto, essa combinação transforma uma convenção informal em algo que pode ser revisado, testado ou consumido de maneira consistente.</a:t>
+            </a:r>
+          </a:p>
+          <a:p xmlns:a="http://schemas.openxmlformats.org/drawingml/2006/main">
+            <a:r>
+              <a:t/>
+            </a:r>
+          </a:p>
+          <a:p xmlns:a="http://schemas.openxmlformats.org/drawingml/2006/main">
+            <a:r>
+              <a:t>O que destacar:</a:t>
+            </a:r>
+          </a:p>
+          <a:p xmlns:a="http://schemas.openxmlformats.org/drawingml/2006/main">
+            <a:r>
+              <a:t>- Comece pelo título, leia a afirmação abaixo dele e depois desenvolva os itens sem repetir o texto palavra por palavra.</a:t>
+            </a:r>
+          </a:p>
+          <a:p xmlns:a="http://schemas.openxmlformats.org/drawingml/2006/main">
+            <a:r>
+              <a:t/>
+            </a:r>
+          </a:p>
+          <a:p xmlns:a="http://schemas.openxmlformats.org/drawingml/2006/main">
+            <a:r>
+              <a:t>Transição:</a:t>
+            </a:r>
+          </a:p>
+          <a:p xmlns:a="http://schemas.openxmlformats.org/drawingml/2006/main">
+            <a:r>
+              <a:t>Com esse ponto estabelecido, avance para “CI madura tem três níveis”.</a:t>
             </a:r>
           </a:p>
           <a:p xmlns:a="http://schemas.openxmlformats.org/drawingml/2006/main">
@@ -797,7 +947,57 @@
           <a:lstStyle xmlns:a="http://schemas.openxmlformats.org/drawingml/2006/main"/>
           <a:p xmlns:a="http://schemas.openxmlformats.org/drawingml/2006/main">
             <a:r>
-              <a:t>Use a composição para explicar visualmente: Parse barato, seleção por impacto e validação completa cumprem papéis diferentes. PR rápido Gate de integração Build completo programado</a:t>
+              <a:t>[Roteiro recomendado]</a:t>
+            </a:r>
+          </a:p>
+          <a:p xmlns:a="http://schemas.openxmlformats.org/drawingml/2006/main">
+            <a:r>
+              <a:t>[Tempo sugerido: 00:55]</a:t>
+            </a:r>
+          </a:p>
+          <a:p xmlns:a="http://schemas.openxmlformats.org/drawingml/2006/main">
+            <a:r>
+              <a:t/>
+            </a:r>
+          </a:p>
+          <a:p xmlns:a="http://schemas.openxmlformats.org/drawingml/2006/main">
+            <a:r>
+              <a:t>Fala sugerida:</a:t>
+            </a:r>
+          </a:p>
+          <a:p xmlns:a="http://schemas.openxmlformats.org/drawingml/2006/main">
+            <a:r>
+              <a:t>Agora vamos ler a ideia visualmente. Parse barato, seleção por impacto e validação completa cumprem papéis diferentes. Siga a composição na ordem mostrada e conecte os elementos principais. A imagem ou o fluxo não cria uma regra nova; ele torna visível a relação que acabamos de explicar. Use a disposição dos elementos para reforçar causa, dependência ou comparação.</a:t>
+            </a:r>
+          </a:p>
+          <a:p xmlns:a="http://schemas.openxmlformats.org/drawingml/2006/main">
+            <a:r>
+              <a:t/>
+            </a:r>
+          </a:p>
+          <a:p xmlns:a="http://schemas.openxmlformats.org/drawingml/2006/main">
+            <a:r>
+              <a:t>O que destacar:</a:t>
+            </a:r>
+          </a:p>
+          <a:p xmlns:a="http://schemas.openxmlformats.org/drawingml/2006/main">
+            <a:r>
+              <a:t>- Acompanhe o fluxo ou a comparação com o cursor e preserve a ordem de leitura do slide.</a:t>
+            </a:r>
+          </a:p>
+          <a:p xmlns:a="http://schemas.openxmlformats.org/drawingml/2006/main">
+            <a:r>
+              <a:t/>
+            </a:r>
+          </a:p>
+          <a:p xmlns:a="http://schemas.openxmlformats.org/drawingml/2006/main">
+            <a:r>
+              <a:t>Transição:</a:t>
+            </a:r>
+          </a:p>
+          <a:p xmlns:a="http://schemas.openxmlformats.org/drawingml/2006/main">
+            <a:r>
+              <a:t>Com esse ponto estabelecido, avance para “Demonstração — execute”.</a:t>
             </a:r>
           </a:p>
           <a:p xmlns:a="http://schemas.openxmlformats.org/drawingml/2006/main">
@@ -907,7 +1107,57 @@
           <a:lstStyle xmlns:a="http://schemas.openxmlformats.org/drawingml/2006/main"/>
           <a:p xmlns:a="http://schemas.openxmlformats.org/drawingml/2006/main">
             <a:r>
-              <a:t>Execute python course.py checkpoint 09. Pause para o aluno acompanhar o terminal.</a:t>
+              <a:t>[Roteiro recomendado]</a:t>
+            </a:r>
+          </a:p>
+          <a:p xmlns:a="http://schemas.openxmlformats.org/drawingml/2006/main">
+            <a:r>
+              <a:t>[Tempo sugerido: 01:20]</a:t>
+            </a:r>
+          </a:p>
+          <a:p xmlns:a="http://schemas.openxmlformats.org/drawingml/2006/main">
+            <a:r>
+              <a:t/>
+            </a:r>
+          </a:p>
+          <a:p xmlns:a="http://schemas.openxmlformats.org/drawingml/2006/main">
+            <a:r>
+              <a:t>Fala sugerida:</a:t>
+            </a:r>
+          </a:p>
+          <a:p xmlns:a="http://schemas.openxmlformats.org/drawingml/2006/main">
+            <a:r>
+              <a:t>Agora vamos sair da explicação e comprovar o comportamento. Execute os comandos exatamente como aparecem: python course.py checkpoint 09. Não é necessário ativar o ambiente virtual manualmente; o launcher do curso seleciona o ambiente correto. Antes de avançar, confirme que o comando iniciou sem erro e dê tempo para o aluno acompanhar a mesma etapa.</a:t>
+            </a:r>
+          </a:p>
+          <a:p xmlns:a="http://schemas.openxmlformats.org/drawingml/2006/main">
+            <a:r>
+              <a:t/>
+            </a:r>
+          </a:p>
+          <a:p xmlns:a="http://schemas.openxmlformats.org/drawingml/2006/main">
+            <a:r>
+              <a:t>O que destacar:</a:t>
+            </a:r>
+          </a:p>
+          <a:p xmlns:a="http://schemas.openxmlformats.org/drawingml/2006/main">
+            <a:r>
+              <a:t>- Mostre o comando completo, execute uma linha por vez quando houver mais de uma e mantenha o terminal visível.</a:t>
+            </a:r>
+          </a:p>
+          <a:p xmlns:a="http://schemas.openxmlformats.org/drawingml/2006/main">
+            <a:r>
+              <a:t/>
+            </a:r>
+          </a:p>
+          <a:p xmlns:a="http://schemas.openxmlformats.org/drawingml/2006/main">
+            <a:r>
+              <a:t>Transição:</a:t>
+            </a:r>
+          </a:p>
+          <a:p xmlns:a="http://schemas.openxmlformats.org/drawingml/2006/main">
+            <a:r>
+              <a:t>Com esse ponto estabelecido, avance para “Demonstração — observe”.</a:t>
             </a:r>
           </a:p>
           <a:p xmlns:a="http://schemas.openxmlformats.org/drawingml/2006/main">
@@ -1017,7 +1267,57 @@
           <a:lstStyle xmlns:a="http://schemas.openxmlformats.org/drawingml/2006/main"/>
           <a:p xmlns:a="http://schemas.openxmlformats.org/drawingml/2006/main">
             <a:r>
-              <a:t>Durante a execução, destaque: Manifest baseline preservado; Mudança sintética isolada; Seleção e defer comparados.</a:t>
+              <a:t>[Roteiro recomendado]</a:t>
+            </a:r>
+          </a:p>
+          <a:p xmlns:a="http://schemas.openxmlformats.org/drawingml/2006/main">
+            <a:r>
+              <a:t>[Tempo sugerido: 01:10]</a:t>
+            </a:r>
+          </a:p>
+          <a:p xmlns:a="http://schemas.openxmlformats.org/drawingml/2006/main">
+            <a:r>
+              <a:t/>
+            </a:r>
+          </a:p>
+          <a:p xmlns:a="http://schemas.openxmlformats.org/drawingml/2006/main">
+            <a:r>
+              <a:t>Fala sugerida:</a:t>
+            </a:r>
+          </a:p>
+          <a:p xmlns:a="http://schemas.openxmlformats.org/drawingml/2006/main">
+            <a:r>
+              <a:t>Enquanto a execução acontece, não olhe apenas para a mensagem final. Observe manifest baseline preservado, Mudança sintética isolada e Seleção e defer comparados. Cada sinal responde a uma pergunta diferente sobre o pipeline. Se um deles divergir, interrompa a demonstração e investigue; o objetivo do hands-on é produzir evidência, não apenas chegar rapidamente a uma tela verde.</a:t>
+            </a:r>
+          </a:p>
+          <a:p xmlns:a="http://schemas.openxmlformats.org/drawingml/2006/main">
+            <a:r>
+              <a:t/>
+            </a:r>
+          </a:p>
+          <a:p xmlns:a="http://schemas.openxmlformats.org/drawingml/2006/main">
+            <a:r>
+              <a:t>O que destacar:</a:t>
+            </a:r>
+          </a:p>
+          <a:p xmlns:a="http://schemas.openxmlformats.org/drawingml/2006/main">
+            <a:r>
+              <a:t>- Marque cada observação quando ela aparecer no terminal ou no artifact correspondente.</a:t>
+            </a:r>
+          </a:p>
+          <a:p xmlns:a="http://schemas.openxmlformats.org/drawingml/2006/main">
+            <a:r>
+              <a:t/>
+            </a:r>
+          </a:p>
+          <a:p xmlns:a="http://schemas.openxmlformats.org/drawingml/2006/main">
+            <a:r>
+              <a:t>Transição:</a:t>
+            </a:r>
+          </a:p>
+          <a:p xmlns:a="http://schemas.openxmlformats.org/drawingml/2006/main">
+            <a:r>
+              <a:t>Com esse ponto estabelecido, avance para “RESULTADO ESPERADO”.</a:t>
             </a:r>
           </a:p>
           <a:p xmlns:a="http://schemas.openxmlformats.org/drawingml/2006/main">
@@ -1127,7 +1427,57 @@
           <a:lstStyle xmlns:a="http://schemas.openxmlformats.org/drawingml/2006/main"/>
           <a:p xmlns:a="http://schemas.openxmlformats.org/drawingml/2006/main">
             <a:r>
-              <a:t>Confirme o resultado esperado: Somente o ramo afetado é selecionado. Se o valor divergir, não avance sem investigar.</a:t>
+              <a:t>[Roteiro recomendado]</a:t>
+            </a:r>
+          </a:p>
+          <a:p xmlns:a="http://schemas.openxmlformats.org/drawingml/2006/main">
+            <a:r>
+              <a:t>[Tempo sugerido: 00:45]</a:t>
+            </a:r>
+          </a:p>
+          <a:p xmlns:a="http://schemas.openxmlformats.org/drawingml/2006/main">
+            <a:r>
+              <a:t/>
+            </a:r>
+          </a:p>
+          <a:p xmlns:a="http://schemas.openxmlformats.org/drawingml/2006/main">
+            <a:r>
+              <a:t>Fala sugerida:</a:t>
+            </a:r>
+          </a:p>
+          <a:p xmlns:a="http://schemas.openxmlformats.org/drawingml/2006/main">
+            <a:r>
+              <a:t>Este é o ponto de parada da demonstração: Somente o ramo afetado é selecionado. Esse resultado confirma que a etapa executada produziu a evidência esperada para o checkpoint 09. Se o valor, o status ou o artifact estiver diferente, não trate a divergência como detalhe de ambiente. Use o diagnóstico do curso e só avance quando a causa estiver compreendida.</a:t>
+            </a:r>
+          </a:p>
+          <a:p xmlns:a="http://schemas.openxmlformats.org/drawingml/2006/main">
+            <a:r>
+              <a:t/>
+            </a:r>
+          </a:p>
+          <a:p xmlns:a="http://schemas.openxmlformats.org/drawingml/2006/main">
+            <a:r>
+              <a:t>O que destacar:</a:t>
+            </a:r>
+          </a:p>
+          <a:p xmlns:a="http://schemas.openxmlformats.org/drawingml/2006/main">
+            <a:r>
+              <a:t>- Compare o resultado do terminal com a frase central do slide e registre a evidência antes de continuar.</a:t>
+            </a:r>
+          </a:p>
+          <a:p xmlns:a="http://schemas.openxmlformats.org/drawingml/2006/main">
+            <a:r>
+              <a:t/>
+            </a:r>
+          </a:p>
+          <a:p xmlns:a="http://schemas.openxmlformats.org/drawingml/2006/main">
+            <a:r>
+              <a:t>Transição:</a:t>
+            </a:r>
+          </a:p>
+          <a:p xmlns:a="http://schemas.openxmlformats.org/drawingml/2006/main">
+            <a:r>
+              <a:t>Com esse ponto estabelecido, avance para “O mesmo recurso afeta três decisões”.</a:t>
             </a:r>
           </a:p>
           <a:p xmlns:a="http://schemas.openxmlformats.org/drawingml/2006/main">
@@ -1237,7 +1587,57 @@
           <a:lstStyle xmlns:a="http://schemas.openxmlformats.org/drawingml/2006/main"/>
           <a:p xmlns:a="http://schemas.openxmlformats.org/drawingml/2006/main">
             <a:r>
-              <a:t>Conecte a técnica aos efeitos: Governança: impacto visível; FinOps: menos recomputação; IA: artifacts atualizados. Não prometa economia sem medição.</a:t>
+              <a:t>[Roteiro recomendado]</a:t>
+            </a:r>
+          </a:p>
+          <a:p xmlns:a="http://schemas.openxmlformats.org/drawingml/2006/main">
+            <a:r>
+              <a:t>[Tempo sugerido: 01:00]</a:t>
+            </a:r>
+          </a:p>
+          <a:p xmlns:a="http://schemas.openxmlformats.org/drawingml/2006/main">
+            <a:r>
+              <a:t/>
+            </a:r>
+          </a:p>
+          <a:p xmlns:a="http://schemas.openxmlformats.org/drawingml/2006/main">
+            <a:r>
+              <a:t>Fala sugerida:</a:t>
+            </a:r>
+          </a:p>
+          <a:p xmlns:a="http://schemas.openxmlformats.org/drawingml/2006/main">
+            <a:r>
+              <a:t>Antes de seguir, conecte a técnica às decisões que ela afeta: Governança: impacto visível, FinOps: menos recomputação e IA: artifacts atualizados. Governança define responsabilidade e consistência; FinOps pergunta quanto trabalho estamos repetindo; e IA depende do contexto que decidimos expor. A mesma implementação pode melhorar os três eixos, mas os ganhos devem ser medidos separadamente.</a:t>
+            </a:r>
+          </a:p>
+          <a:p xmlns:a="http://schemas.openxmlformats.org/drawingml/2006/main">
+            <a:r>
+              <a:t/>
+            </a:r>
+          </a:p>
+          <a:p xmlns:a="http://schemas.openxmlformats.org/drawingml/2006/main">
+            <a:r>
+              <a:t>O que destacar:</a:t>
+            </a:r>
+          </a:p>
+          <a:p xmlns:a="http://schemas.openxmlformats.org/drawingml/2006/main">
+            <a:r>
+              <a:t>- Percorra os três eixos e evite apresentar economia ou acurácia como consequência automática.</a:t>
+            </a:r>
+          </a:p>
+          <a:p xmlns:a="http://schemas.openxmlformats.org/drawingml/2006/main">
+            <a:r>
+              <a:t/>
+            </a:r>
+          </a:p>
+          <a:p xmlns:a="http://schemas.openxmlformats.org/drawingml/2006/main">
+            <a:r>
+              <a:t>Transição:</a:t>
+            </a:r>
+          </a:p>
+          <a:p xmlns:a="http://schemas.openxmlformats.org/drawingml/2006/main">
+            <a:r>
+              <a:t>Com esse ponto estabelecido, avance para “modified+”.</a:t>
             </a:r>
           </a:p>
           <a:p xmlns:a="http://schemas.openxmlformats.org/drawingml/2006/main">
@@ -1347,7 +1747,57 @@
           <a:lstStyle xmlns:a="http://schemas.openxmlformats.org/drawingml/2006/main"/>
           <a:p xmlns:a="http://schemas.openxmlformats.org/drawingml/2006/main">
             <a:r>
-              <a:t>modified+: mudança e descendentes. A economia depende do tamanho e da topologia do projeto.</a:t>
+              <a:t>[Roteiro recomendado]</a:t>
+            </a:r>
+          </a:p>
+          <a:p xmlns:a="http://schemas.openxmlformats.org/drawingml/2006/main">
+            <a:r>
+              <a:t>[Tempo sugerido: 00:55]</a:t>
+            </a:r>
+          </a:p>
+          <a:p xmlns:a="http://schemas.openxmlformats.org/drawingml/2006/main">
+            <a:r>
+              <a:t/>
+            </a:r>
+          </a:p>
+          <a:p xmlns:a="http://schemas.openxmlformats.org/drawingml/2006/main">
+            <a:r>
+              <a:t>Fala sugerida:</a:t>
+            </a:r>
+          </a:p>
+          <a:p xmlns:a="http://schemas.openxmlformats.org/drawingml/2006/main">
+            <a:r>
+              <a:t>Aqui temos modified+: mudança e descendentes. O número ajuda a dimensionar o exemplo, mas precisa ser lido com a ressalva correta. A economia depende do tamanho e da topologia do projeto. Use o case como evidência contextual e não como promessa de que outro projeto repetirá o mesmo resultado sem as mesmas condições.</a:t>
+            </a:r>
+          </a:p>
+          <a:p xmlns:a="http://schemas.openxmlformats.org/drawingml/2006/main">
+            <a:r>
+              <a:t/>
+            </a:r>
+          </a:p>
+          <a:p xmlns:a="http://schemas.openxmlformats.org/drawingml/2006/main">
+            <a:r>
+              <a:t>O que destacar:</a:t>
+            </a:r>
+          </a:p>
+          <a:p xmlns:a="http://schemas.openxmlformats.org/drawingml/2006/main">
+            <a:r>
+              <a:t>- Apresente primeiro o número, depois a definição e termine obrigatoriamente com a ressalva.</a:t>
+            </a:r>
+          </a:p>
+          <a:p xmlns:a="http://schemas.openxmlformats.org/drawingml/2006/main">
+            <a:r>
+              <a:t/>
+            </a:r>
+          </a:p>
+          <a:p xmlns:a="http://schemas.openxmlformats.org/drawingml/2006/main">
+            <a:r>
+              <a:t>Transição:</a:t>
+            </a:r>
+          </a:p>
+          <a:p xmlns:a="http://schemas.openxmlformats.org/drawingml/2006/main">
+            <a:r>
+              <a:t>Com esse ponto estabelecido, avance para “Limitações que precisam permanecer visíveis”.</a:t>
             </a:r>
           </a:p>
           <a:p xmlns:a="http://schemas.openxmlformats.org/drawingml/2006/main">
@@ -1457,7 +1907,57 @@
           <a:lstStyle xmlns:a="http://schemas.openxmlformats.org/drawingml/2006/main"/>
           <a:p xmlns:a="http://schemas.openxmlformats.org/drawingml/2006/main">
             <a:r>
-              <a:t>Apresente os limites sem minimizá-los: Estado velho seleciona errado; Defer pode esconder divergência; Full build continua necessário.</a:t>
+              <a:t>[Roteiro recomendado]</a:t>
+            </a:r>
+          </a:p>
+          <a:p xmlns:a="http://schemas.openxmlformats.org/drawingml/2006/main">
+            <a:r>
+              <a:t>[Tempo sugerido: 01:00]</a:t>
+            </a:r>
+          </a:p>
+          <a:p xmlns:a="http://schemas.openxmlformats.org/drawingml/2006/main">
+            <a:r>
+              <a:t/>
+            </a:r>
+          </a:p>
+          <a:p xmlns:a="http://schemas.openxmlformats.org/drawingml/2006/main">
+            <a:r>
+              <a:t>Fala sugerida:</a:t>
+            </a:r>
+          </a:p>
+          <a:p xmlns:a="http://schemas.openxmlformats.org/drawingml/2006/main">
+            <a:r>
+              <a:t>Também precisamos declarar os limites da recomendação. Neste cenário, considere estado velho seleciona errado, Defer pode esconder divergência e Full build continua necessário. Esses pontos não anulam a técnica; eles delimitam onde a demonstração é válida e quais condições precisam ser verificadas antes de levar o padrão para produção. Tratar limites como parte do design evita transformar uma boa prática em regra universal.</a:t>
+            </a:r>
+          </a:p>
+          <a:p xmlns:a="http://schemas.openxmlformats.org/drawingml/2006/main">
+            <a:r>
+              <a:t/>
+            </a:r>
+          </a:p>
+          <a:p xmlns:a="http://schemas.openxmlformats.org/drawingml/2006/main">
+            <a:r>
+              <a:t>O que destacar:</a:t>
+            </a:r>
+          </a:p>
+          <a:p xmlns:a="http://schemas.openxmlformats.org/drawingml/2006/main">
+            <a:r>
+              <a:t>- Leia os limites com o mesmo peso dado aos benefícios e diferencie restrição do laboratório de restrição do produto.</a:t>
+            </a:r>
+          </a:p>
+          <a:p xmlns:a="http://schemas.openxmlformats.org/drawingml/2006/main">
+            <a:r>
+              <a:t/>
+            </a:r>
+          </a:p>
+          <a:p xmlns:a="http://schemas.openxmlformats.org/drawingml/2006/main">
+            <a:r>
+              <a:t>Transição:</a:t>
+            </a:r>
+          </a:p>
+          <a:p xmlns:a="http://schemas.openxmlformats.org/drawingml/2006/main">
+            <a:r>
+              <a:t>Com esse ponto estabelecido, avance para “RADAR”.</a:t>
             </a:r>
           </a:p>
           <a:p xmlns:a="http://schemas.openxmlformats.org/drawingml/2006/main">
@@ -1567,7 +2067,57 @@
           <a:lstStyle xmlns:a="http://schemas.openxmlformats.org/drawingml/2006/main"/>
           <a:p xmlns:a="http://schemas.openxmlformats.org/drawingml/2006/main">
             <a:r>
-              <a:t>dbt State gerenciado permanece fora; artifacts abertos sustentam a aula. Reforce que beta e preview não fazem parte da aceitação.</a:t>
+              <a:t>[Roteiro recomendado]</a:t>
+            </a:r>
+          </a:p>
+          <a:p xmlns:a="http://schemas.openxmlformats.org/drawingml/2006/main">
+            <a:r>
+              <a:t>[Tempo sugerido: 00:55]</a:t>
+            </a:r>
+          </a:p>
+          <a:p xmlns:a="http://schemas.openxmlformats.org/drawingml/2006/main">
+            <a:r>
+              <a:t/>
+            </a:r>
+          </a:p>
+          <a:p xmlns:a="http://schemas.openxmlformats.org/drawingml/2006/main">
+            <a:r>
+              <a:t>Fala sugerida:</a:t>
+            </a:r>
+          </a:p>
+          <a:p xmlns:a="http://schemas.openxmlformats.org/drawingml/2006/main">
+            <a:r>
+              <a:t>Este é o nosso Radar: dbt State gerenciado permanece fora; artifacts abertos sustentam a aula. A intenção é mostrar a direção da ferramenta sem misturar preview com o caminho suportado da aula. Novidade observada não é recomendação de produção. Para adotar qualquer recurso futuro, confirme maturidade, adaptador, documentação e impacto sobre o projeto antes de alterar o baseline estável.</a:t>
+            </a:r>
+          </a:p>
+          <a:p xmlns:a="http://schemas.openxmlformats.org/drawingml/2006/main">
+            <a:r>
+              <a:t/>
+            </a:r>
+          </a:p>
+          <a:p xmlns:a="http://schemas.openxmlformats.org/drawingml/2006/main">
+            <a:r>
+              <a:t>O que destacar:</a:t>
+            </a:r>
+          </a:p>
+          <a:p xmlns:a="http://schemas.openxmlformats.org/drawingml/2006/main">
+            <a:r>
+              <a:t>- Reforce visualmente a regra do rodapé e não execute comandos beta ou preview como parte obrigatória da aula.</a:t>
+            </a:r>
+          </a:p>
+          <a:p xmlns:a="http://schemas.openxmlformats.org/drawingml/2006/main">
+            <a:r>
+              <a:t/>
+            </a:r>
+          </a:p>
+          <a:p xmlns:a="http://schemas.openxmlformats.org/drawingml/2006/main">
+            <a:r>
+              <a:t>Transição:</a:t>
+            </a:r>
+          </a:p>
+          <a:p xmlns:a="http://schemas.openxmlformats.org/drawingml/2006/main">
+            <a:r>
+              <a:t>Com esse ponto estabelecido, avance para “PRÓXIMO PASSO”.</a:t>
             </a:r>
           </a:p>
           <a:p xmlns:a="http://schemas.openxmlformats.org/drawingml/2006/main">
@@ -1677,7 +2227,57 @@
           <a:lstStyle xmlns:a="http://schemas.openxmlformats.org/drawingml/2006/main"/>
           <a:p xmlns:a="http://schemas.openxmlformats.org/drawingml/2006/main">
             <a:r>
-              <a:t>CI rápida não significa selecionar menos; significa selecionar o impacto correto. Use o diagrama para antecipar o problema que será comprovado no laboratório.</a:t>
+              <a:t>[Roteiro recomendado]</a:t>
+            </a:r>
+          </a:p>
+          <a:p xmlns:a="http://schemas.openxmlformats.org/drawingml/2006/main">
+            <a:r>
+              <a:t>[Tempo sugerido: 01:00]</a:t>
+            </a:r>
+          </a:p>
+          <a:p xmlns:a="http://schemas.openxmlformats.org/drawingml/2006/main">
+            <a:r>
+              <a:t/>
+            </a:r>
+          </a:p>
+          <a:p xmlns:a="http://schemas.openxmlformats.org/drawingml/2006/main">
+            <a:r>
+              <a:t>Fala sugerida:</a:t>
+            </a:r>
+          </a:p>
+          <a:p xmlns:a="http://schemas.openxmlformats.org/drawingml/2006/main">
+            <a:r>
+              <a:t>Quero começar com uma provocação: CI rápida não significa selecionar menos; significa selecionar o impacto correto. Essa pergunta orienta toda a aula. Em vez de aceitar uma afirmação porque ela parece correta, vamos procurar uma definição verificável e uma demonstração executável. Guarde essa tensão, porque voltaremos a ela quando compararmos o conceito com o resultado do laboratório.</a:t>
+            </a:r>
+          </a:p>
+          <a:p xmlns:a="http://schemas.openxmlformats.org/drawingml/2006/main">
+            <a:r>
+              <a:t/>
+            </a:r>
+          </a:p>
+          <a:p xmlns:a="http://schemas.openxmlformats.org/drawingml/2006/main">
+            <a:r>
+              <a:t>O que destacar:</a:t>
+            </a:r>
+          </a:p>
+          <a:p xmlns:a="http://schemas.openxmlformats.org/drawingml/2006/main">
+            <a:r>
+              <a:t>- Dê uma pausa depois da provocação e use o diagrama como mapa do problema, sem explicar todas as etapas ainda.</a:t>
+            </a:r>
+          </a:p>
+          <a:p xmlns:a="http://schemas.openxmlformats.org/drawingml/2006/main">
+            <a:r>
+              <a:t/>
+            </a:r>
+          </a:p>
+          <a:p xmlns:a="http://schemas.openxmlformats.org/drawingml/2006/main">
+            <a:r>
+              <a:t>Transição:</a:t>
+            </a:r>
+          </a:p>
+          <a:p xmlns:a="http://schemas.openxmlformats.org/drawingml/2006/main">
+            <a:r>
+              <a:t>Com esse ponto estabelecido, avance para “Ao final, você consegue...”.</a:t>
             </a:r>
           </a:p>
           <a:p xmlns:a="http://schemas.openxmlformats.org/drawingml/2006/main">
@@ -1787,7 +2387,57 @@
           <a:lstStyle xmlns:a="http://schemas.openxmlformats.org/drawingml/2006/main"/>
           <a:p xmlns:a="http://schemas.openxmlformats.org/drawingml/2006/main">
             <a:r>
-              <a:t>Salve um manifest e compare a seleção antes e depois de uma mudança. Encerre conectando a aula ao próximo checkpoint.</a:t>
+              <a:t>[Roteiro recomendado]</a:t>
+            </a:r>
+          </a:p>
+          <a:p xmlns:a="http://schemas.openxmlformats.org/drawingml/2006/main">
+            <a:r>
+              <a:t>[Tempo sugerido: 00:40]</a:t>
+            </a:r>
+          </a:p>
+          <a:p xmlns:a="http://schemas.openxmlformats.org/drawingml/2006/main">
+            <a:r>
+              <a:t/>
+            </a:r>
+          </a:p>
+          <a:p xmlns:a="http://schemas.openxmlformats.org/drawingml/2006/main">
+            <a:r>
+              <a:t>Fala sugerida:</a:t>
+            </a:r>
+          </a:p>
+          <a:p xmlns:a="http://schemas.openxmlformats.org/drawingml/2006/main">
+            <a:r>
+              <a:t>Salve um manifest e compare a seleção antes e depois de uma mudança. Faça essa etapa antes de seguir para o próximo episódio, porque o curso é cumulativo e o checkpoint atual se torna a base da aula seguinte. Se houver divergência, use o relatório de suporte e registre o que foi observado. O objetivo é avançar com um estado conhecido e reproduzível, não apenas assistir ao conteúdo.</a:t>
+            </a:r>
+          </a:p>
+          <a:p xmlns:a="http://schemas.openxmlformats.org/drawingml/2006/main">
+            <a:r>
+              <a:t/>
+            </a:r>
+          </a:p>
+          <a:p xmlns:a="http://schemas.openxmlformats.org/drawingml/2006/main">
+            <a:r>
+              <a:t>O que destacar:</a:t>
+            </a:r>
+          </a:p>
+          <a:p xmlns:a="http://schemas.openxmlformats.org/drawingml/2006/main">
+            <a:r>
+              <a:t>- Mostre o checkpoint e indique no repositório onde ficam o roteiro, os comandos e as referências da aula.</a:t>
+            </a:r>
+          </a:p>
+          <a:p xmlns:a="http://schemas.openxmlformats.org/drawingml/2006/main">
+            <a:r>
+              <a:t/>
+            </a:r>
+          </a:p>
+          <a:p xmlns:a="http://schemas.openxmlformats.org/drawingml/2006/main">
+            <a:r>
+              <a:t>Transição:</a:t>
+            </a:r>
+          </a:p>
+          <a:p xmlns:a="http://schemas.openxmlformats.org/drawingml/2006/main">
+            <a:r>
+              <a:t>Encerre retomando a pergunta inicial e confirme que o aluno sabe qual ação executar depois do episódio 9.</a:t>
             </a:r>
           </a:p>
           <a:p xmlns:a="http://schemas.openxmlformats.org/drawingml/2006/main">
@@ -1897,7 +2547,57 @@
           <a:lstStyle xmlns:a="http://schemas.openxmlformats.org/drawingml/2006/main"/>
           <a:p xmlns:a="http://schemas.openxmlformats.org/drawingml/2006/main">
             <a:r>
-              <a:t>Explique os três resultados observáveis da aula: Comparar manifests; Selecionar modified+; Usar defer com clareza.</a:t>
+              <a:t>[Roteiro recomendado]</a:t>
+            </a:r>
+          </a:p>
+          <a:p xmlns:a="http://schemas.openxmlformats.org/drawingml/2006/main">
+            <a:r>
+              <a:t>[Tempo sugerido: 01:00]</a:t>
+            </a:r>
+          </a:p>
+          <a:p xmlns:a="http://schemas.openxmlformats.org/drawingml/2006/main">
+            <a:r>
+              <a:t/>
+            </a:r>
+          </a:p>
+          <a:p xmlns:a="http://schemas.openxmlformats.org/drawingml/2006/main">
+            <a:r>
+              <a:t>Fala sugerida:</a:t>
+            </a:r>
+          </a:p>
+          <a:p xmlns:a="http://schemas.openxmlformats.org/drawingml/2006/main">
+            <a:r>
+              <a:t>Ao final desta aula, você deverá conseguir comparar manifests, Selecionar modified+ e Usar defer com clareza. Esses resultados formam uma sequência: primeiro entendemos a regra, depois observamos sua representação no projeto e, por fim, comprovamos o comportamento no checkpoint. Se alguma dessas três partes não estiver clara, volte ao slide correspondente antes de executar a demonstração.</a:t>
+            </a:r>
+          </a:p>
+          <a:p xmlns:a="http://schemas.openxmlformats.org/drawingml/2006/main">
+            <a:r>
+              <a:t/>
+            </a:r>
+          </a:p>
+          <a:p xmlns:a="http://schemas.openxmlformats.org/drawingml/2006/main">
+            <a:r>
+              <a:t>O que destacar:</a:t>
+            </a:r>
+          </a:p>
+          <a:p xmlns:a="http://schemas.openxmlformats.org/drawingml/2006/main">
+            <a:r>
+              <a:t>- Percorra os objetivos da esquerda para a direita e apresente-os como resultados observáveis, não como uma agenda abstrata.</a:t>
+            </a:r>
+          </a:p>
+          <a:p xmlns:a="http://schemas.openxmlformats.org/drawingml/2006/main">
+            <a:r>
+              <a:t/>
+            </a:r>
+          </a:p>
+          <a:p xmlns:a="http://schemas.openxmlformats.org/drawingml/2006/main">
+            <a:r>
+              <a:t>Transição:</a:t>
+            </a:r>
+          </a:p>
+          <a:p xmlns:a="http://schemas.openxmlformats.org/drawingml/2006/main">
+            <a:r>
+              <a:t>Com esse ponto estabelecido, avance para “Artifact não é lixo de build”.</a:t>
             </a:r>
           </a:p>
           <a:p xmlns:a="http://schemas.openxmlformats.org/drawingml/2006/main">
@@ -2007,7 +2707,57 @@
           <a:lstStyle xmlns:a="http://schemas.openxmlformats.org/drawingml/2006/main"/>
           <a:p xmlns:a="http://schemas.openxmlformats.org/drawingml/2006/main">
             <a:r>
-              <a:t>O manifest anterior é a referência que permite calcular mudança. Desenvolva os pontos: Estado anterior; Estado atual; Diff de recursos.</a:t>
+              <a:t>[Roteiro recomendado]</a:t>
+            </a:r>
+          </a:p>
+          <a:p xmlns:a="http://schemas.openxmlformats.org/drawingml/2006/main">
+            <a:r>
+              <a:t>[Tempo sugerido: 01:10]</a:t>
+            </a:r>
+          </a:p>
+          <a:p xmlns:a="http://schemas.openxmlformats.org/drawingml/2006/main">
+            <a:r>
+              <a:t/>
+            </a:r>
+          </a:p>
+          <a:p xmlns:a="http://schemas.openxmlformats.org/drawingml/2006/main">
+            <a:r>
+              <a:t>Fala sugerida:</a:t>
+            </a:r>
+          </a:p>
+          <a:p xmlns:a="http://schemas.openxmlformats.org/drawingml/2006/main">
+            <a:r>
+              <a:t>A mensagem principal deste slide é: O manifest anterior é a referência que permite calcular mudança. Para tornar isso concreto, observe estado anterior, Estado atual e Diff de recursos. Esses pontos devem ser entendidos em conjunto; não são funcionalidades isoladas. No projeto, essa combinação transforma uma convenção informal em algo que pode ser revisado, testado ou consumido de maneira consistente.</a:t>
+            </a:r>
+          </a:p>
+          <a:p xmlns:a="http://schemas.openxmlformats.org/drawingml/2006/main">
+            <a:r>
+              <a:t/>
+            </a:r>
+          </a:p>
+          <a:p xmlns:a="http://schemas.openxmlformats.org/drawingml/2006/main">
+            <a:r>
+              <a:t>O que destacar:</a:t>
+            </a:r>
+          </a:p>
+          <a:p xmlns:a="http://schemas.openxmlformats.org/drawingml/2006/main">
+            <a:r>
+              <a:t>- Comece pelo título, leia a afirmação abaixo dele e depois desenvolva os itens sem repetir o texto palavra por palavra.</a:t>
+            </a:r>
+          </a:p>
+          <a:p xmlns:a="http://schemas.openxmlformats.org/drawingml/2006/main">
+            <a:r>
+              <a:t/>
+            </a:r>
+          </a:p>
+          <a:p xmlns:a="http://schemas.openxmlformats.org/drawingml/2006/main">
+            <a:r>
+              <a:t>Transição:</a:t>
+            </a:r>
+          </a:p>
+          <a:p xmlns:a="http://schemas.openxmlformats.org/drawingml/2006/main">
+            <a:r>
+              <a:t>Com esse ponto estabelecido, avance para “state:modified encontra a mudança”.</a:t>
             </a:r>
           </a:p>
           <a:p xmlns:a="http://schemas.openxmlformats.org/drawingml/2006/main">
@@ -2117,7 +2867,57 @@
           <a:lstStyle xmlns:a="http://schemas.openxmlformats.org/drawingml/2006/main"/>
           <a:p xmlns:a="http://schemas.openxmlformats.org/drawingml/2006/main">
             <a:r>
-              <a:t>O sufixo + inclui descendentes que podem ser afetados. Desenvolva os pontos: Modelo editado; Testes associados; Consumidores descendentes.</a:t>
+              <a:t>[Roteiro recomendado]</a:t>
+            </a:r>
+          </a:p>
+          <a:p xmlns:a="http://schemas.openxmlformats.org/drawingml/2006/main">
+            <a:r>
+              <a:t>[Tempo sugerido: 01:10]</a:t>
+            </a:r>
+          </a:p>
+          <a:p xmlns:a="http://schemas.openxmlformats.org/drawingml/2006/main">
+            <a:r>
+              <a:t/>
+            </a:r>
+          </a:p>
+          <a:p xmlns:a="http://schemas.openxmlformats.org/drawingml/2006/main">
+            <a:r>
+              <a:t>Fala sugerida:</a:t>
+            </a:r>
+          </a:p>
+          <a:p xmlns:a="http://schemas.openxmlformats.org/drawingml/2006/main">
+            <a:r>
+              <a:t>A mensagem principal deste slide é: O sufixo + inclui descendentes que podem ser afetados. Para tornar isso concreto, observe modelo editado, Testes associados e Consumidores descendentes. Esses pontos devem ser entendidos em conjunto; não são funcionalidades isoladas. No projeto, essa combinação transforma uma convenção informal em algo que pode ser revisado, testado ou consumido de maneira consistente.</a:t>
+            </a:r>
+          </a:p>
+          <a:p xmlns:a="http://schemas.openxmlformats.org/drawingml/2006/main">
+            <a:r>
+              <a:t/>
+            </a:r>
+          </a:p>
+          <a:p xmlns:a="http://schemas.openxmlformats.org/drawingml/2006/main">
+            <a:r>
+              <a:t>O que destacar:</a:t>
+            </a:r>
+          </a:p>
+          <a:p xmlns:a="http://schemas.openxmlformats.org/drawingml/2006/main">
+            <a:r>
+              <a:t>- Comece pelo título, leia a afirmação abaixo dele e depois desenvolva os itens sem repetir o texto palavra por palavra.</a:t>
+            </a:r>
+          </a:p>
+          <a:p xmlns:a="http://schemas.openxmlformats.org/drawingml/2006/main">
+            <a:r>
+              <a:t/>
+            </a:r>
+          </a:p>
+          <a:p xmlns:a="http://schemas.openxmlformats.org/drawingml/2006/main">
+            <a:r>
+              <a:t>Transição:</a:t>
+            </a:r>
+          </a:p>
+          <a:p xmlns:a="http://schemas.openxmlformats.org/drawingml/2006/main">
+            <a:r>
+              <a:t>Com esse ponto estabelecido, avance para “state:modified encontra a mudança”.</a:t>
             </a:r>
           </a:p>
           <a:p xmlns:a="http://schemas.openxmlformats.org/drawingml/2006/main">
@@ -2227,7 +3027,57 @@
           <a:lstStyle xmlns:a="http://schemas.openxmlformats.org/drawingml/2006/main"/>
           <a:p xmlns:a="http://schemas.openxmlformats.org/drawingml/2006/main">
             <a:r>
-              <a:t>Use a composição para explicar visualmente: O sufixo + inclui descendentes que podem ser afetados. Modelo editado Testes associados Consumidores descendentes</a:t>
+              <a:t>[Roteiro recomendado]</a:t>
+            </a:r>
+          </a:p>
+          <a:p xmlns:a="http://schemas.openxmlformats.org/drawingml/2006/main">
+            <a:r>
+              <a:t>[Tempo sugerido: 00:55]</a:t>
+            </a:r>
+          </a:p>
+          <a:p xmlns:a="http://schemas.openxmlformats.org/drawingml/2006/main">
+            <a:r>
+              <a:t/>
+            </a:r>
+          </a:p>
+          <a:p xmlns:a="http://schemas.openxmlformats.org/drawingml/2006/main">
+            <a:r>
+              <a:t>Fala sugerida:</a:t>
+            </a:r>
+          </a:p>
+          <a:p xmlns:a="http://schemas.openxmlformats.org/drawingml/2006/main">
+            <a:r>
+              <a:t>Agora vamos ler a ideia visualmente. O sufixo + inclui descendentes que podem ser afetados. Siga a composição na ordem mostrada e conecte mudou, Filhos, Testes e Exposures. A imagem ou o fluxo não cria uma regra nova; ele torna visível a relação que acabamos de explicar. Use a disposição dos elementos para reforçar causa, dependência ou comparação.</a:t>
+            </a:r>
+          </a:p>
+          <a:p xmlns:a="http://schemas.openxmlformats.org/drawingml/2006/main">
+            <a:r>
+              <a:t/>
+            </a:r>
+          </a:p>
+          <a:p xmlns:a="http://schemas.openxmlformats.org/drawingml/2006/main">
+            <a:r>
+              <a:t>O que destacar:</a:t>
+            </a:r>
+          </a:p>
+          <a:p xmlns:a="http://schemas.openxmlformats.org/drawingml/2006/main">
+            <a:r>
+              <a:t>- Acompanhe o fluxo ou a comparação com o cursor e preserve a ordem de leitura do slide.</a:t>
+            </a:r>
+          </a:p>
+          <a:p xmlns:a="http://schemas.openxmlformats.org/drawingml/2006/main">
+            <a:r>
+              <a:t/>
+            </a:r>
+          </a:p>
+          <a:p xmlns:a="http://schemas.openxmlformats.org/drawingml/2006/main">
+            <a:r>
+              <a:t>Transição:</a:t>
+            </a:r>
+          </a:p>
+          <a:p xmlns:a="http://schemas.openxmlformats.org/drawingml/2006/main">
+            <a:r>
+              <a:t>Com esse ponto estabelecido, avance para “Seleção mínima ingênua perde risco”.</a:t>
             </a:r>
           </a:p>
           <a:p xmlns:a="http://schemas.openxmlformats.org/drawingml/2006/main">
@@ -2337,7 +3187,57 @@
           <a:lstStyle xmlns:a="http://schemas.openxmlformats.org/drawingml/2006/main"/>
           <a:p xmlns:a="http://schemas.openxmlformats.org/drawingml/2006/main">
             <a:r>
-              <a:t>Testar apenas o arquivo alterado pode ignorar contratos e consumidores. Desenvolva os pontos: Impacto no DAG; Testes indiretos; Dependências públicas.</a:t>
+              <a:t>[Roteiro recomendado]</a:t>
+            </a:r>
+          </a:p>
+          <a:p xmlns:a="http://schemas.openxmlformats.org/drawingml/2006/main">
+            <a:r>
+              <a:t>[Tempo sugerido: 01:10]</a:t>
+            </a:r>
+          </a:p>
+          <a:p xmlns:a="http://schemas.openxmlformats.org/drawingml/2006/main">
+            <a:r>
+              <a:t/>
+            </a:r>
+          </a:p>
+          <a:p xmlns:a="http://schemas.openxmlformats.org/drawingml/2006/main">
+            <a:r>
+              <a:t>Fala sugerida:</a:t>
+            </a:r>
+          </a:p>
+          <a:p xmlns:a="http://schemas.openxmlformats.org/drawingml/2006/main">
+            <a:r>
+              <a:t>A mensagem principal deste slide é: Testar apenas o arquivo alterado pode ignorar contratos e consumidores. Para tornar isso concreto, observe impacto no DAG, Testes indiretos e Dependências públicas. Esses pontos devem ser entendidos em conjunto; não são funcionalidades isoladas. No projeto, essa combinação transforma uma convenção informal em algo que pode ser revisado, testado ou consumido de maneira consistente.</a:t>
+            </a:r>
+          </a:p>
+          <a:p xmlns:a="http://schemas.openxmlformats.org/drawingml/2006/main">
+            <a:r>
+              <a:t/>
+            </a:r>
+          </a:p>
+          <a:p xmlns:a="http://schemas.openxmlformats.org/drawingml/2006/main">
+            <a:r>
+              <a:t>O que destacar:</a:t>
+            </a:r>
+          </a:p>
+          <a:p xmlns:a="http://schemas.openxmlformats.org/drawingml/2006/main">
+            <a:r>
+              <a:t>- Comece pelo título, leia a afirmação abaixo dele e depois desenvolva os itens sem repetir o texto palavra por palavra.</a:t>
+            </a:r>
+          </a:p>
+          <a:p xmlns:a="http://schemas.openxmlformats.org/drawingml/2006/main">
+            <a:r>
+              <a:t/>
+            </a:r>
+          </a:p>
+          <a:p xmlns:a="http://schemas.openxmlformats.org/drawingml/2006/main">
+            <a:r>
+              <a:t>Transição:</a:t>
+            </a:r>
+          </a:p>
+          <a:p xmlns:a="http://schemas.openxmlformats.org/drawingml/2006/main">
+            <a:r>
+              <a:t>Com esse ponto estabelecido, avance para “Seleção mínima ingênua perde risco”.</a:t>
             </a:r>
           </a:p>
           <a:p xmlns:a="http://schemas.openxmlformats.org/drawingml/2006/main">
@@ -2447,7 +3347,57 @@
           <a:lstStyle xmlns:a="http://schemas.openxmlformats.org/drawingml/2006/main"/>
           <a:p xmlns:a="http://schemas.openxmlformats.org/drawingml/2006/main">
             <a:r>
-              <a:t>Use a composição para explicar visualmente: Testar apenas o arquivo alterado pode ignorar contratos e consumidores. Impacto no DAG Testes indiretos Dependências públicas</a:t>
+              <a:t>[Roteiro recomendado]</a:t>
+            </a:r>
+          </a:p>
+          <a:p xmlns:a="http://schemas.openxmlformats.org/drawingml/2006/main">
+            <a:r>
+              <a:t>[Tempo sugerido: 00:55]</a:t>
+            </a:r>
+          </a:p>
+          <a:p xmlns:a="http://schemas.openxmlformats.org/drawingml/2006/main">
+            <a:r>
+              <a:t/>
+            </a:r>
+          </a:p>
+          <a:p xmlns:a="http://schemas.openxmlformats.org/drawingml/2006/main">
+            <a:r>
+              <a:t>Fala sugerida:</a:t>
+            </a:r>
+          </a:p>
+          <a:p xmlns:a="http://schemas.openxmlformats.org/drawingml/2006/main">
+            <a:r>
+              <a:t>Agora vamos ler a ideia visualmente. Testar apenas o arquivo alterado pode ignorar contratos e consumidores. Siga a composição na ordem mostrada e conecte arquivo, Impacto, Impacto no DAG, Testes indiretos e Dependências públicas. A imagem ou o fluxo não cria uma regra nova; ele torna visível a relação que acabamos de explicar. Use a disposição dos elementos para reforçar causa, dependência ou comparação.</a:t>
+            </a:r>
+          </a:p>
+          <a:p xmlns:a="http://schemas.openxmlformats.org/drawingml/2006/main">
+            <a:r>
+              <a:t/>
+            </a:r>
+          </a:p>
+          <a:p xmlns:a="http://schemas.openxmlformats.org/drawingml/2006/main">
+            <a:r>
+              <a:t>O que destacar:</a:t>
+            </a:r>
+          </a:p>
+          <a:p xmlns:a="http://schemas.openxmlformats.org/drawingml/2006/main">
+            <a:r>
+              <a:t>- Acompanhe o fluxo ou a comparação com o cursor e preserve a ordem de leitura do slide.</a:t>
+            </a:r>
+          </a:p>
+          <a:p xmlns:a="http://schemas.openxmlformats.org/drawingml/2006/main">
+            <a:r>
+              <a:t/>
+            </a:r>
+          </a:p>
+          <a:p xmlns:a="http://schemas.openxmlformats.org/drawingml/2006/main">
+            <a:r>
+              <a:t>Transição:</a:t>
+            </a:r>
+          </a:p>
+          <a:p xmlns:a="http://schemas.openxmlformats.org/drawingml/2006/main">
+            <a:r>
+              <a:t>Com esse ponto estabelecido, avance para “Defer reutiliza relações de outro estado”.</a:t>
             </a:r>
           </a:p>
           <a:p xmlns:a="http://schemas.openxmlformats.org/drawingml/2006/main">
@@ -2557,7 +3507,57 @@
           <a:lstStyle xmlns:a="http://schemas.openxmlformats.org/drawingml/2006/main"/>
           <a:p xmlns:a="http://schemas.openxmlformats.org/drawingml/2006/main">
             <a:r>
-              <a:t>Modelos não construídos localmente podem apontar para produção ou staging. Desenvolva os pontos: Resolve refs; Evita recomputação; Exige estado confiável.</a:t>
+              <a:t>[Roteiro recomendado]</a:t>
+            </a:r>
+          </a:p>
+          <a:p xmlns:a="http://schemas.openxmlformats.org/drawingml/2006/main">
+            <a:r>
+              <a:t>[Tempo sugerido: 01:10]</a:t>
+            </a:r>
+          </a:p>
+          <a:p xmlns:a="http://schemas.openxmlformats.org/drawingml/2006/main">
+            <a:r>
+              <a:t/>
+            </a:r>
+          </a:p>
+          <a:p xmlns:a="http://schemas.openxmlformats.org/drawingml/2006/main">
+            <a:r>
+              <a:t>Fala sugerida:</a:t>
+            </a:r>
+          </a:p>
+          <a:p xmlns:a="http://schemas.openxmlformats.org/drawingml/2006/main">
+            <a:r>
+              <a:t>A mensagem principal deste slide é: Modelos não construídos localmente podem apontar para produção ou staging. Para tornar isso concreto, observe resolve refs, Evita recomputação e Exige estado confiável. Esses pontos devem ser entendidos em conjunto; não são funcionalidades isoladas. No projeto, essa combinação transforma uma convenção informal em algo que pode ser revisado, testado ou consumido de maneira consistente.</a:t>
+            </a:r>
+          </a:p>
+          <a:p xmlns:a="http://schemas.openxmlformats.org/drawingml/2006/main">
+            <a:r>
+              <a:t/>
+            </a:r>
+          </a:p>
+          <a:p xmlns:a="http://schemas.openxmlformats.org/drawingml/2006/main">
+            <a:r>
+              <a:t>O que destacar:</a:t>
+            </a:r>
+          </a:p>
+          <a:p xmlns:a="http://schemas.openxmlformats.org/drawingml/2006/main">
+            <a:r>
+              <a:t>- Comece pelo título, leia a afirmação abaixo dele e depois desenvolva os itens sem repetir o texto palavra por palavra.</a:t>
+            </a:r>
+          </a:p>
+          <a:p xmlns:a="http://schemas.openxmlformats.org/drawingml/2006/main">
+            <a:r>
+              <a:t/>
+            </a:r>
+          </a:p>
+          <a:p xmlns:a="http://schemas.openxmlformats.org/drawingml/2006/main">
+            <a:r>
+              <a:t>Transição:</a:t>
+            </a:r>
+          </a:p>
+          <a:p xmlns:a="http://schemas.openxmlformats.org/drawingml/2006/main">
+            <a:r>
+              <a:t>Com esse ponto estabelecido, avance para “Defer reutiliza relações de outro estado”.</a:t>
             </a:r>
           </a:p>
           <a:p xmlns:a="http://schemas.openxmlformats.org/drawingml/2006/main">
@@ -2699,7 +3699,7 @@
   </p:cSld>
   <p:clrMap bg1="lt1" tx1="dk1" bg2="lt2" tx2="dk2" accent1="accent1" accent2="accent2" accent3="accent3" accent4="accent4" accent5="accent5" accent6="accent6" hlink="hlink" folHlink="folHlink"/>
   <p:sldLayoutIdLst>
-    <p:sldLayoutId xmlns:r="http://schemas.openxmlformats.org/officeDocument/2006/relationships" id="2147483649" r:id="R4efa1b3460f1444b"/>
+    <p:sldLayoutId xmlns:r="http://schemas.openxmlformats.org/officeDocument/2006/relationships" id="2147483649" r:id="Rfde14aa5a8c346cc"/>
   </p:sldLayoutIdLst>
   <p:txStyles>
     <p:titleStyle>
@@ -2997,8 +3997,8 @@
   </p:cSld>
   <p:clrMap bg1="lt1" tx1="dk1" bg2="lt2" tx2="dk2" accent1="accent1" accent2="accent2" accent3="accent3" accent4="accent4" accent5="accent5" accent6="accent6" hlink="hlink" folHlink="folHlink"/>
   <p:sldLayoutIdLst>
-    <p:sldLayoutId xmlns:r="http://schemas.openxmlformats.org/officeDocument/2006/relationships" id="2147483651" r:id="Rb87622b6c3e3416d"/>
-    <p:sldLayoutId xmlns:r="http://schemas.openxmlformats.org/officeDocument/2006/relationships" id="2147483652" r:id="R90477355d2d94579"/>
+    <p:sldLayoutId xmlns:r="http://schemas.openxmlformats.org/officeDocument/2006/relationships" id="2147483651" r:id="R869dc4442d154b83"/>
+    <p:sldLayoutId xmlns:r="http://schemas.openxmlformats.org/officeDocument/2006/relationships" id="2147483652" r:id="R28d12694515f487d"/>
   </p:sldLayoutIdLst>
 </p:sldMaster>
 </file>
@@ -3522,14 +4522,14 @@
       </p:grpSpPr>
       <p:pic>
         <p:nvPicPr>
-          <p:cNvPr id="9" name="" descr="Ilustração conceitual autoral da capa: EPISÓDIO 9 — CI inteligente com artifacts, state e defer."/>
+          <p:cNvPr id="10" name="" descr="Ilustração conceitual autoral da capa: EPISÓDIO 9 — CI inteligente com artifacts, state e defer."/>
           <p:cNvPicPr>
             <a:picLocks xmlns:a="http://schemas.openxmlformats.org/drawingml/2006/main" noChangeAspect="1"/>
           </p:cNvPicPr>
           <p:nvPr/>
         </p:nvPicPr>
         <p:blipFill>
-          <a:blip xmlns:r="http://schemas.openxmlformats.org/officeDocument/2006/relationships" xmlns:a="http://schemas.openxmlformats.org/drawingml/2006/main" r:embed="Rb9ed0e7b2a334269"/>
+          <a:blip xmlns:r="http://schemas.openxmlformats.org/officeDocument/2006/relationships" xmlns:a="http://schemas.openxmlformats.org/drawingml/2006/main" r:embed="R4931475c34e74e9c"/>
           <a:srcRect xmlns:a="http://schemas.openxmlformats.org/drawingml/2006/main" l="19785" t="0" r="19785" b="0"/>
           <a:stretch xmlns:a="http://schemas.openxmlformats.org/drawingml/2006/main">
             <a:fillRect l="0" t="0" r="0" b="0"/>
@@ -3642,6 +4642,7 @@
           <a:lstStyle xmlns:a="http://schemas.openxmlformats.org/drawingml/2006/main"/>
           <a:p xmlns:a="http://schemas.openxmlformats.org/drawingml/2006/main">
             <a:pPr>
+              <a:buNone/>
               <a:defRPr sz="1350" b="1">
                 <a:solidFill>
                   <a:srgbClr val="1EC5FF"/>
@@ -3692,6 +4693,7 @@
           <a:lstStyle xmlns:a="http://schemas.openxmlformats.org/drawingml/2006/main"/>
           <a:p xmlns:a="http://schemas.openxmlformats.org/drawingml/2006/main">
             <a:pPr>
+              <a:buNone/>
               <a:defRPr sz="3225" b="1">
                 <a:solidFill>
                   <a:srgbClr val="FFFFFF"/>
@@ -3742,6 +4744,7 @@
           <a:lstStyle xmlns:a="http://schemas.openxmlformats.org/drawingml/2006/main"/>
           <a:p xmlns:a="http://schemas.openxmlformats.org/drawingml/2006/main">
             <a:pPr>
+              <a:buNone/>
               <a:defRPr sz="1800">
                 <a:solidFill>
                   <a:srgbClr val="E2F2FF"/>
@@ -3823,6 +4826,7 @@
           <a:lstStyle xmlns:a="http://schemas.openxmlformats.org/drawingml/2006/main"/>
           <a:p xmlns:a="http://schemas.openxmlformats.org/drawingml/2006/main">
             <a:pPr>
+              <a:buNone/>
               <a:defRPr sz="1200" b="1">
                 <a:solidFill>
                   <a:srgbClr val="FFFFFF">
@@ -3914,6 +4918,7 @@
           <a:lstStyle xmlns:a="http://schemas.openxmlformats.org/drawingml/2006/main"/>
           <a:p xmlns:a="http://schemas.openxmlformats.org/drawingml/2006/main">
             <a:pPr>
+              <a:buNone/>
               <a:defRPr sz="2925" b="1">
                 <a:solidFill>
                   <a:srgbClr val="FFFFFF"/>
@@ -3964,6 +4969,7 @@
           <a:lstStyle xmlns:a="http://schemas.openxmlformats.org/drawingml/2006/main"/>
           <a:p xmlns:a="http://schemas.openxmlformats.org/drawingml/2006/main">
             <a:pPr>
+              <a:buNone/>
               <a:defRPr sz="1950" b="1">
                 <a:solidFill>
                   <a:srgbClr val="FFFFFF"/>
@@ -4020,14 +5026,14 @@
       </p:sp>
       <p:pic>
         <p:nvPicPr>
-          <p:cNvPr id="13" name="" descr="Figura oficial da documentação dbt usada para explicar: Defer reutiliza relações de outro estado — Modelos não construídos localmente podem apontar para produção ou staging.."/>
+          <p:cNvPr id="15" name="" descr="Figura oficial da documentação dbt usada para explicar: Defer reutiliza relações de outro estado — Modelos não construídos localmente podem apontar para produção ou staging.."/>
           <p:cNvPicPr>
             <a:picLocks xmlns:a="http://schemas.openxmlformats.org/drawingml/2006/main" noChangeAspect="1"/>
           </p:cNvPicPr>
           <p:nvPr/>
         </p:nvPicPr>
         <p:blipFill>
-          <a:blip xmlns:r="http://schemas.openxmlformats.org/officeDocument/2006/relationships" xmlns:a="http://schemas.openxmlformats.org/drawingml/2006/main" r:embed="R9a2c2d29627d411b"/>
+          <a:blip xmlns:r="http://schemas.openxmlformats.org/officeDocument/2006/relationships" xmlns:a="http://schemas.openxmlformats.org/drawingml/2006/main" r:embed="Rb46546c42ecd4b6d"/>
           <a:stretch xmlns:a="http://schemas.openxmlformats.org/drawingml/2006/main"/>
         </p:blipFill>
         <p:spPr>
@@ -4073,6 +5079,7 @@
           <a:lstStyle xmlns:a="http://schemas.openxmlformats.org/drawingml/2006/main"/>
           <a:p xmlns:a="http://schemas.openxmlformats.org/drawingml/2006/main">
             <a:pPr>
+              <a:buNone/>
               <a:defRPr sz="900" i="1">
                 <a:solidFill>
                   <a:srgbClr val="5C6F86"/>
@@ -4123,6 +5130,7 @@
           <a:lstStyle xmlns:a="http://schemas.openxmlformats.org/drawingml/2006/main"/>
           <a:p xmlns:a="http://schemas.openxmlformats.org/drawingml/2006/main">
             <a:pPr>
+              <a:buNone/>
               <a:defRPr sz="1050" b="1">
                 <a:solidFill>
                   <a:srgbClr val="1EC5FF"/>
@@ -4206,6 +5214,7 @@
           <a:lstStyle xmlns:a="http://schemas.openxmlformats.org/drawingml/2006/main"/>
           <a:p xmlns:a="http://schemas.openxmlformats.org/drawingml/2006/main">
             <a:pPr>
+              <a:buNone/>
               <a:defRPr sz="825">
                 <a:solidFill>
                   <a:srgbClr val="FFFFFF">
@@ -4260,6 +5269,7 @@
           <a:lstStyle xmlns:a="http://schemas.openxmlformats.org/drawingml/2006/main"/>
           <a:p xmlns:a="http://schemas.openxmlformats.org/drawingml/2006/main">
             <a:pPr algn="r">
+              <a:buNone/>
               <a:defRPr sz="825" b="1">
                 <a:solidFill>
                   <a:srgbClr val="FFFFFF">
@@ -4351,6 +5361,7 @@
           <a:lstStyle xmlns:a="http://schemas.openxmlformats.org/drawingml/2006/main"/>
           <a:p xmlns:a="http://schemas.openxmlformats.org/drawingml/2006/main">
             <a:pPr>
+              <a:buNone/>
               <a:defRPr sz="2925" b="1">
                 <a:solidFill>
                   <a:srgbClr val="FFFFFF"/>
@@ -4401,6 +5412,7 @@
           <a:lstStyle xmlns:a="http://schemas.openxmlformats.org/drawingml/2006/main"/>
           <a:p xmlns:a="http://schemas.openxmlformats.org/drawingml/2006/main">
             <a:pPr>
+              <a:buNone/>
               <a:defRPr sz="1650">
                 <a:solidFill>
                   <a:srgbClr val="E2F2FF"/>
@@ -4451,6 +5463,7 @@
           <a:lstStyle xmlns:a="http://schemas.openxmlformats.org/drawingml/2006/main"/>
           <a:p xmlns:a="http://schemas.openxmlformats.org/drawingml/2006/main">
             <a:pPr>
+              <a:buNone/>
               <a:defRPr sz="1800">
                 <a:solidFill>
                   <a:srgbClr val="FFFFFF"/>
@@ -4468,6 +5481,7 @@
           </a:p>
           <a:p xmlns:a="http://schemas.openxmlformats.org/drawingml/2006/main">
             <a:pPr>
+              <a:buNone/>
               <a:defRPr sz="1800">
                 <a:solidFill>
                   <a:srgbClr val="FFFFFF"/>
@@ -4485,6 +5499,7 @@
           </a:p>
           <a:p xmlns:a="http://schemas.openxmlformats.org/drawingml/2006/main">
             <a:pPr>
+              <a:buNone/>
               <a:defRPr sz="1800">
                 <a:solidFill>
                   <a:srgbClr val="FFFFFF"/>
@@ -4609,6 +5624,7 @@
           <a:lstStyle xmlns:a="http://schemas.openxmlformats.org/drawingml/2006/main"/>
           <a:p xmlns:a="http://schemas.openxmlformats.org/drawingml/2006/main">
             <a:pPr algn="ctr">
+              <a:buNone/>
               <a:defRPr sz="4650" b="1">
                 <a:solidFill>
                   <a:srgbClr val="1EC5FF"/>
@@ -4659,6 +5675,7 @@
           <a:lstStyle xmlns:a="http://schemas.openxmlformats.org/drawingml/2006/main"/>
           <a:p xmlns:a="http://schemas.openxmlformats.org/drawingml/2006/main">
             <a:pPr>
+              <a:buNone/>
               <a:defRPr sz="1050" b="1">
                 <a:solidFill>
                   <a:srgbClr val="1EC5FF"/>
@@ -4742,6 +5759,7 @@
           <a:lstStyle xmlns:a="http://schemas.openxmlformats.org/drawingml/2006/main"/>
           <a:p xmlns:a="http://schemas.openxmlformats.org/drawingml/2006/main">
             <a:pPr>
+              <a:buNone/>
               <a:defRPr sz="825">
                 <a:solidFill>
                   <a:srgbClr val="FFFFFF">
@@ -4796,6 +5814,7 @@
           <a:lstStyle xmlns:a="http://schemas.openxmlformats.org/drawingml/2006/main"/>
           <a:p xmlns:a="http://schemas.openxmlformats.org/drawingml/2006/main">
             <a:pPr algn="r">
+              <a:buNone/>
               <a:defRPr sz="825" b="1">
                 <a:solidFill>
                   <a:srgbClr val="FFFFFF">
@@ -4879,6 +5898,7 @@
           <a:lstStyle xmlns:a="http://schemas.openxmlformats.org/drawingml/2006/main"/>
           <a:p xmlns:a="http://schemas.openxmlformats.org/drawingml/2006/main">
             <a:pPr>
+              <a:buNone/>
               <a:defRPr sz="2925" b="1">
                 <a:solidFill>
                   <a:srgbClr val="0B1F3A"/>
@@ -4935,6 +5955,7 @@
           <a:lstStyle xmlns:a="http://schemas.openxmlformats.org/drawingml/2006/main"/>
           <a:p xmlns:a="http://schemas.openxmlformats.org/drawingml/2006/main">
             <a:pPr algn="ctr">
+              <a:buNone/>
               <a:defRPr sz="1500" b="1">
                 <a:solidFill>
                   <a:srgbClr val="0B1F3A"/>
@@ -4991,6 +6012,7 @@
           <a:lstStyle xmlns:a="http://schemas.openxmlformats.org/drawingml/2006/main"/>
           <a:p xmlns:a="http://schemas.openxmlformats.org/drawingml/2006/main">
             <a:pPr algn="ctr">
+              <a:buNone/>
               <a:defRPr sz="1500" b="1">
                 <a:solidFill>
                   <a:srgbClr val="0B1F3A"/>
@@ -5047,6 +6069,7 @@
           <a:lstStyle xmlns:a="http://schemas.openxmlformats.org/drawingml/2006/main"/>
           <a:p xmlns:a="http://schemas.openxmlformats.org/drawingml/2006/main">
             <a:pPr algn="ctr">
+              <a:buNone/>
               <a:defRPr sz="1500" b="1">
                 <a:solidFill>
                   <a:srgbClr val="0B1F3A"/>
@@ -5097,6 +6120,7 @@
           <a:lstStyle xmlns:a="http://schemas.openxmlformats.org/drawingml/2006/main"/>
           <a:p xmlns:a="http://schemas.openxmlformats.org/drawingml/2006/main">
             <a:pPr>
+              <a:buNone/>
               <a:defRPr sz="1050" b="1">
                 <a:solidFill>
                   <a:srgbClr val="1565C0"/>
@@ -5180,6 +6204,7 @@
           <a:lstStyle xmlns:a="http://schemas.openxmlformats.org/drawingml/2006/main"/>
           <a:p xmlns:a="http://schemas.openxmlformats.org/drawingml/2006/main">
             <a:pPr>
+              <a:buNone/>
               <a:defRPr sz="825">
                 <a:solidFill>
                   <a:srgbClr val="0B1F3A">
@@ -5234,6 +6259,7 @@
           <a:lstStyle xmlns:a="http://schemas.openxmlformats.org/drawingml/2006/main"/>
           <a:p xmlns:a="http://schemas.openxmlformats.org/drawingml/2006/main">
             <a:pPr algn="r">
+              <a:buNone/>
               <a:defRPr sz="825" b="1">
                 <a:solidFill>
                   <a:srgbClr val="0B1F3A">
@@ -5325,6 +6351,7 @@
           <a:lstStyle xmlns:a="http://schemas.openxmlformats.org/drawingml/2006/main"/>
           <a:p xmlns:a="http://schemas.openxmlformats.org/drawingml/2006/main">
             <a:pPr>
+              <a:buNone/>
               <a:defRPr sz="2925" b="1">
                 <a:solidFill>
                   <a:srgbClr val="FFFFFF"/>
@@ -5410,6 +6437,7 @@
           <a:lstStyle xmlns:a="http://schemas.openxmlformats.org/drawingml/2006/main"/>
           <a:p xmlns:a="http://schemas.openxmlformats.org/drawingml/2006/main">
             <a:pPr>
+              <a:buNone/>
               <a:defRPr sz="1875" b="1">
                 <a:solidFill>
                   <a:srgbClr val="1EC5FF"/>
@@ -5460,6 +6488,7 @@
           <a:lstStyle xmlns:a="http://schemas.openxmlformats.org/drawingml/2006/main"/>
           <a:p xmlns:a="http://schemas.openxmlformats.org/drawingml/2006/main">
             <a:pPr>
+              <a:buNone/>
               <a:defRPr sz="1425">
                 <a:solidFill>
                   <a:srgbClr val="E2F2FF"/>
@@ -5510,6 +6539,7 @@
           <a:lstStyle xmlns:a="http://schemas.openxmlformats.org/drawingml/2006/main"/>
           <a:p xmlns:a="http://schemas.openxmlformats.org/drawingml/2006/main">
             <a:pPr>
+              <a:buNone/>
               <a:defRPr sz="1050" b="1">
                 <a:solidFill>
                   <a:srgbClr val="1EC5FF"/>
@@ -5593,6 +6623,7 @@
           <a:lstStyle xmlns:a="http://schemas.openxmlformats.org/drawingml/2006/main"/>
           <a:p xmlns:a="http://schemas.openxmlformats.org/drawingml/2006/main">
             <a:pPr>
+              <a:buNone/>
               <a:defRPr sz="825">
                 <a:solidFill>
                   <a:srgbClr val="FFFFFF">
@@ -5647,6 +6678,7 @@
           <a:lstStyle xmlns:a="http://schemas.openxmlformats.org/drawingml/2006/main"/>
           <a:p xmlns:a="http://schemas.openxmlformats.org/drawingml/2006/main">
             <a:pPr algn="r">
+              <a:buNone/>
               <a:defRPr sz="825" b="1">
                 <a:solidFill>
                   <a:srgbClr val="FFFFFF">
@@ -5730,6 +6762,7 @@
           <a:lstStyle xmlns:a="http://schemas.openxmlformats.org/drawingml/2006/main"/>
           <a:p xmlns:a="http://schemas.openxmlformats.org/drawingml/2006/main">
             <a:pPr>
+              <a:buNone/>
               <a:defRPr sz="2925" b="1">
                 <a:solidFill>
                   <a:srgbClr val="0B1F3A"/>
@@ -5780,6 +6813,7 @@
           <a:lstStyle xmlns:a="http://schemas.openxmlformats.org/drawingml/2006/main"/>
           <a:p xmlns:a="http://schemas.openxmlformats.org/drawingml/2006/main">
             <a:pPr>
+              <a:buNone/>
               <a:defRPr sz="3450" b="1">
                 <a:solidFill>
                   <a:srgbClr val="1565C0"/>
@@ -5830,6 +6864,7 @@
           <a:lstStyle xmlns:a="http://schemas.openxmlformats.org/drawingml/2006/main"/>
           <a:p xmlns:a="http://schemas.openxmlformats.org/drawingml/2006/main">
             <a:pPr>
+              <a:buNone/>
               <a:defRPr sz="1575" b="1">
                 <a:solidFill>
                   <a:srgbClr val="0B1F3A"/>
@@ -5911,6 +6946,7 @@
           <a:lstStyle xmlns:a="http://schemas.openxmlformats.org/drawingml/2006/main"/>
           <a:p xmlns:a="http://schemas.openxmlformats.org/drawingml/2006/main">
             <a:pPr>
+              <a:buNone/>
               <a:defRPr sz="3450" b="1">
                 <a:solidFill>
                   <a:srgbClr val="1565C0"/>
@@ -5961,6 +6997,7 @@
           <a:lstStyle xmlns:a="http://schemas.openxmlformats.org/drawingml/2006/main"/>
           <a:p xmlns:a="http://schemas.openxmlformats.org/drawingml/2006/main">
             <a:pPr>
+              <a:buNone/>
               <a:defRPr sz="1575" b="1">
                 <a:solidFill>
                   <a:srgbClr val="0B1F3A"/>
@@ -6042,6 +7079,7 @@
           <a:lstStyle xmlns:a="http://schemas.openxmlformats.org/drawingml/2006/main"/>
           <a:p xmlns:a="http://schemas.openxmlformats.org/drawingml/2006/main">
             <a:pPr>
+              <a:buNone/>
               <a:defRPr sz="3450" b="1">
                 <a:solidFill>
                   <a:srgbClr val="1565C0"/>
@@ -6092,6 +7130,7 @@
           <a:lstStyle xmlns:a="http://schemas.openxmlformats.org/drawingml/2006/main"/>
           <a:p xmlns:a="http://schemas.openxmlformats.org/drawingml/2006/main">
             <a:pPr>
+              <a:buNone/>
               <a:defRPr sz="1575" b="1">
                 <a:solidFill>
                   <a:srgbClr val="0B1F3A"/>
@@ -6142,6 +7181,7 @@
           <a:lstStyle xmlns:a="http://schemas.openxmlformats.org/drawingml/2006/main"/>
           <a:p xmlns:a="http://schemas.openxmlformats.org/drawingml/2006/main">
             <a:pPr>
+              <a:buNone/>
               <a:defRPr sz="1050" b="1">
                 <a:solidFill>
                   <a:srgbClr val="1565C0"/>
@@ -6225,6 +7265,7 @@
           <a:lstStyle xmlns:a="http://schemas.openxmlformats.org/drawingml/2006/main"/>
           <a:p xmlns:a="http://schemas.openxmlformats.org/drawingml/2006/main">
             <a:pPr>
+              <a:buNone/>
               <a:defRPr sz="825">
                 <a:solidFill>
                   <a:srgbClr val="0B1F3A">
@@ -6279,6 +7320,7 @@
           <a:lstStyle xmlns:a="http://schemas.openxmlformats.org/drawingml/2006/main"/>
           <a:p xmlns:a="http://schemas.openxmlformats.org/drawingml/2006/main">
             <a:pPr algn="r">
+              <a:buNone/>
               <a:defRPr sz="825" b="1">
                 <a:solidFill>
                   <a:srgbClr val="0B1F3A">
@@ -6370,6 +7412,7 @@
           <a:lstStyle xmlns:a="http://schemas.openxmlformats.org/drawingml/2006/main"/>
           <a:p xmlns:a="http://schemas.openxmlformats.org/drawingml/2006/main">
             <a:pPr>
+              <a:buNone/>
               <a:defRPr sz="1350" b="1">
                 <a:solidFill>
                   <a:srgbClr val="1EC5FF"/>
@@ -6420,6 +7463,7 @@
           <a:lstStyle xmlns:a="http://schemas.openxmlformats.org/drawingml/2006/main"/>
           <a:p xmlns:a="http://schemas.openxmlformats.org/drawingml/2006/main">
             <a:pPr>
+              <a:buNone/>
               <a:defRPr sz="3450" b="1">
                 <a:solidFill>
                   <a:srgbClr val="FFFFFF"/>
@@ -6470,6 +7514,7 @@
           <a:lstStyle xmlns:a="http://schemas.openxmlformats.org/drawingml/2006/main"/>
           <a:p xmlns:a="http://schemas.openxmlformats.org/drawingml/2006/main">
             <a:pPr>
+              <a:buNone/>
               <a:defRPr sz="1650">
                 <a:solidFill>
                   <a:srgbClr val="E2F2FF"/>
@@ -6594,6 +7639,7 @@
           <a:lstStyle xmlns:a="http://schemas.openxmlformats.org/drawingml/2006/main"/>
           <a:p xmlns:a="http://schemas.openxmlformats.org/drawingml/2006/main">
             <a:pPr>
+              <a:buNone/>
               <a:defRPr sz="1050" b="1">
                 <a:solidFill>
                   <a:srgbClr val="1EC5FF"/>
@@ -6677,6 +7723,7 @@
           <a:lstStyle xmlns:a="http://schemas.openxmlformats.org/drawingml/2006/main"/>
           <a:p xmlns:a="http://schemas.openxmlformats.org/drawingml/2006/main">
             <a:pPr>
+              <a:buNone/>
               <a:defRPr sz="825">
                 <a:solidFill>
                   <a:srgbClr val="FFFFFF">
@@ -6731,6 +7778,7 @@
           <a:lstStyle xmlns:a="http://schemas.openxmlformats.org/drawingml/2006/main"/>
           <a:p xmlns:a="http://schemas.openxmlformats.org/drawingml/2006/main">
             <a:pPr algn="r">
+              <a:buNone/>
               <a:defRPr sz="825" b="1">
                 <a:solidFill>
                   <a:srgbClr val="FFFFFF">
@@ -6814,6 +7862,7 @@
           <a:lstStyle xmlns:a="http://schemas.openxmlformats.org/drawingml/2006/main"/>
           <a:p xmlns:a="http://schemas.openxmlformats.org/drawingml/2006/main">
             <a:pPr>
+              <a:buNone/>
               <a:defRPr sz="2925" b="1">
                 <a:solidFill>
                   <a:srgbClr val="0B1F3A"/>
@@ -6864,6 +7913,7 @@
           <a:lstStyle xmlns:a="http://schemas.openxmlformats.org/drawingml/2006/main"/>
           <a:p xmlns:a="http://schemas.openxmlformats.org/drawingml/2006/main">
             <a:pPr>
+              <a:buNone/>
               <a:defRPr sz="3450" b="1">
                 <a:solidFill>
                   <a:srgbClr val="1565C0"/>
@@ -6914,6 +7964,7 @@
           <a:lstStyle xmlns:a="http://schemas.openxmlformats.org/drawingml/2006/main"/>
           <a:p xmlns:a="http://schemas.openxmlformats.org/drawingml/2006/main">
             <a:pPr>
+              <a:buNone/>
               <a:defRPr sz="1575" b="1">
                 <a:solidFill>
                   <a:srgbClr val="0B1F3A"/>
@@ -6995,6 +8046,7 @@
           <a:lstStyle xmlns:a="http://schemas.openxmlformats.org/drawingml/2006/main"/>
           <a:p xmlns:a="http://schemas.openxmlformats.org/drawingml/2006/main">
             <a:pPr>
+              <a:buNone/>
               <a:defRPr sz="3450" b="1">
                 <a:solidFill>
                   <a:srgbClr val="1565C0"/>
@@ -7045,6 +8097,7 @@
           <a:lstStyle xmlns:a="http://schemas.openxmlformats.org/drawingml/2006/main"/>
           <a:p xmlns:a="http://schemas.openxmlformats.org/drawingml/2006/main">
             <a:pPr>
+              <a:buNone/>
               <a:defRPr sz="1575" b="1">
                 <a:solidFill>
                   <a:srgbClr val="0B1F3A"/>
@@ -7126,6 +8179,7 @@
           <a:lstStyle xmlns:a="http://schemas.openxmlformats.org/drawingml/2006/main"/>
           <a:p xmlns:a="http://schemas.openxmlformats.org/drawingml/2006/main">
             <a:pPr>
+              <a:buNone/>
               <a:defRPr sz="3450" b="1">
                 <a:solidFill>
                   <a:srgbClr val="1565C0"/>
@@ -7176,6 +8230,7 @@
           <a:lstStyle xmlns:a="http://schemas.openxmlformats.org/drawingml/2006/main"/>
           <a:p xmlns:a="http://schemas.openxmlformats.org/drawingml/2006/main">
             <a:pPr>
+              <a:buNone/>
               <a:defRPr sz="1575" b="1">
                 <a:solidFill>
                   <a:srgbClr val="0B1F3A"/>
@@ -7226,6 +8281,7 @@
           <a:lstStyle xmlns:a="http://schemas.openxmlformats.org/drawingml/2006/main"/>
           <a:p xmlns:a="http://schemas.openxmlformats.org/drawingml/2006/main">
             <a:pPr>
+              <a:buNone/>
               <a:defRPr sz="1050" b="1">
                 <a:solidFill>
                   <a:srgbClr val="1565C0"/>
@@ -7309,6 +8365,7 @@
           <a:lstStyle xmlns:a="http://schemas.openxmlformats.org/drawingml/2006/main"/>
           <a:p xmlns:a="http://schemas.openxmlformats.org/drawingml/2006/main">
             <a:pPr>
+              <a:buNone/>
               <a:defRPr sz="825">
                 <a:solidFill>
                   <a:srgbClr val="0B1F3A">
@@ -7363,6 +8420,7 @@
           <a:lstStyle xmlns:a="http://schemas.openxmlformats.org/drawingml/2006/main"/>
           <a:p xmlns:a="http://schemas.openxmlformats.org/drawingml/2006/main">
             <a:pPr algn="r">
+              <a:buNone/>
               <a:defRPr sz="825" b="1">
                 <a:solidFill>
                   <a:srgbClr val="0B1F3A">
@@ -7454,6 +8512,7 @@
           <a:lstStyle xmlns:a="http://schemas.openxmlformats.org/drawingml/2006/main"/>
           <a:p xmlns:a="http://schemas.openxmlformats.org/drawingml/2006/main">
             <a:pPr>
+              <a:buNone/>
               <a:defRPr sz="5550" b="1">
                 <a:solidFill>
                   <a:srgbClr val="1EC5FF"/>
@@ -7504,6 +8563,7 @@
           <a:lstStyle xmlns:a="http://schemas.openxmlformats.org/drawingml/2006/main"/>
           <a:p xmlns:a="http://schemas.openxmlformats.org/drawingml/2006/main">
             <a:pPr>
+              <a:buNone/>
               <a:defRPr sz="2250" b="1">
                 <a:solidFill>
                   <a:srgbClr val="FFFFFF"/>
@@ -7587,6 +8647,7 @@
           <a:lstStyle xmlns:a="http://schemas.openxmlformats.org/drawingml/2006/main"/>
           <a:p xmlns:a="http://schemas.openxmlformats.org/drawingml/2006/main">
             <a:pPr>
+              <a:buNone/>
               <a:defRPr sz="1800">
                 <a:solidFill>
                   <a:srgbClr val="E2F2FF"/>
@@ -7637,6 +8698,7 @@
           <a:lstStyle xmlns:a="http://schemas.openxmlformats.org/drawingml/2006/main"/>
           <a:p xmlns:a="http://schemas.openxmlformats.org/drawingml/2006/main">
             <a:pPr>
+              <a:buNone/>
               <a:defRPr sz="1050" b="1">
                 <a:solidFill>
                   <a:srgbClr val="1EC5FF"/>
@@ -7720,6 +8782,7 @@
           <a:lstStyle xmlns:a="http://schemas.openxmlformats.org/drawingml/2006/main"/>
           <a:p xmlns:a="http://schemas.openxmlformats.org/drawingml/2006/main">
             <a:pPr>
+              <a:buNone/>
               <a:defRPr sz="825">
                 <a:solidFill>
                   <a:srgbClr val="FFFFFF">
@@ -7774,6 +8837,7 @@
           <a:lstStyle xmlns:a="http://schemas.openxmlformats.org/drawingml/2006/main"/>
           <a:p xmlns:a="http://schemas.openxmlformats.org/drawingml/2006/main">
             <a:pPr algn="r">
+              <a:buNone/>
               <a:defRPr sz="825" b="1">
                 <a:solidFill>
                   <a:srgbClr val="FFFFFF">
@@ -7857,6 +8921,7 @@
           <a:lstStyle xmlns:a="http://schemas.openxmlformats.org/drawingml/2006/main"/>
           <a:p xmlns:a="http://schemas.openxmlformats.org/drawingml/2006/main">
             <a:pPr>
+              <a:buNone/>
               <a:defRPr sz="2925" b="1">
                 <a:solidFill>
                   <a:srgbClr val="0B1F3A"/>
@@ -7907,6 +8972,7 @@
           <a:lstStyle xmlns:a="http://schemas.openxmlformats.org/drawingml/2006/main"/>
           <a:p xmlns:a="http://schemas.openxmlformats.org/drawingml/2006/main">
             <a:pPr>
+              <a:buNone/>
               <a:defRPr sz="1950">
                 <a:solidFill>
                   <a:srgbClr val="0B1F3A"/>
@@ -7924,6 +8990,7 @@
           </a:p>
           <a:p xmlns:a="http://schemas.openxmlformats.org/drawingml/2006/main">
             <a:pPr>
+              <a:buNone/>
               <a:defRPr sz="1950">
                 <a:solidFill>
                   <a:srgbClr val="0B1F3A"/>
@@ -7941,6 +9008,7 @@
           </a:p>
           <a:p xmlns:a="http://schemas.openxmlformats.org/drawingml/2006/main">
             <a:pPr>
+              <a:buNone/>
               <a:defRPr sz="1950">
                 <a:solidFill>
                   <a:srgbClr val="0B1F3A"/>
@@ -7991,6 +9059,7 @@
           <a:lstStyle xmlns:a="http://schemas.openxmlformats.org/drawingml/2006/main"/>
           <a:p xmlns:a="http://schemas.openxmlformats.org/drawingml/2006/main">
             <a:pPr>
+              <a:buNone/>
               <a:defRPr sz="1050" b="1">
                 <a:solidFill>
                   <a:srgbClr val="1565C0"/>
@@ -8074,6 +9143,7 @@
           <a:lstStyle xmlns:a="http://schemas.openxmlformats.org/drawingml/2006/main"/>
           <a:p xmlns:a="http://schemas.openxmlformats.org/drawingml/2006/main">
             <a:pPr>
+              <a:buNone/>
               <a:defRPr sz="825">
                 <a:solidFill>
                   <a:srgbClr val="0B1F3A">
@@ -8128,6 +9198,7 @@
           <a:lstStyle xmlns:a="http://schemas.openxmlformats.org/drawingml/2006/main"/>
           <a:p xmlns:a="http://schemas.openxmlformats.org/drawingml/2006/main">
             <a:pPr algn="r">
+              <a:buNone/>
               <a:defRPr sz="825" b="1">
                 <a:solidFill>
                   <a:srgbClr val="0B1F3A">
@@ -8219,6 +9290,7 @@
           <a:lstStyle xmlns:a="http://schemas.openxmlformats.org/drawingml/2006/main"/>
           <a:p xmlns:a="http://schemas.openxmlformats.org/drawingml/2006/main">
             <a:pPr>
+              <a:buNone/>
               <a:defRPr sz="1500" b="1">
                 <a:solidFill>
                   <a:srgbClr val="1EC5FF"/>
@@ -8269,6 +9341,7 @@
           <a:lstStyle xmlns:a="http://schemas.openxmlformats.org/drawingml/2006/main"/>
           <a:p xmlns:a="http://schemas.openxmlformats.org/drawingml/2006/main">
             <a:pPr>
+              <a:buNone/>
               <a:defRPr sz="2850" b="1">
                 <a:solidFill>
                   <a:srgbClr val="FFFFFF"/>
@@ -8319,6 +9392,7 @@
           <a:lstStyle xmlns:a="http://schemas.openxmlformats.org/drawingml/2006/main"/>
           <a:p xmlns:a="http://schemas.openxmlformats.org/drawingml/2006/main">
             <a:pPr>
+              <a:buNone/>
               <a:defRPr sz="1500">
                 <a:solidFill>
                   <a:srgbClr val="E2F2FF"/>
@@ -8443,6 +9517,7 @@
           <a:lstStyle xmlns:a="http://schemas.openxmlformats.org/drawingml/2006/main"/>
           <a:p xmlns:a="http://schemas.openxmlformats.org/drawingml/2006/main">
             <a:pPr>
+              <a:buNone/>
               <a:defRPr sz="1050" b="1">
                 <a:solidFill>
                   <a:srgbClr val="1EC5FF"/>
@@ -8526,6 +9601,7 @@
           <a:lstStyle xmlns:a="http://schemas.openxmlformats.org/drawingml/2006/main"/>
           <a:p xmlns:a="http://schemas.openxmlformats.org/drawingml/2006/main">
             <a:pPr>
+              <a:buNone/>
               <a:defRPr sz="825">
                 <a:solidFill>
                   <a:srgbClr val="FFFFFF">
@@ -8580,6 +9656,7 @@
           <a:lstStyle xmlns:a="http://schemas.openxmlformats.org/drawingml/2006/main"/>
           <a:p xmlns:a="http://schemas.openxmlformats.org/drawingml/2006/main">
             <a:pPr algn="r">
+              <a:buNone/>
               <a:defRPr sz="825" b="1">
                 <a:solidFill>
                   <a:srgbClr val="FFFFFF">
@@ -8663,6 +9740,7 @@
           <a:lstStyle xmlns:a="http://schemas.openxmlformats.org/drawingml/2006/main"/>
           <a:p xmlns:a="http://schemas.openxmlformats.org/drawingml/2006/main">
             <a:pPr>
+              <a:buNone/>
               <a:defRPr sz="2850" b="1">
                 <a:solidFill>
                   <a:srgbClr val="0B1F3A"/>
@@ -8744,6 +9822,7 @@
           <a:lstStyle xmlns:a="http://schemas.openxmlformats.org/drawingml/2006/main"/>
           <a:p xmlns:a="http://schemas.openxmlformats.org/drawingml/2006/main">
             <a:pPr>
+              <a:buNone/>
               <a:defRPr sz="1425" b="1">
                 <a:solidFill>
                   <a:srgbClr val="1565C0"/>
@@ -8798,14 +9877,14 @@
       </p:sp>
       <p:pic>
         <p:nvPicPr>
-          <p:cNvPr id="14" name="" descr="Diagrama didático autoral que apresenta: CI rápida não significa selecionar menos; significa selecionar o impacto correto. — A pergunta que guia a aula."/>
+          <p:cNvPr id="16" name="" descr="Diagrama didático autoral que apresenta: CI rápida não significa selecionar menos; significa selecionar o impacto correto. — A pergunta que guia a aula."/>
           <p:cNvPicPr>
             <a:picLocks xmlns:a="http://schemas.openxmlformats.org/drawingml/2006/main" noChangeAspect="1"/>
           </p:cNvPicPr>
           <p:nvPr/>
         </p:nvPicPr>
         <p:blipFill>
-          <a:blip xmlns:r="http://schemas.openxmlformats.org/officeDocument/2006/relationships" xmlns:a="http://schemas.openxmlformats.org/drawingml/2006/main" r:embed="Rb7aa26e61db14e9e"/>
+          <a:blip xmlns:r="http://schemas.openxmlformats.org/officeDocument/2006/relationships" xmlns:a="http://schemas.openxmlformats.org/drawingml/2006/main" r:embed="R0830353b45d14b6e"/>
           <a:stretch xmlns:a="http://schemas.openxmlformats.org/drawingml/2006/main"/>
         </p:blipFill>
         <p:spPr>
@@ -8851,6 +9930,7 @@
           <a:lstStyle xmlns:a="http://schemas.openxmlformats.org/drawingml/2006/main"/>
           <a:p xmlns:a="http://schemas.openxmlformats.org/drawingml/2006/main">
             <a:pPr>
+              <a:buNone/>
               <a:defRPr sz="1050" b="1">
                 <a:solidFill>
                   <a:srgbClr val="1565C0"/>
@@ -8934,6 +10014,7 @@
           <a:lstStyle xmlns:a="http://schemas.openxmlformats.org/drawingml/2006/main"/>
           <a:p xmlns:a="http://schemas.openxmlformats.org/drawingml/2006/main">
             <a:pPr>
+              <a:buNone/>
               <a:defRPr sz="825">
                 <a:solidFill>
                   <a:srgbClr val="0B1F3A">
@@ -8988,6 +10069,7 @@
           <a:lstStyle xmlns:a="http://schemas.openxmlformats.org/drawingml/2006/main"/>
           <a:p xmlns:a="http://schemas.openxmlformats.org/drawingml/2006/main">
             <a:pPr algn="r">
+              <a:buNone/>
               <a:defRPr sz="825" b="1">
                 <a:solidFill>
                   <a:srgbClr val="0B1F3A">
@@ -9071,6 +10153,7 @@
           <a:lstStyle xmlns:a="http://schemas.openxmlformats.org/drawingml/2006/main"/>
           <a:p xmlns:a="http://schemas.openxmlformats.org/drawingml/2006/main">
             <a:pPr>
+              <a:buNone/>
               <a:defRPr sz="1350" b="1">
                 <a:solidFill>
                   <a:srgbClr val="1565C0"/>
@@ -9121,6 +10204,7 @@
           <a:lstStyle xmlns:a="http://schemas.openxmlformats.org/drawingml/2006/main"/>
           <a:p xmlns:a="http://schemas.openxmlformats.org/drawingml/2006/main">
             <a:pPr>
+              <a:buNone/>
               <a:defRPr sz="3300" b="1">
                 <a:solidFill>
                   <a:srgbClr val="0B1F3A"/>
@@ -9171,6 +10255,7 @@
           <a:lstStyle xmlns:a="http://schemas.openxmlformats.org/drawingml/2006/main"/>
           <a:p xmlns:a="http://schemas.openxmlformats.org/drawingml/2006/main">
             <a:pPr>
+              <a:buNone/>
               <a:defRPr sz="1500">
                 <a:solidFill>
                   <a:srgbClr val="5C6F86"/>
@@ -9221,6 +10306,7 @@
           <a:lstStyle xmlns:a="http://schemas.openxmlformats.org/drawingml/2006/main"/>
           <a:p xmlns:a="http://schemas.openxmlformats.org/drawingml/2006/main">
             <a:pPr>
+              <a:buNone/>
               <a:defRPr sz="1050" b="1">
                 <a:solidFill>
                   <a:srgbClr val="1565C0"/>
@@ -9304,6 +10390,7 @@
           <a:lstStyle xmlns:a="http://schemas.openxmlformats.org/drawingml/2006/main"/>
           <a:p xmlns:a="http://schemas.openxmlformats.org/drawingml/2006/main">
             <a:pPr>
+              <a:buNone/>
               <a:defRPr sz="825">
                 <a:solidFill>
                   <a:srgbClr val="0B1F3A">
@@ -9358,6 +10445,7 @@
           <a:lstStyle xmlns:a="http://schemas.openxmlformats.org/drawingml/2006/main"/>
           <a:p xmlns:a="http://schemas.openxmlformats.org/drawingml/2006/main">
             <a:pPr algn="r">
+              <a:buNone/>
               <a:defRPr sz="825" b="1">
                 <a:solidFill>
                   <a:srgbClr val="0B1F3A">
@@ -9449,6 +10537,7 @@
           <a:lstStyle xmlns:a="http://schemas.openxmlformats.org/drawingml/2006/main"/>
           <a:p xmlns:a="http://schemas.openxmlformats.org/drawingml/2006/main">
             <a:pPr>
+              <a:buNone/>
               <a:defRPr sz="2925" b="1">
                 <a:solidFill>
                   <a:srgbClr val="FFFFFF"/>
@@ -9499,6 +10588,7 @@
           <a:lstStyle xmlns:a="http://schemas.openxmlformats.org/drawingml/2006/main"/>
           <a:p xmlns:a="http://schemas.openxmlformats.org/drawingml/2006/main">
             <a:pPr>
+              <a:buNone/>
               <a:defRPr sz="3450" b="1">
                 <a:solidFill>
                   <a:srgbClr val="1EC5FF"/>
@@ -9549,6 +10639,7 @@
           <a:lstStyle xmlns:a="http://schemas.openxmlformats.org/drawingml/2006/main"/>
           <a:p xmlns:a="http://schemas.openxmlformats.org/drawingml/2006/main">
             <a:pPr>
+              <a:buNone/>
               <a:defRPr sz="1575" b="1">
                 <a:solidFill>
                   <a:srgbClr val="FFFFFF"/>
@@ -9630,6 +10721,7 @@
           <a:lstStyle xmlns:a="http://schemas.openxmlformats.org/drawingml/2006/main"/>
           <a:p xmlns:a="http://schemas.openxmlformats.org/drawingml/2006/main">
             <a:pPr>
+              <a:buNone/>
               <a:defRPr sz="3450" b="1">
                 <a:solidFill>
                   <a:srgbClr val="1EC5FF"/>
@@ -9680,6 +10772,7 @@
           <a:lstStyle xmlns:a="http://schemas.openxmlformats.org/drawingml/2006/main"/>
           <a:p xmlns:a="http://schemas.openxmlformats.org/drawingml/2006/main">
             <a:pPr>
+              <a:buNone/>
               <a:defRPr sz="1575" b="1">
                 <a:solidFill>
                   <a:srgbClr val="FFFFFF"/>
@@ -9761,6 +10854,7 @@
           <a:lstStyle xmlns:a="http://schemas.openxmlformats.org/drawingml/2006/main"/>
           <a:p xmlns:a="http://schemas.openxmlformats.org/drawingml/2006/main">
             <a:pPr>
+              <a:buNone/>
               <a:defRPr sz="3450" b="1">
                 <a:solidFill>
                   <a:srgbClr val="1EC5FF"/>
@@ -9811,6 +10905,7 @@
           <a:lstStyle xmlns:a="http://schemas.openxmlformats.org/drawingml/2006/main"/>
           <a:p xmlns:a="http://schemas.openxmlformats.org/drawingml/2006/main">
             <a:pPr>
+              <a:buNone/>
               <a:defRPr sz="1575" b="1">
                 <a:solidFill>
                   <a:srgbClr val="FFFFFF"/>
@@ -9861,6 +10956,7 @@
           <a:lstStyle xmlns:a="http://schemas.openxmlformats.org/drawingml/2006/main"/>
           <a:p xmlns:a="http://schemas.openxmlformats.org/drawingml/2006/main">
             <a:pPr>
+              <a:buNone/>
               <a:defRPr sz="1050" b="1">
                 <a:solidFill>
                   <a:srgbClr val="1EC5FF"/>
@@ -9944,6 +11040,7 @@
           <a:lstStyle xmlns:a="http://schemas.openxmlformats.org/drawingml/2006/main"/>
           <a:p xmlns:a="http://schemas.openxmlformats.org/drawingml/2006/main">
             <a:pPr>
+              <a:buNone/>
               <a:defRPr sz="825">
                 <a:solidFill>
                   <a:srgbClr val="FFFFFF">
@@ -9998,6 +11095,7 @@
           <a:lstStyle xmlns:a="http://schemas.openxmlformats.org/drawingml/2006/main"/>
           <a:p xmlns:a="http://schemas.openxmlformats.org/drawingml/2006/main">
             <a:pPr algn="r">
+              <a:buNone/>
               <a:defRPr sz="825" b="1">
                 <a:solidFill>
                   <a:srgbClr val="FFFFFF">
@@ -10089,6 +11187,7 @@
           <a:lstStyle xmlns:a="http://schemas.openxmlformats.org/drawingml/2006/main"/>
           <a:p xmlns:a="http://schemas.openxmlformats.org/drawingml/2006/main">
             <a:pPr>
+              <a:buNone/>
               <a:defRPr sz="2925" b="1">
                 <a:solidFill>
                   <a:srgbClr val="FFFFFF"/>
@@ -10139,6 +11238,7 @@
           <a:lstStyle xmlns:a="http://schemas.openxmlformats.org/drawingml/2006/main"/>
           <a:p xmlns:a="http://schemas.openxmlformats.org/drawingml/2006/main">
             <a:pPr>
+              <a:buNone/>
               <a:defRPr sz="1650">
                 <a:solidFill>
                   <a:srgbClr val="E2F2FF"/>
@@ -10189,6 +11289,7 @@
           <a:lstStyle xmlns:a="http://schemas.openxmlformats.org/drawingml/2006/main"/>
           <a:p xmlns:a="http://schemas.openxmlformats.org/drawingml/2006/main">
             <a:pPr>
+              <a:buNone/>
               <a:defRPr sz="1800">
                 <a:solidFill>
                   <a:srgbClr val="FFFFFF"/>
@@ -10206,6 +11307,7 @@
           </a:p>
           <a:p xmlns:a="http://schemas.openxmlformats.org/drawingml/2006/main">
             <a:pPr>
+              <a:buNone/>
               <a:defRPr sz="1800">
                 <a:solidFill>
                   <a:srgbClr val="FFFFFF"/>
@@ -10223,6 +11325,7 @@
           </a:p>
           <a:p xmlns:a="http://schemas.openxmlformats.org/drawingml/2006/main">
             <a:pPr>
+              <a:buNone/>
               <a:defRPr sz="1800">
                 <a:solidFill>
                   <a:srgbClr val="FFFFFF"/>
@@ -10347,6 +11450,7 @@
           <a:lstStyle xmlns:a="http://schemas.openxmlformats.org/drawingml/2006/main"/>
           <a:p xmlns:a="http://schemas.openxmlformats.org/drawingml/2006/main">
             <a:pPr algn="ctr">
+              <a:buNone/>
               <a:defRPr sz="4650" b="1">
                 <a:solidFill>
                   <a:srgbClr val="1EC5FF"/>
@@ -10397,6 +11501,7 @@
           <a:lstStyle xmlns:a="http://schemas.openxmlformats.org/drawingml/2006/main"/>
           <a:p xmlns:a="http://schemas.openxmlformats.org/drawingml/2006/main">
             <a:pPr>
+              <a:buNone/>
               <a:defRPr sz="1050" b="1">
                 <a:solidFill>
                   <a:srgbClr val="1EC5FF"/>
@@ -10480,6 +11585,7 @@
           <a:lstStyle xmlns:a="http://schemas.openxmlformats.org/drawingml/2006/main"/>
           <a:p xmlns:a="http://schemas.openxmlformats.org/drawingml/2006/main">
             <a:pPr>
+              <a:buNone/>
               <a:defRPr sz="825">
                 <a:solidFill>
                   <a:srgbClr val="FFFFFF">
@@ -10534,6 +11640,7 @@
           <a:lstStyle xmlns:a="http://schemas.openxmlformats.org/drawingml/2006/main"/>
           <a:p xmlns:a="http://schemas.openxmlformats.org/drawingml/2006/main">
             <a:pPr algn="r">
+              <a:buNone/>
               <a:defRPr sz="825" b="1">
                 <a:solidFill>
                   <a:srgbClr val="FFFFFF">
@@ -10617,6 +11724,7 @@
           <a:lstStyle xmlns:a="http://schemas.openxmlformats.org/drawingml/2006/main"/>
           <a:p xmlns:a="http://schemas.openxmlformats.org/drawingml/2006/main">
             <a:pPr>
+              <a:buNone/>
               <a:defRPr sz="2925" b="1">
                 <a:solidFill>
                   <a:srgbClr val="0B1F3A"/>
@@ -10667,6 +11775,7 @@
           <a:lstStyle xmlns:a="http://schemas.openxmlformats.org/drawingml/2006/main"/>
           <a:p xmlns:a="http://schemas.openxmlformats.org/drawingml/2006/main">
             <a:pPr>
+              <a:buNone/>
               <a:defRPr sz="1650">
                 <a:solidFill>
                   <a:srgbClr val="5C6F86"/>
@@ -10717,6 +11826,7 @@
           <a:lstStyle xmlns:a="http://schemas.openxmlformats.org/drawingml/2006/main"/>
           <a:p xmlns:a="http://schemas.openxmlformats.org/drawingml/2006/main">
             <a:pPr>
+              <a:buNone/>
               <a:defRPr sz="1800">
                 <a:solidFill>
                   <a:srgbClr val="0B1F3A"/>
@@ -10734,6 +11844,7 @@
           </a:p>
           <a:p xmlns:a="http://schemas.openxmlformats.org/drawingml/2006/main">
             <a:pPr>
+              <a:buNone/>
               <a:defRPr sz="1800">
                 <a:solidFill>
                   <a:srgbClr val="0B1F3A"/>
@@ -10751,6 +11862,7 @@
           </a:p>
           <a:p xmlns:a="http://schemas.openxmlformats.org/drawingml/2006/main">
             <a:pPr>
+              <a:buNone/>
               <a:defRPr sz="1800">
                 <a:solidFill>
                   <a:srgbClr val="0B1F3A"/>
@@ -10875,6 +11987,7 @@
           <a:lstStyle xmlns:a="http://schemas.openxmlformats.org/drawingml/2006/main"/>
           <a:p xmlns:a="http://schemas.openxmlformats.org/drawingml/2006/main">
             <a:pPr algn="ctr">
+              <a:buNone/>
               <a:defRPr sz="4650" b="1">
                 <a:solidFill>
                   <a:srgbClr val="1565C0"/>
@@ -10925,6 +12038,7 @@
           <a:lstStyle xmlns:a="http://schemas.openxmlformats.org/drawingml/2006/main"/>
           <a:p xmlns:a="http://schemas.openxmlformats.org/drawingml/2006/main">
             <a:pPr>
+              <a:buNone/>
               <a:defRPr sz="1050" b="1">
                 <a:solidFill>
                   <a:srgbClr val="1565C0"/>
@@ -11008,6 +12122,7 @@
           <a:lstStyle xmlns:a="http://schemas.openxmlformats.org/drawingml/2006/main"/>
           <a:p xmlns:a="http://schemas.openxmlformats.org/drawingml/2006/main">
             <a:pPr>
+              <a:buNone/>
               <a:defRPr sz="825">
                 <a:solidFill>
                   <a:srgbClr val="0B1F3A">
@@ -11062,6 +12177,7 @@
           <a:lstStyle xmlns:a="http://schemas.openxmlformats.org/drawingml/2006/main"/>
           <a:p xmlns:a="http://schemas.openxmlformats.org/drawingml/2006/main">
             <a:pPr algn="r">
+              <a:buNone/>
               <a:defRPr sz="825" b="1">
                 <a:solidFill>
                   <a:srgbClr val="0B1F3A">
@@ -11153,6 +12269,7 @@
           <a:lstStyle xmlns:a="http://schemas.openxmlformats.org/drawingml/2006/main"/>
           <a:p xmlns:a="http://schemas.openxmlformats.org/drawingml/2006/main">
             <a:pPr>
+              <a:buNone/>
               <a:defRPr sz="2925" b="1">
                 <a:solidFill>
                   <a:srgbClr val="FFFFFF"/>
@@ -11209,6 +12326,7 @@
           <a:lstStyle xmlns:a="http://schemas.openxmlformats.org/drawingml/2006/main"/>
           <a:p xmlns:a="http://schemas.openxmlformats.org/drawingml/2006/main">
             <a:pPr algn="ctr">
+              <a:buNone/>
               <a:defRPr sz="1575" b="1">
                 <a:solidFill>
                   <a:srgbClr val="FFFFFF"/>
@@ -11265,6 +12383,7 @@
           <a:lstStyle xmlns:a="http://schemas.openxmlformats.org/drawingml/2006/main"/>
           <a:p xmlns:a="http://schemas.openxmlformats.org/drawingml/2006/main">
             <a:pPr algn="ctr">
+              <a:buNone/>
               <a:defRPr sz="1575" b="1">
                 <a:solidFill>
                   <a:srgbClr val="FFFFFF"/>
@@ -11321,6 +12440,7 @@
           <a:lstStyle xmlns:a="http://schemas.openxmlformats.org/drawingml/2006/main"/>
           <a:p xmlns:a="http://schemas.openxmlformats.org/drawingml/2006/main">
             <a:pPr algn="ctr">
+              <a:buNone/>
               <a:defRPr sz="1575" b="1">
                 <a:solidFill>
                   <a:srgbClr val="FFFFFF"/>
@@ -11377,6 +12497,7 @@
           <a:lstStyle xmlns:a="http://schemas.openxmlformats.org/drawingml/2006/main"/>
           <a:p xmlns:a="http://schemas.openxmlformats.org/drawingml/2006/main">
             <a:pPr algn="ctr">
+              <a:buNone/>
               <a:defRPr sz="1575" b="1">
                 <a:solidFill>
                   <a:srgbClr val="FFFFFF"/>
@@ -11396,7 +12517,7 @@
       </p:sp>
       <p:cxnSp>
         <p:nvCxnSpPr>
-          <p:cNvPr id="18" name=""/>
+          <p:cNvPr id="26" name=""/>
           <p:cNvCxnSpPr>
             <a:stCxn xmlns:a="http://schemas.openxmlformats.org/drawingml/2006/main" id="2" idx="3"/>
             <a:endCxn xmlns:a="http://schemas.openxmlformats.org/drawingml/2006/main" id="3" idx="1"/>
@@ -11422,7 +12543,7 @@
       </p:cxnSp>
       <p:cxnSp>
         <p:nvCxnSpPr>
-          <p:cNvPr id="19" name=""/>
+          <p:cNvPr id="27" name=""/>
           <p:cNvCxnSpPr>
             <a:stCxn xmlns:a="http://schemas.openxmlformats.org/drawingml/2006/main" id="3" idx="3"/>
             <a:endCxn xmlns:a="http://schemas.openxmlformats.org/drawingml/2006/main" id="4" idx="1"/>
@@ -11448,7 +12569,7 @@
       </p:cxnSp>
       <p:cxnSp>
         <p:nvCxnSpPr>
-          <p:cNvPr id="20" name=""/>
+          <p:cNvPr id="28" name=""/>
           <p:cNvCxnSpPr>
             <a:stCxn xmlns:a="http://schemas.openxmlformats.org/drawingml/2006/main" id="4" idx="3"/>
             <a:endCxn xmlns:a="http://schemas.openxmlformats.org/drawingml/2006/main" id="5" idx="1"/>
@@ -11505,6 +12626,7 @@
           <a:lstStyle xmlns:a="http://schemas.openxmlformats.org/drawingml/2006/main"/>
           <a:p xmlns:a="http://schemas.openxmlformats.org/drawingml/2006/main">
             <a:pPr>
+              <a:buNone/>
               <a:defRPr sz="1050" b="1">
                 <a:solidFill>
                   <a:srgbClr val="1EC5FF"/>
@@ -11588,6 +12710,7 @@
           <a:lstStyle xmlns:a="http://schemas.openxmlformats.org/drawingml/2006/main"/>
           <a:p xmlns:a="http://schemas.openxmlformats.org/drawingml/2006/main">
             <a:pPr>
+              <a:buNone/>
               <a:defRPr sz="825">
                 <a:solidFill>
                   <a:srgbClr val="FFFFFF">
@@ -11642,6 +12765,7 @@
           <a:lstStyle xmlns:a="http://schemas.openxmlformats.org/drawingml/2006/main"/>
           <a:p xmlns:a="http://schemas.openxmlformats.org/drawingml/2006/main">
             <a:pPr algn="r">
+              <a:buNone/>
               <a:defRPr sz="825" b="1">
                 <a:solidFill>
                   <a:srgbClr val="FFFFFF">
@@ -11733,6 +12857,7 @@
           <a:lstStyle xmlns:a="http://schemas.openxmlformats.org/drawingml/2006/main"/>
           <a:p xmlns:a="http://schemas.openxmlformats.org/drawingml/2006/main">
             <a:pPr>
+              <a:buNone/>
               <a:defRPr sz="2925" b="1">
                 <a:solidFill>
                   <a:srgbClr val="FFFFFF"/>
@@ -11783,6 +12908,7 @@
           <a:lstStyle xmlns:a="http://schemas.openxmlformats.org/drawingml/2006/main"/>
           <a:p xmlns:a="http://schemas.openxmlformats.org/drawingml/2006/main">
             <a:pPr>
+              <a:buNone/>
               <a:defRPr sz="1650">
                 <a:solidFill>
                   <a:srgbClr val="E2F2FF"/>
@@ -11833,6 +12959,7 @@
           <a:lstStyle xmlns:a="http://schemas.openxmlformats.org/drawingml/2006/main"/>
           <a:p xmlns:a="http://schemas.openxmlformats.org/drawingml/2006/main">
             <a:pPr>
+              <a:buNone/>
               <a:defRPr sz="1800">
                 <a:solidFill>
                   <a:srgbClr val="FFFFFF"/>
@@ -11850,6 +12977,7 @@
           </a:p>
           <a:p xmlns:a="http://schemas.openxmlformats.org/drawingml/2006/main">
             <a:pPr>
+              <a:buNone/>
               <a:defRPr sz="1800">
                 <a:solidFill>
                   <a:srgbClr val="FFFFFF"/>
@@ -11867,6 +12995,7 @@
           </a:p>
           <a:p xmlns:a="http://schemas.openxmlformats.org/drawingml/2006/main">
             <a:pPr>
+              <a:buNone/>
               <a:defRPr sz="1800">
                 <a:solidFill>
                   <a:srgbClr val="FFFFFF"/>
@@ -11991,6 +13120,7 @@
           <a:lstStyle xmlns:a="http://schemas.openxmlformats.org/drawingml/2006/main"/>
           <a:p xmlns:a="http://schemas.openxmlformats.org/drawingml/2006/main">
             <a:pPr algn="ctr">
+              <a:buNone/>
               <a:defRPr sz="4650" b="1">
                 <a:solidFill>
                   <a:srgbClr val="1EC5FF"/>
@@ -12041,6 +13171,7 @@
           <a:lstStyle xmlns:a="http://schemas.openxmlformats.org/drawingml/2006/main"/>
           <a:p xmlns:a="http://schemas.openxmlformats.org/drawingml/2006/main">
             <a:pPr>
+              <a:buNone/>
               <a:defRPr sz="1050" b="1">
                 <a:solidFill>
                   <a:srgbClr val="1EC5FF"/>
@@ -12124,6 +13255,7 @@
           <a:lstStyle xmlns:a="http://schemas.openxmlformats.org/drawingml/2006/main"/>
           <a:p xmlns:a="http://schemas.openxmlformats.org/drawingml/2006/main">
             <a:pPr>
+              <a:buNone/>
               <a:defRPr sz="825">
                 <a:solidFill>
                   <a:srgbClr val="FFFFFF">
@@ -12178,6 +13310,7 @@
           <a:lstStyle xmlns:a="http://schemas.openxmlformats.org/drawingml/2006/main"/>
           <a:p xmlns:a="http://schemas.openxmlformats.org/drawingml/2006/main">
             <a:pPr algn="r">
+              <a:buNone/>
               <a:defRPr sz="825" b="1">
                 <a:solidFill>
                   <a:srgbClr val="FFFFFF">
@@ -12261,6 +13394,7 @@
           <a:lstStyle xmlns:a="http://schemas.openxmlformats.org/drawingml/2006/main"/>
           <a:p xmlns:a="http://schemas.openxmlformats.org/drawingml/2006/main">
             <a:pPr>
+              <a:buNone/>
               <a:defRPr sz="2925" b="1">
                 <a:solidFill>
                   <a:srgbClr val="0B1F3A"/>
@@ -12311,6 +13445,7 @@
           <a:lstStyle xmlns:a="http://schemas.openxmlformats.org/drawingml/2006/main"/>
           <a:p xmlns:a="http://schemas.openxmlformats.org/drawingml/2006/main">
             <a:pPr>
+              <a:buNone/>
               <a:defRPr sz="2100" b="1">
                 <a:solidFill>
                   <a:srgbClr val="1565C0"/>
@@ -12361,6 +13496,7 @@
           <a:lstStyle xmlns:a="http://schemas.openxmlformats.org/drawingml/2006/main"/>
           <a:p xmlns:a="http://schemas.openxmlformats.org/drawingml/2006/main">
             <a:pPr>
+              <a:buNone/>
               <a:defRPr sz="2100" b="1">
                 <a:solidFill>
                   <a:srgbClr val="1565C0"/>
@@ -12442,6 +13578,7 @@
           <a:lstStyle xmlns:a="http://schemas.openxmlformats.org/drawingml/2006/main"/>
           <a:p xmlns:a="http://schemas.openxmlformats.org/drawingml/2006/main">
             <a:pPr>
+              <a:buNone/>
               <a:defRPr sz="1650">
                 <a:solidFill>
                   <a:srgbClr val="0B1F3A"/>
@@ -12459,6 +13596,7 @@
           </a:p>
           <a:p xmlns:a="http://schemas.openxmlformats.org/drawingml/2006/main">
             <a:pPr>
+              <a:buNone/>
               <a:defRPr sz="1650">
                 <a:solidFill>
                   <a:srgbClr val="0B1F3A"/>
@@ -12509,6 +13647,7 @@
           <a:lstStyle xmlns:a="http://schemas.openxmlformats.org/drawingml/2006/main"/>
           <a:p xmlns:a="http://schemas.openxmlformats.org/drawingml/2006/main">
             <a:pPr>
+              <a:buNone/>
               <a:defRPr sz="1650">
                 <a:solidFill>
                   <a:srgbClr val="0B1F3A"/>
@@ -12559,6 +13698,7 @@
           <a:lstStyle xmlns:a="http://schemas.openxmlformats.org/drawingml/2006/main"/>
           <a:p xmlns:a="http://schemas.openxmlformats.org/drawingml/2006/main">
             <a:pPr>
+              <a:buNone/>
               <a:defRPr sz="1050" b="1">
                 <a:solidFill>
                   <a:srgbClr val="1565C0"/>
@@ -12642,6 +13782,7 @@
           <a:lstStyle xmlns:a="http://schemas.openxmlformats.org/drawingml/2006/main"/>
           <a:p xmlns:a="http://schemas.openxmlformats.org/drawingml/2006/main">
             <a:pPr>
+              <a:buNone/>
               <a:defRPr sz="825">
                 <a:solidFill>
                   <a:srgbClr val="0B1F3A">
@@ -12696,6 +13837,7 @@
           <a:lstStyle xmlns:a="http://schemas.openxmlformats.org/drawingml/2006/main"/>
           <a:p xmlns:a="http://schemas.openxmlformats.org/drawingml/2006/main">
             <a:pPr algn="r">
+              <a:buNone/>
               <a:defRPr sz="825" b="1">
                 <a:solidFill>
                   <a:srgbClr val="0B1F3A">
@@ -12779,6 +13921,7 @@
           <a:lstStyle xmlns:a="http://schemas.openxmlformats.org/drawingml/2006/main"/>
           <a:p xmlns:a="http://schemas.openxmlformats.org/drawingml/2006/main">
             <a:pPr>
+              <a:buNone/>
               <a:defRPr sz="2925" b="1">
                 <a:solidFill>
                   <a:srgbClr val="0B1F3A"/>
@@ -12829,6 +13972,7 @@
           <a:lstStyle xmlns:a="http://schemas.openxmlformats.org/drawingml/2006/main"/>
           <a:p xmlns:a="http://schemas.openxmlformats.org/drawingml/2006/main">
             <a:pPr>
+              <a:buNone/>
               <a:defRPr sz="1650">
                 <a:solidFill>
                   <a:srgbClr val="5C6F86"/>
@@ -12879,6 +14023,7 @@
           <a:lstStyle xmlns:a="http://schemas.openxmlformats.org/drawingml/2006/main"/>
           <a:p xmlns:a="http://schemas.openxmlformats.org/drawingml/2006/main">
             <a:pPr>
+              <a:buNone/>
               <a:defRPr sz="1800">
                 <a:solidFill>
                   <a:srgbClr val="0B1F3A"/>
@@ -12896,6 +14041,7 @@
           </a:p>
           <a:p xmlns:a="http://schemas.openxmlformats.org/drawingml/2006/main">
             <a:pPr>
+              <a:buNone/>
               <a:defRPr sz="1800">
                 <a:solidFill>
                   <a:srgbClr val="0B1F3A"/>
@@ -12913,6 +14059,7 @@
           </a:p>
           <a:p xmlns:a="http://schemas.openxmlformats.org/drawingml/2006/main">
             <a:pPr>
+              <a:buNone/>
               <a:defRPr sz="1800">
                 <a:solidFill>
                   <a:srgbClr val="0B1F3A"/>
@@ -13037,6 +14184,7 @@
           <a:lstStyle xmlns:a="http://schemas.openxmlformats.org/drawingml/2006/main"/>
           <a:p xmlns:a="http://schemas.openxmlformats.org/drawingml/2006/main">
             <a:pPr algn="ctr">
+              <a:buNone/>
               <a:defRPr sz="4650" b="1">
                 <a:solidFill>
                   <a:srgbClr val="1565C0"/>
@@ -13087,6 +14235,7 @@
           <a:lstStyle xmlns:a="http://schemas.openxmlformats.org/drawingml/2006/main"/>
           <a:p xmlns:a="http://schemas.openxmlformats.org/drawingml/2006/main">
             <a:pPr>
+              <a:buNone/>
               <a:defRPr sz="1050" b="1">
                 <a:solidFill>
                   <a:srgbClr val="1565C0"/>
@@ -13170,6 +14319,7 @@
           <a:lstStyle xmlns:a="http://schemas.openxmlformats.org/drawingml/2006/main"/>
           <a:p xmlns:a="http://schemas.openxmlformats.org/drawingml/2006/main">
             <a:pPr>
+              <a:buNone/>
               <a:defRPr sz="825">
                 <a:solidFill>
                   <a:srgbClr val="0B1F3A">
@@ -13224,6 +14374,7 @@
           <a:lstStyle xmlns:a="http://schemas.openxmlformats.org/drawingml/2006/main"/>
           <a:p xmlns:a="http://schemas.openxmlformats.org/drawingml/2006/main">
             <a:pPr algn="r">
+              <a:buNone/>
               <a:defRPr sz="825" b="1">
                 <a:solidFill>
                   <a:srgbClr val="0B1F3A">

--- a/assets/decks/episodio-09-ci-state-defer.pptx
+++ b/assets/decks/episodio-09-ci-state-defer.pptx
@@ -2,33 +2,33 @@
 <file path=ppt/presentation.xml><?xml version="1.0" encoding="utf-8"?>
 <p:presentation xmlns:p="http://schemas.openxmlformats.org/presentationml/2006/main">
   <p:sldMasterIdLst>
-    <p:sldMasterId xmlns:r="http://schemas.openxmlformats.org/officeDocument/2006/relationships" id="2147483648" r:id="Rb2d811504a104ef8"/>
-    <p:sldMasterId xmlns:r="http://schemas.openxmlformats.org/officeDocument/2006/relationships" id="2147483650" r:id="Rb0d5c620a31e4e1c"/>
+    <p:sldMasterId xmlns:r="http://schemas.openxmlformats.org/officeDocument/2006/relationships" id="2147483648" r:id="Rde063621ce1040f8"/>
+    <p:sldMasterId xmlns:r="http://schemas.openxmlformats.org/officeDocument/2006/relationships" id="2147483650" r:id="R11f76875f7044ec2"/>
   </p:sldMasterIdLst>
   <p:notesMasterIdLst>
-    <p:notesMasterId xmlns:r="http://schemas.openxmlformats.org/officeDocument/2006/relationships" r:id="Rcdc4134b08e348a7"/>
+    <p:notesMasterId xmlns:r="http://schemas.openxmlformats.org/officeDocument/2006/relationships" r:id="R5ea5e39ce6d34bab"/>
   </p:notesMasterIdLst>
   <p:sldIdLst>
-    <p:sldId xmlns:r="http://schemas.openxmlformats.org/officeDocument/2006/relationships" id="256" r:id="R4188cfa633914594"/>
-    <p:sldId xmlns:r="http://schemas.openxmlformats.org/officeDocument/2006/relationships" id="257" r:id="Rf268280474d24f0e"/>
-    <p:sldId xmlns:r="http://schemas.openxmlformats.org/officeDocument/2006/relationships" id="258" r:id="R5b46c542d3664005"/>
-    <p:sldId xmlns:r="http://schemas.openxmlformats.org/officeDocument/2006/relationships" id="259" r:id="R65744b1cdf2b4250"/>
-    <p:sldId xmlns:r="http://schemas.openxmlformats.org/officeDocument/2006/relationships" id="260" r:id="R2c3c69e773de4598"/>
-    <p:sldId xmlns:r="http://schemas.openxmlformats.org/officeDocument/2006/relationships" id="261" r:id="R28838d1b672c42bc"/>
-    <p:sldId xmlns:r="http://schemas.openxmlformats.org/officeDocument/2006/relationships" id="262" r:id="Rfa91682e0a3f4f65"/>
-    <p:sldId xmlns:r="http://schemas.openxmlformats.org/officeDocument/2006/relationships" id="263" r:id="Rbeaaeec9426d4307"/>
-    <p:sldId xmlns:r="http://schemas.openxmlformats.org/officeDocument/2006/relationships" id="264" r:id="R42fe266615b44674"/>
-    <p:sldId xmlns:r="http://schemas.openxmlformats.org/officeDocument/2006/relationships" id="265" r:id="Rbe5f8b48e5e143b9"/>
-    <p:sldId xmlns:r="http://schemas.openxmlformats.org/officeDocument/2006/relationships" id="266" r:id="R127aa16d930c4719"/>
-    <p:sldId xmlns:r="http://schemas.openxmlformats.org/officeDocument/2006/relationships" id="267" r:id="Rb7291d1f040a4223"/>
-    <p:sldId xmlns:r="http://schemas.openxmlformats.org/officeDocument/2006/relationships" id="268" r:id="R6b9ac95477794cfd"/>
-    <p:sldId xmlns:r="http://schemas.openxmlformats.org/officeDocument/2006/relationships" id="269" r:id="R9525a5c905604443"/>
-    <p:sldId xmlns:r="http://schemas.openxmlformats.org/officeDocument/2006/relationships" id="270" r:id="Rf429195a82b44a3f"/>
-    <p:sldId xmlns:r="http://schemas.openxmlformats.org/officeDocument/2006/relationships" id="271" r:id="Ref6215d21c7b4a1a"/>
-    <p:sldId xmlns:r="http://schemas.openxmlformats.org/officeDocument/2006/relationships" id="272" r:id="R735d1808f1524046"/>
-    <p:sldId xmlns:r="http://schemas.openxmlformats.org/officeDocument/2006/relationships" id="273" r:id="R7a8951a21602496b"/>
-    <p:sldId xmlns:r="http://schemas.openxmlformats.org/officeDocument/2006/relationships" id="274" r:id="R2d56fa62d3934603"/>
-    <p:sldId xmlns:r="http://schemas.openxmlformats.org/officeDocument/2006/relationships" id="275" r:id="Reb5718b0939e459d"/>
+    <p:sldId xmlns:r="http://schemas.openxmlformats.org/officeDocument/2006/relationships" id="256" r:id="Rabfa5147359a4aaf"/>
+    <p:sldId xmlns:r="http://schemas.openxmlformats.org/officeDocument/2006/relationships" id="257" r:id="Rc8af07af236b4428"/>
+    <p:sldId xmlns:r="http://schemas.openxmlformats.org/officeDocument/2006/relationships" id="258" r:id="R11fa807e908d4ece"/>
+    <p:sldId xmlns:r="http://schemas.openxmlformats.org/officeDocument/2006/relationships" id="259" r:id="R9c79674dc49f426b"/>
+    <p:sldId xmlns:r="http://schemas.openxmlformats.org/officeDocument/2006/relationships" id="260" r:id="Rbde7b3aa54ee4d50"/>
+    <p:sldId xmlns:r="http://schemas.openxmlformats.org/officeDocument/2006/relationships" id="261" r:id="R3cabf5a7fc484277"/>
+    <p:sldId xmlns:r="http://schemas.openxmlformats.org/officeDocument/2006/relationships" id="262" r:id="R2c252f8fccb14fa8"/>
+    <p:sldId xmlns:r="http://schemas.openxmlformats.org/officeDocument/2006/relationships" id="263" r:id="R7af12a0ef6794517"/>
+    <p:sldId xmlns:r="http://schemas.openxmlformats.org/officeDocument/2006/relationships" id="264" r:id="Re084bd7026fb43d3"/>
+    <p:sldId xmlns:r="http://schemas.openxmlformats.org/officeDocument/2006/relationships" id="265" r:id="Ref4d45d57a154fc4"/>
+    <p:sldId xmlns:r="http://schemas.openxmlformats.org/officeDocument/2006/relationships" id="266" r:id="R5c2a77a543034d2f"/>
+    <p:sldId xmlns:r="http://schemas.openxmlformats.org/officeDocument/2006/relationships" id="267" r:id="R782108345b964b6c"/>
+    <p:sldId xmlns:r="http://schemas.openxmlformats.org/officeDocument/2006/relationships" id="268" r:id="R667b2b6bb3c34c85"/>
+    <p:sldId xmlns:r="http://schemas.openxmlformats.org/officeDocument/2006/relationships" id="269" r:id="Rb2b4321491d746ba"/>
+    <p:sldId xmlns:r="http://schemas.openxmlformats.org/officeDocument/2006/relationships" id="270" r:id="R4bbc3beed89b4d41"/>
+    <p:sldId xmlns:r="http://schemas.openxmlformats.org/officeDocument/2006/relationships" id="271" r:id="R867f4a5347954e59"/>
+    <p:sldId xmlns:r="http://schemas.openxmlformats.org/officeDocument/2006/relationships" id="272" r:id="Rf775a7f4c4da466c"/>
+    <p:sldId xmlns:r="http://schemas.openxmlformats.org/officeDocument/2006/relationships" id="273" r:id="Rdb0b0247e60c45b2"/>
+    <p:sldId xmlns:r="http://schemas.openxmlformats.org/officeDocument/2006/relationships" id="274" r:id="R81319ac5977c45b7"/>
+    <p:sldId xmlns:r="http://schemas.openxmlformats.org/officeDocument/2006/relationships" id="275" r:id="Rb65a6dcff65c4acd"/>
   </p:sldIdLst>
   <p:sldSz cx="12192000" cy="6858000"/>
   <p:notesSz cx="6858000" cy="9144000"/>
@@ -537,6 +537,11 @@
           </a:p>
           <a:p xmlns:a="http://schemas.openxmlformats.org/drawingml/2006/main">
             <a:r>
+              <a:t>- https://rescuepoint.com.br/assets/img/logo.png</a:t>
+            </a:r>
+          </a:p>
+          <a:p xmlns:a="http://schemas.openxmlformats.org/drawingml/2006/main">
+            <a:r>
               <a:t>- https://github.com/AnselmoBorges/dbt-moderno-na-pratica/blob/main/roteiros/09-ci-state-defer.md</a:t>
             </a:r>
           </a:p>
@@ -697,6 +702,11 @@
           </a:p>
           <a:p xmlns:a="http://schemas.openxmlformats.org/drawingml/2006/main">
             <a:r>
+              <a:t>- https://rescuepoint.com.br/assets/img/logo.png</a:t>
+            </a:r>
+          </a:p>
+          <a:p xmlns:a="http://schemas.openxmlformats.org/drawingml/2006/main">
+            <a:r>
               <a:t>- https://github.com/AnselmoBorges/dbt-moderno-na-pratica/blob/main/roteiros/09-ci-state-defer.md</a:t>
             </a:r>
           </a:p>
@@ -862,6 +872,11 @@
           </a:p>
           <a:p xmlns:a="http://schemas.openxmlformats.org/drawingml/2006/main">
             <a:r>
+              <a:t>- https://rescuepoint.com.br/assets/img/logo.png</a:t>
+            </a:r>
+          </a:p>
+          <a:p xmlns:a="http://schemas.openxmlformats.org/drawingml/2006/main">
+            <a:r>
               <a:t>- https://github.com/AnselmoBorges/dbt-moderno-na-pratica/blob/main/roteiros/09-ci-state-defer.md</a:t>
             </a:r>
           </a:p>
@@ -1022,6 +1037,11 @@
           </a:p>
           <a:p xmlns:a="http://schemas.openxmlformats.org/drawingml/2006/main">
             <a:r>
+              <a:t>- https://rescuepoint.com.br/assets/img/logo.png</a:t>
+            </a:r>
+          </a:p>
+          <a:p xmlns:a="http://schemas.openxmlformats.org/drawingml/2006/main">
+            <a:r>
               <a:t>- https://github.com/AnselmoBorges/dbt-moderno-na-pratica/blob/main/roteiros/09-ci-state-defer.md</a:t>
             </a:r>
           </a:p>
@@ -1182,6 +1202,11 @@
           </a:p>
           <a:p xmlns:a="http://schemas.openxmlformats.org/drawingml/2006/main">
             <a:r>
+              <a:t>- https://rescuepoint.com.br/assets/img/logo.png</a:t>
+            </a:r>
+          </a:p>
+          <a:p xmlns:a="http://schemas.openxmlformats.org/drawingml/2006/main">
+            <a:r>
               <a:t>- https://github.com/AnselmoBorges/dbt-moderno-na-pratica/blob/main/roteiros/09-ci-state-defer.md</a:t>
             </a:r>
           </a:p>
@@ -1342,6 +1367,11 @@
           </a:p>
           <a:p xmlns:a="http://schemas.openxmlformats.org/drawingml/2006/main">
             <a:r>
+              <a:t>- https://rescuepoint.com.br/assets/img/logo.png</a:t>
+            </a:r>
+          </a:p>
+          <a:p xmlns:a="http://schemas.openxmlformats.org/drawingml/2006/main">
+            <a:r>
               <a:t>- https://github.com/AnselmoBorges/dbt-moderno-na-pratica/blob/main/roteiros/09-ci-state-defer.md</a:t>
             </a:r>
           </a:p>
@@ -1502,6 +1532,11 @@
           </a:p>
           <a:p xmlns:a="http://schemas.openxmlformats.org/drawingml/2006/main">
             <a:r>
+              <a:t>- https://rescuepoint.com.br/assets/img/logo.png</a:t>
+            </a:r>
+          </a:p>
+          <a:p xmlns:a="http://schemas.openxmlformats.org/drawingml/2006/main">
+            <a:r>
               <a:t>- https://github.com/AnselmoBorges/dbt-moderno-na-pratica/blob/main/roteiros/09-ci-state-defer.md</a:t>
             </a:r>
           </a:p>
@@ -1662,6 +1697,11 @@
           </a:p>
           <a:p xmlns:a="http://schemas.openxmlformats.org/drawingml/2006/main">
             <a:r>
+              <a:t>- https://rescuepoint.com.br/assets/img/logo.png</a:t>
+            </a:r>
+          </a:p>
+          <a:p xmlns:a="http://schemas.openxmlformats.org/drawingml/2006/main">
+            <a:r>
               <a:t>- https://github.com/AnselmoBorges/dbt-moderno-na-pratica/blob/main/roteiros/09-ci-state-defer.md</a:t>
             </a:r>
           </a:p>
@@ -1822,6 +1862,11 @@
           </a:p>
           <a:p xmlns:a="http://schemas.openxmlformats.org/drawingml/2006/main">
             <a:r>
+              <a:t>- https://rescuepoint.com.br/assets/img/logo.png</a:t>
+            </a:r>
+          </a:p>
+          <a:p xmlns:a="http://schemas.openxmlformats.org/drawingml/2006/main">
+            <a:r>
               <a:t>- https://github.com/AnselmoBorges/dbt-moderno-na-pratica/blob/main/roteiros/09-ci-state-defer.md</a:t>
             </a:r>
           </a:p>
@@ -1982,6 +2027,11 @@
           </a:p>
           <a:p xmlns:a="http://schemas.openxmlformats.org/drawingml/2006/main">
             <a:r>
+              <a:t>- https://rescuepoint.com.br/assets/img/logo.png</a:t>
+            </a:r>
+          </a:p>
+          <a:p xmlns:a="http://schemas.openxmlformats.org/drawingml/2006/main">
+            <a:r>
               <a:t>- https://github.com/AnselmoBorges/dbt-moderno-na-pratica/blob/main/roteiros/09-ci-state-defer.md</a:t>
             </a:r>
           </a:p>
@@ -2142,6 +2192,11 @@
           </a:p>
           <a:p xmlns:a="http://schemas.openxmlformats.org/drawingml/2006/main">
             <a:r>
+              <a:t>- https://rescuepoint.com.br/assets/img/logo.png</a:t>
+            </a:r>
+          </a:p>
+          <a:p xmlns:a="http://schemas.openxmlformats.org/drawingml/2006/main">
+            <a:r>
               <a:t>- https://github.com/AnselmoBorges/dbt-moderno-na-pratica/blob/main/roteiros/09-ci-state-defer.md</a:t>
             </a:r>
           </a:p>
@@ -2302,6 +2357,11 @@
           </a:p>
           <a:p xmlns:a="http://schemas.openxmlformats.org/drawingml/2006/main">
             <a:r>
+              <a:t>- https://rescuepoint.com.br/assets/img/logo.png</a:t>
+            </a:r>
+          </a:p>
+          <a:p xmlns:a="http://schemas.openxmlformats.org/drawingml/2006/main">
+            <a:r>
               <a:t>- https://github.com/AnselmoBorges/dbt-moderno-na-pratica/blob/main/roteiros/09-ci-state-defer.md</a:t>
             </a:r>
           </a:p>
@@ -2462,6 +2522,11 @@
           </a:p>
           <a:p xmlns:a="http://schemas.openxmlformats.org/drawingml/2006/main">
             <a:r>
+              <a:t>- https://rescuepoint.com.br/assets/img/logo.png</a:t>
+            </a:r>
+          </a:p>
+          <a:p xmlns:a="http://schemas.openxmlformats.org/drawingml/2006/main">
+            <a:r>
               <a:t>- https://github.com/AnselmoBorges/dbt-moderno-na-pratica/blob/main/roteiros/09-ci-state-defer.md</a:t>
             </a:r>
           </a:p>
@@ -2622,6 +2687,11 @@
           </a:p>
           <a:p xmlns:a="http://schemas.openxmlformats.org/drawingml/2006/main">
             <a:r>
+              <a:t>- https://rescuepoint.com.br/assets/img/logo.png</a:t>
+            </a:r>
+          </a:p>
+          <a:p xmlns:a="http://schemas.openxmlformats.org/drawingml/2006/main">
+            <a:r>
               <a:t>- https://github.com/AnselmoBorges/dbt-moderno-na-pratica/blob/main/roteiros/09-ci-state-defer.md</a:t>
             </a:r>
           </a:p>
@@ -2782,6 +2852,11 @@
           </a:p>
           <a:p xmlns:a="http://schemas.openxmlformats.org/drawingml/2006/main">
             <a:r>
+              <a:t>- https://rescuepoint.com.br/assets/img/logo.png</a:t>
+            </a:r>
+          </a:p>
+          <a:p xmlns:a="http://schemas.openxmlformats.org/drawingml/2006/main">
+            <a:r>
               <a:t>- https://github.com/AnselmoBorges/dbt-moderno-na-pratica/blob/main/roteiros/09-ci-state-defer.md</a:t>
             </a:r>
           </a:p>
@@ -2942,6 +3017,11 @@
           </a:p>
           <a:p xmlns:a="http://schemas.openxmlformats.org/drawingml/2006/main">
             <a:r>
+              <a:t>- https://rescuepoint.com.br/assets/img/logo.png</a:t>
+            </a:r>
+          </a:p>
+          <a:p xmlns:a="http://schemas.openxmlformats.org/drawingml/2006/main">
+            <a:r>
               <a:t>- https://github.com/AnselmoBorges/dbt-moderno-na-pratica/blob/main/roteiros/09-ci-state-defer.md</a:t>
             </a:r>
           </a:p>
@@ -3102,6 +3182,11 @@
           </a:p>
           <a:p xmlns:a="http://schemas.openxmlformats.org/drawingml/2006/main">
             <a:r>
+              <a:t>- https://rescuepoint.com.br/assets/img/logo.png</a:t>
+            </a:r>
+          </a:p>
+          <a:p xmlns:a="http://schemas.openxmlformats.org/drawingml/2006/main">
+            <a:r>
               <a:t>- https://github.com/AnselmoBorges/dbt-moderno-na-pratica/blob/main/roteiros/09-ci-state-defer.md</a:t>
             </a:r>
           </a:p>
@@ -3262,6 +3347,11 @@
           </a:p>
           <a:p xmlns:a="http://schemas.openxmlformats.org/drawingml/2006/main">
             <a:r>
+              <a:t>- https://rescuepoint.com.br/assets/img/logo.png</a:t>
+            </a:r>
+          </a:p>
+          <a:p xmlns:a="http://schemas.openxmlformats.org/drawingml/2006/main">
+            <a:r>
               <a:t>- https://github.com/AnselmoBorges/dbt-moderno-na-pratica/blob/main/roteiros/09-ci-state-defer.md</a:t>
             </a:r>
           </a:p>
@@ -3422,6 +3512,11 @@
           </a:p>
           <a:p xmlns:a="http://schemas.openxmlformats.org/drawingml/2006/main">
             <a:r>
+              <a:t>- https://rescuepoint.com.br/assets/img/logo.png</a:t>
+            </a:r>
+          </a:p>
+          <a:p xmlns:a="http://schemas.openxmlformats.org/drawingml/2006/main">
+            <a:r>
               <a:t>- https://github.com/AnselmoBorges/dbt-moderno-na-pratica/blob/main/roteiros/09-ci-state-defer.md</a:t>
             </a:r>
           </a:p>
@@ -3578,6 +3673,11 @@
           <a:p xmlns:a="http://schemas.openxmlformats.org/drawingml/2006/main">
             <a:r>
               <a:t>- https://docs.getdbt.com/reference/node-selection/methods#the-state-method</a:t>
+            </a:r>
+          </a:p>
+          <a:p xmlns:a="http://schemas.openxmlformats.org/drawingml/2006/main">
+            <a:r>
+              <a:t>- https://rescuepoint.com.br/assets/img/logo.png</a:t>
             </a:r>
           </a:p>
           <a:p xmlns:a="http://schemas.openxmlformats.org/drawingml/2006/main">
@@ -3699,7 +3799,7 @@
   </p:cSld>
   <p:clrMap bg1="lt1" tx1="dk1" bg2="lt2" tx2="dk2" accent1="accent1" accent2="accent2" accent3="accent3" accent4="accent4" accent5="accent5" accent6="accent6" hlink="hlink" folHlink="folHlink"/>
   <p:sldLayoutIdLst>
-    <p:sldLayoutId xmlns:r="http://schemas.openxmlformats.org/officeDocument/2006/relationships" id="2147483649" r:id="Rfde14aa5a8c346cc"/>
+    <p:sldLayoutId xmlns:r="http://schemas.openxmlformats.org/officeDocument/2006/relationships" id="2147483649" r:id="R85f529a825be42f0"/>
   </p:sldLayoutIdLst>
   <p:txStyles>
     <p:titleStyle>
@@ -3997,8 +4097,8 @@
   </p:cSld>
   <p:clrMap bg1="lt1" tx1="dk1" bg2="lt2" tx2="dk2" accent1="accent1" accent2="accent2" accent3="accent3" accent4="accent4" accent5="accent5" accent6="accent6" hlink="hlink" folHlink="folHlink"/>
   <p:sldLayoutIdLst>
-    <p:sldLayoutId xmlns:r="http://schemas.openxmlformats.org/officeDocument/2006/relationships" id="2147483651" r:id="R869dc4442d154b83"/>
-    <p:sldLayoutId xmlns:r="http://schemas.openxmlformats.org/officeDocument/2006/relationships" id="2147483652" r:id="R28d12694515f487d"/>
+    <p:sldLayoutId xmlns:r="http://schemas.openxmlformats.org/officeDocument/2006/relationships" id="2147483651" r:id="Rc896edde0b624514"/>
+    <p:sldLayoutId xmlns:r="http://schemas.openxmlformats.org/officeDocument/2006/relationships" id="2147483652" r:id="R43a8ffa6afb24070"/>
   </p:sldLayoutIdLst>
 </p:sldMaster>
 </file>
@@ -4522,14 +4622,14 @@
       </p:grpSpPr>
       <p:pic>
         <p:nvPicPr>
-          <p:cNvPr id="10" name="" descr="Ilustração conceitual autoral da capa: EPISÓDIO 9 — CI inteligente com artifacts, state e defer."/>
+          <p:cNvPr id="13" name="" descr="Ilustração conceitual autoral da capa: EPISÓDIO 9 — CI inteligente com artifacts, state e defer."/>
           <p:cNvPicPr>
             <a:picLocks xmlns:a="http://schemas.openxmlformats.org/drawingml/2006/main" noChangeAspect="1"/>
           </p:cNvPicPr>
           <p:nvPr/>
         </p:nvPicPr>
         <p:blipFill>
-          <a:blip xmlns:r="http://schemas.openxmlformats.org/officeDocument/2006/relationships" xmlns:a="http://schemas.openxmlformats.org/drawingml/2006/main" r:embed="R4931475c34e74e9c"/>
+          <a:blip xmlns:r="http://schemas.openxmlformats.org/officeDocument/2006/relationships" xmlns:a="http://schemas.openxmlformats.org/drawingml/2006/main" r:embed="Rb843a289f7a0441a"/>
           <a:srcRect xmlns:a="http://schemas.openxmlformats.org/drawingml/2006/main" l="19785" t="0" r="19785" b="0"/>
           <a:stretch xmlns:a="http://schemas.openxmlformats.org/drawingml/2006/main">
             <a:fillRect l="0" t="0" r="0" b="0"/>
@@ -4550,7 +4650,7 @@
           <p:cNvPr id="2" name="cover-text-surface">
             <a:extLst xmlns:a="http://schemas.openxmlformats.org/drawingml/2006/main">
               <a:ext uri="{FF2B5EF4-FFF2-40B4-BE49-F238E27FC236}">
-                <a16:creationId xmlns:a16="http://schemas.microsoft.com/office/drawing/2014/main" id="{7D4E95FA-5A42-4C32-8A6B-170DAA4264AA}"/>
+                <a16:creationId xmlns:a16="http://schemas.microsoft.com/office/drawing/2014/main" id="{91329514-C8EC-475A-B865-67AB0B26A575}"/>
               </a:ext>
             </a:extLst>
           </p:cNvPr>
@@ -4583,7 +4683,7 @@
           <p:cNvPr id="3" name="cover-divider">
             <a:extLst xmlns:a="http://schemas.openxmlformats.org/drawingml/2006/main">
               <a:ext uri="{FF2B5EF4-FFF2-40B4-BE49-F238E27FC236}">
-                <a16:creationId xmlns:a16="http://schemas.microsoft.com/office/drawing/2014/main" id="{9EF9D1F6-E7CB-48C7-8CD2-4E600A48AC35}"/>
+                <a16:creationId xmlns:a16="http://schemas.microsoft.com/office/drawing/2014/main" id="{9A17CEFE-C6C1-4A1F-A99D-0015D85BB87F}"/>
               </a:ext>
             </a:extLst>
           </p:cNvPr>
@@ -4614,7 +4714,7 @@
           <p:cNvPr id="4" name="cover-episode">
             <a:extLst xmlns:a="http://schemas.openxmlformats.org/drawingml/2006/main">
               <a:ext uri="{FF2B5EF4-FFF2-40B4-BE49-F238E27FC236}">
-                <a16:creationId xmlns:a16="http://schemas.microsoft.com/office/drawing/2014/main" id="{5650F32D-D207-4EB2-BF26-99E212F561E8}"/>
+                <a16:creationId xmlns:a16="http://schemas.microsoft.com/office/drawing/2014/main" id="{CA5EC222-90D1-42EF-B3BA-EDE810B30064}"/>
               </a:ext>
             </a:extLst>
           </p:cNvPr>
@@ -4662,10 +4762,69 @@
       </p:sp>
       <p:sp>
         <p:nvSpPr>
-          <p:cNvPr id="5" name="cover-title">
-            <a:extLst xmlns:a="http://schemas.openxmlformats.org/drawingml/2006/main">
-              <a:ext uri="{FF2B5EF4-FFF2-40B4-BE49-F238E27FC236}">
-                <a16:creationId xmlns:a16="http://schemas.microsoft.com/office/drawing/2014/main" id="{CE6612A4-CCDA-42A4-ABA1-F6D2AFD06E16}"/>
+          <p:cNvPr id="5" name="rescue-point-logo-background">
+            <a:extLst xmlns:a="http://schemas.openxmlformats.org/drawingml/2006/main">
+              <a:ext uri="{FF2B5EF4-FFF2-40B4-BE49-F238E27FC236}">
+                <a16:creationId xmlns:a16="http://schemas.microsoft.com/office/drawing/2014/main" id="{7802FF67-B64E-48FF-9BD2-5D78758AA275}"/>
+              </a:ext>
+            </a:extLst>
+          </p:cNvPr>
+          <p:cNvSpPr>
+            <a:spLocks xmlns:a="http://schemas.openxmlformats.org/drawingml/2006/main" noGrp="1"/>
+          </p:cNvSpPr>
+          <p:nvPr/>
+        </p:nvSpPr>
+        <p:spPr>
+          <a:xfrm xmlns:a="http://schemas.openxmlformats.org/drawingml/2006/main">
+            <a:off x="9772650" y="133350"/>
+            <a:ext cx="1733550" cy="457200"/>
+          </a:xfrm>
+          <a:prstGeom xmlns:a="http://schemas.openxmlformats.org/drawingml/2006/main" prst="roundRect">
+            <a:avLst>
+              <a:gd name="adj" fmla="val 16667"/>
+            </a:avLst>
+          </a:prstGeom>
+          <a:solidFill xmlns:a="http://schemas.openxmlformats.org/drawingml/2006/main">
+            <a:srgbClr val="06142E"/>
+          </a:solidFill>
+          <a:ln xmlns:a="http://schemas.openxmlformats.org/drawingml/2006/main" w="9525">
+            <a:solidFill>
+              <a:srgbClr val="1EC5FF">
+                <a:alpha val="33333"/>
+              </a:srgbClr>
+            </a:solidFill>
+            <a:prstDash val="solid"/>
+          </a:ln>
+        </p:spPr>
+      </p:sp>
+      <p:pic>
+        <p:nvPicPr>
+          <p:cNvPr id="18" name="" descr="Ilustração conceitual autoral da capa: EPISÓDIO 9 — CI inteligente com artifacts, state e defer."/>
+          <p:cNvPicPr>
+            <a:picLocks xmlns:a="http://schemas.openxmlformats.org/drawingml/2006/main" noChangeAspect="1"/>
+          </p:cNvPicPr>
+          <p:nvPr/>
+        </p:nvPicPr>
+        <p:blipFill>
+          <a:blip xmlns:r="http://schemas.openxmlformats.org/officeDocument/2006/relationships" xmlns:a="http://schemas.openxmlformats.org/drawingml/2006/main" r:embed="Rf09f92617a2c4af4"/>
+          <a:stretch xmlns:a="http://schemas.openxmlformats.org/drawingml/2006/main"/>
+        </p:blipFill>
+        <p:spPr>
+          <a:xfrm xmlns:a="http://schemas.openxmlformats.org/drawingml/2006/main">
+            <a:off x="9893718" y="209550"/>
+            <a:ext cx="1491414" cy="323850"/>
+          </a:xfrm>
+          <a:prstGeom xmlns:a="http://schemas.openxmlformats.org/drawingml/2006/main" prst="rect">
+            <a:avLst/>
+          </a:prstGeom>
+        </p:spPr>
+      </p:pic>
+      <p:sp>
+        <p:nvSpPr>
+          <p:cNvPr id="7" name="cover-title">
+            <a:extLst xmlns:a="http://schemas.openxmlformats.org/drawingml/2006/main">
+              <a:ext uri="{FF2B5EF4-FFF2-40B4-BE49-F238E27FC236}">
+                <a16:creationId xmlns:a16="http://schemas.microsoft.com/office/drawing/2014/main" id="{656397F3-8E34-4923-BF10-4840EA40FEB5}"/>
               </a:ext>
             </a:extLst>
           </p:cNvPr>
@@ -4713,10 +4872,10 @@
       </p:sp>
       <p:sp>
         <p:nvSpPr>
-          <p:cNvPr id="6" name="cover-subtitle">
-            <a:extLst xmlns:a="http://schemas.openxmlformats.org/drawingml/2006/main">
-              <a:ext uri="{FF2B5EF4-FFF2-40B4-BE49-F238E27FC236}">
-                <a16:creationId xmlns:a16="http://schemas.microsoft.com/office/drawing/2014/main" id="{71B876D1-10BC-413F-B513-200095407C9F}"/>
+          <p:cNvPr id="8" name="cover-subtitle">
+            <a:extLst xmlns:a="http://schemas.openxmlformats.org/drawingml/2006/main">
+              <a:ext uri="{FF2B5EF4-FFF2-40B4-BE49-F238E27FC236}">
+                <a16:creationId xmlns:a16="http://schemas.microsoft.com/office/drawing/2014/main" id="{D7D027B2-1F7A-458F-932D-57C2B0AF3B57}"/>
               </a:ext>
             </a:extLst>
           </p:cNvPr>
@@ -4764,10 +4923,10 @@
       </p:sp>
       <p:sp>
         <p:nvSpPr>
-          <p:cNvPr id="7" name="cover-accent">
-            <a:extLst xmlns:a="http://schemas.openxmlformats.org/drawingml/2006/main">
-              <a:ext uri="{FF2B5EF4-FFF2-40B4-BE49-F238E27FC236}">
-                <a16:creationId xmlns:a16="http://schemas.microsoft.com/office/drawing/2014/main" id="{12212FCB-BA3A-40A6-9E60-3E8A697461AD}"/>
+          <p:cNvPr id="9" name="cover-accent">
+            <a:extLst xmlns:a="http://schemas.openxmlformats.org/drawingml/2006/main">
+              <a:ext uri="{FF2B5EF4-FFF2-40B4-BE49-F238E27FC236}">
+                <a16:creationId xmlns:a16="http://schemas.microsoft.com/office/drawing/2014/main" id="{E17935BF-5D4F-4160-BC4D-62296A1E8842}"/>
               </a:ext>
             </a:extLst>
           </p:cNvPr>
@@ -4795,10 +4954,10 @@
       </p:sp>
       <p:sp>
         <p:nvSpPr>
-          <p:cNvPr id="8" name="cover-meta">
-            <a:extLst xmlns:a="http://schemas.openxmlformats.org/drawingml/2006/main">
-              <a:ext uri="{FF2B5EF4-FFF2-40B4-BE49-F238E27FC236}">
-                <a16:creationId xmlns:a16="http://schemas.microsoft.com/office/drawing/2014/main" id="{842DCDB0-8266-4D10-BE0A-83828154A822}"/>
+          <p:cNvPr id="10" name="cover-meta">
+            <a:extLst xmlns:a="http://schemas.openxmlformats.org/drawingml/2006/main">
+              <a:ext uri="{FF2B5EF4-FFF2-40B4-BE49-F238E27FC236}">
+                <a16:creationId xmlns:a16="http://schemas.microsoft.com/office/drawing/2014/main" id="{5A915E5F-364B-43FF-8D1C-928496886FBC}"/>
               </a:ext>
             </a:extLst>
           </p:cNvPr>
@@ -4851,7 +5010,7 @@
     </p:spTree>
     <p:extLst>
       <p:ext uri="{BB962C8B-B14F-4D97-AF65-F5344CB8AC3E}">
-        <p14:creationId xmlns:p14="http://schemas.microsoft.com/office/powerpoint/2010/main" val="845755981"/>
+        <p14:creationId xmlns:p14="http://schemas.microsoft.com/office/powerpoint/2010/main" val="1706629902"/>
       </p:ext>
     </p:extLst>
   </p:cSld>
@@ -4887,10 +5046,10 @@
       </p:grpSpPr>
       <p:sp>
         <p:nvSpPr>
-          <p:cNvPr id="10" name="slide-title">
-            <a:extLst xmlns:a="http://schemas.openxmlformats.org/drawingml/2006/main">
-              <a:ext uri="{FF2B5EF4-FFF2-40B4-BE49-F238E27FC236}">
-                <a16:creationId xmlns:a16="http://schemas.microsoft.com/office/drawing/2014/main" id="{D85F67C4-7AF6-487E-8A44-FEF718D19169}"/>
+          <p:cNvPr id="12" name="slide-title">
+            <a:extLst xmlns:a="http://schemas.openxmlformats.org/drawingml/2006/main">
+              <a:ext uri="{FF2B5EF4-FFF2-40B4-BE49-F238E27FC236}">
+                <a16:creationId xmlns:a16="http://schemas.microsoft.com/office/drawing/2014/main" id="{5D4099B4-6884-4A4E-ABDA-1A68EE4A03E0}"/>
               </a:ext>
             </a:extLst>
           </p:cNvPr>
@@ -4941,7 +5100,7 @@
           <p:cNvPr id="2" name="visual-claim">
             <a:extLst xmlns:a="http://schemas.openxmlformats.org/drawingml/2006/main">
               <a:ext uri="{FF2B5EF4-FFF2-40B4-BE49-F238E27FC236}">
-                <a16:creationId xmlns:a16="http://schemas.microsoft.com/office/drawing/2014/main" id="{7ED55796-7D89-4FDA-950F-F451D451806E}"/>
+                <a16:creationId xmlns:a16="http://schemas.microsoft.com/office/drawing/2014/main" id="{F26EF338-B64B-446B-85AD-A0E92FEF2978}"/>
               </a:ext>
             </a:extLst>
           </p:cNvPr>
@@ -4992,7 +5151,7 @@
           <p:cNvPr id="3" name="image-surface">
             <a:extLst xmlns:a="http://schemas.openxmlformats.org/drawingml/2006/main">
               <a:ext uri="{FF2B5EF4-FFF2-40B4-BE49-F238E27FC236}">
-                <a16:creationId xmlns:a16="http://schemas.microsoft.com/office/drawing/2014/main" id="{C26ED348-A57F-48D4-BB0B-2EA529FDFA1A}"/>
+                <a16:creationId xmlns:a16="http://schemas.microsoft.com/office/drawing/2014/main" id="{FDF6A7C6-45C9-4CD2-BAF8-D6371DB6971E}"/>
               </a:ext>
             </a:extLst>
           </p:cNvPr>
@@ -5026,14 +5185,14 @@
       </p:sp>
       <p:pic>
         <p:nvPicPr>
-          <p:cNvPr id="15" name="" descr="Figura oficial da documentação dbt usada para explicar: Defer reutiliza relações de outro estado — Modelos não construídos localmente podem apontar para produção ou staging.."/>
+          <p:cNvPr id="18" name="" descr="Figura oficial da documentação dbt usada para explicar: Defer reutiliza relações de outro estado — Modelos não construídos localmente podem apontar para produção ou staging.."/>
           <p:cNvPicPr>
             <a:picLocks xmlns:a="http://schemas.openxmlformats.org/drawingml/2006/main" noChangeAspect="1"/>
           </p:cNvPicPr>
           <p:nvPr/>
         </p:nvPicPr>
         <p:blipFill>
-          <a:blip xmlns:r="http://schemas.openxmlformats.org/officeDocument/2006/relationships" xmlns:a="http://schemas.openxmlformats.org/drawingml/2006/main" r:embed="Rb46546c42ecd4b6d"/>
+          <a:blip xmlns:r="http://schemas.openxmlformats.org/officeDocument/2006/relationships" xmlns:a="http://schemas.openxmlformats.org/drawingml/2006/main" r:embed="Rd48ab41e4028490e"/>
           <a:stretch xmlns:a="http://schemas.openxmlformats.org/drawingml/2006/main"/>
         </p:blipFill>
         <p:spPr>
@@ -5051,7 +5210,7 @@
           <p:cNvPr id="5" name="image-caption">
             <a:extLst xmlns:a="http://schemas.openxmlformats.org/drawingml/2006/main">
               <a:ext uri="{FF2B5EF4-FFF2-40B4-BE49-F238E27FC236}">
-                <a16:creationId xmlns:a16="http://schemas.microsoft.com/office/drawing/2014/main" id="{13E77BBD-9865-4F05-A8B9-339658F3DA1E}"/>
+                <a16:creationId xmlns:a16="http://schemas.microsoft.com/office/drawing/2014/main" id="{1E26C7BC-1CB4-41B7-A191-5E1EC91FCE83}"/>
               </a:ext>
             </a:extLst>
           </p:cNvPr>
@@ -5102,7 +5261,7 @@
           <p:cNvPr id="6" name="eyebrow">
             <a:extLst xmlns:a="http://schemas.openxmlformats.org/drawingml/2006/main">
               <a:ext uri="{FF2B5EF4-FFF2-40B4-BE49-F238E27FC236}">
-                <a16:creationId xmlns:a16="http://schemas.microsoft.com/office/drawing/2014/main" id="{91D06DEA-CF45-412B-9C60-9FB8ACB58A6B}"/>
+                <a16:creationId xmlns:a16="http://schemas.microsoft.com/office/drawing/2014/main" id="{1987969F-6D93-4AC6-8F02-AB6723A8E883}"/>
               </a:ext>
             </a:extLst>
           </p:cNvPr>
@@ -5150,10 +5309,69 @@
       </p:sp>
       <p:sp>
         <p:nvSpPr>
-          <p:cNvPr id="7" name="footer-rule">
-            <a:extLst xmlns:a="http://schemas.openxmlformats.org/drawingml/2006/main">
-              <a:ext uri="{FF2B5EF4-FFF2-40B4-BE49-F238E27FC236}">
-                <a16:creationId xmlns:a16="http://schemas.microsoft.com/office/drawing/2014/main" id="{29DDE901-491A-4E02-8A30-94A678359216}"/>
+          <p:cNvPr id="7" name="rescue-point-logo-background">
+            <a:extLst xmlns:a="http://schemas.openxmlformats.org/drawingml/2006/main">
+              <a:ext uri="{FF2B5EF4-FFF2-40B4-BE49-F238E27FC236}">
+                <a16:creationId xmlns:a16="http://schemas.microsoft.com/office/drawing/2014/main" id="{04829D1B-6F4D-486D-8582-041CDE5E4C1C}"/>
+              </a:ext>
+            </a:extLst>
+          </p:cNvPr>
+          <p:cNvSpPr>
+            <a:spLocks xmlns:a="http://schemas.openxmlformats.org/drawingml/2006/main" noGrp="1"/>
+          </p:cNvSpPr>
+          <p:nvPr/>
+        </p:nvSpPr>
+        <p:spPr>
+          <a:xfrm xmlns:a="http://schemas.openxmlformats.org/drawingml/2006/main">
+            <a:off x="9772650" y="133350"/>
+            <a:ext cx="1733550" cy="457200"/>
+          </a:xfrm>
+          <a:prstGeom xmlns:a="http://schemas.openxmlformats.org/drawingml/2006/main" prst="roundRect">
+            <a:avLst>
+              <a:gd name="adj" fmla="val 16667"/>
+            </a:avLst>
+          </a:prstGeom>
+          <a:solidFill xmlns:a="http://schemas.openxmlformats.org/drawingml/2006/main">
+            <a:srgbClr val="06142E"/>
+          </a:solidFill>
+          <a:ln xmlns:a="http://schemas.openxmlformats.org/drawingml/2006/main" w="9525">
+            <a:solidFill>
+              <a:srgbClr val="1EC5FF">
+                <a:alpha val="33333"/>
+              </a:srgbClr>
+            </a:solidFill>
+            <a:prstDash val="solid"/>
+          </a:ln>
+        </p:spPr>
+      </p:sp>
+      <p:pic>
+        <p:nvPicPr>
+          <p:cNvPr id="22" name="" descr="Figura oficial da documentação dbt usada para explicar: Defer reutiliza relações de outro estado — Modelos não construídos localmente podem apontar para produção ou staging.."/>
+          <p:cNvPicPr>
+            <a:picLocks xmlns:a="http://schemas.openxmlformats.org/drawingml/2006/main" noChangeAspect="1"/>
+          </p:cNvPicPr>
+          <p:nvPr/>
+        </p:nvPicPr>
+        <p:blipFill>
+          <a:blip xmlns:r="http://schemas.openxmlformats.org/officeDocument/2006/relationships" xmlns:a="http://schemas.openxmlformats.org/drawingml/2006/main" r:embed="R8593d7fd1b1b4c5c"/>
+          <a:stretch xmlns:a="http://schemas.openxmlformats.org/drawingml/2006/main"/>
+        </p:blipFill>
+        <p:spPr>
+          <a:xfrm xmlns:a="http://schemas.openxmlformats.org/drawingml/2006/main">
+            <a:off x="9893718" y="209550"/>
+            <a:ext cx="1491414" cy="323850"/>
+          </a:xfrm>
+          <a:prstGeom xmlns:a="http://schemas.openxmlformats.org/drawingml/2006/main" prst="rect">
+            <a:avLst/>
+          </a:prstGeom>
+        </p:spPr>
+      </p:pic>
+      <p:sp>
+        <p:nvSpPr>
+          <p:cNvPr id="9" name="footer-rule">
+            <a:extLst xmlns:a="http://schemas.openxmlformats.org/drawingml/2006/main">
+              <a:ext uri="{FF2B5EF4-FFF2-40B4-BE49-F238E27FC236}">
+                <a16:creationId xmlns:a16="http://schemas.microsoft.com/office/drawing/2014/main" id="{680184F6-83A3-4790-B47C-5BAD11F78C6C}"/>
               </a:ext>
             </a:extLst>
           </p:cNvPr>
@@ -5183,10 +5401,10 @@
       </p:sp>
       <p:sp>
         <p:nvSpPr>
-          <p:cNvPr id="8" name="footer">
-            <a:extLst xmlns:a="http://schemas.openxmlformats.org/drawingml/2006/main">
-              <a:ext uri="{FF2B5EF4-FFF2-40B4-BE49-F238E27FC236}">
-                <a16:creationId xmlns:a16="http://schemas.microsoft.com/office/drawing/2014/main" id="{534B0CAA-16E8-4733-A1D6-5E5FD3DE5EC0}"/>
+          <p:cNvPr id="10" name="footer">
+            <a:extLst xmlns:a="http://schemas.openxmlformats.org/drawingml/2006/main">
+              <a:ext uri="{FF2B5EF4-FFF2-40B4-BE49-F238E27FC236}">
+                <a16:creationId xmlns:a16="http://schemas.microsoft.com/office/drawing/2014/main" id="{C184C143-5706-4D07-B5B6-9005C3C25D56}"/>
               </a:ext>
             </a:extLst>
           </p:cNvPr>
@@ -5238,10 +5456,10 @@
       </p:sp>
       <p:sp>
         <p:nvSpPr>
-          <p:cNvPr id="9" name="page-number">
-            <a:extLst xmlns:a="http://schemas.openxmlformats.org/drawingml/2006/main">
-              <a:ext uri="{FF2B5EF4-FFF2-40B4-BE49-F238E27FC236}">
-                <a16:creationId xmlns:a16="http://schemas.microsoft.com/office/drawing/2014/main" id="{34BF199F-F0CF-4E53-9D38-6F234A2D0D35}"/>
+          <p:cNvPr id="11" name="page-number">
+            <a:extLst xmlns:a="http://schemas.openxmlformats.org/drawingml/2006/main">
+              <a:ext uri="{FF2B5EF4-FFF2-40B4-BE49-F238E27FC236}">
+                <a16:creationId xmlns:a16="http://schemas.microsoft.com/office/drawing/2014/main" id="{684C5393-57AC-4F33-ABB4-600058E7AB45}"/>
               </a:ext>
             </a:extLst>
           </p:cNvPr>
@@ -5294,7 +5512,7 @@
     </p:spTree>
     <p:extLst>
       <p:ext uri="{BB962C8B-B14F-4D97-AF65-F5344CB8AC3E}">
-        <p14:creationId xmlns:p14="http://schemas.microsoft.com/office/powerpoint/2010/main" val="1061775737"/>
+        <p14:creationId xmlns:p14="http://schemas.microsoft.com/office/powerpoint/2010/main" val="991463912"/>
       </p:ext>
     </p:extLst>
   </p:cSld>
@@ -5330,10 +5548,10 @@
       </p:grpSpPr>
       <p:sp>
         <p:nvSpPr>
-          <p:cNvPr id="11" name="slide-title">
-            <a:extLst xmlns:a="http://schemas.openxmlformats.org/drawingml/2006/main">
-              <a:ext uri="{FF2B5EF4-FFF2-40B4-BE49-F238E27FC236}">
-                <a16:creationId xmlns:a16="http://schemas.microsoft.com/office/drawing/2014/main" id="{35327F9D-D605-463A-859B-A268E9F433C7}"/>
+          <p:cNvPr id="13" name="slide-title">
+            <a:extLst xmlns:a="http://schemas.openxmlformats.org/drawingml/2006/main">
+              <a:ext uri="{FF2B5EF4-FFF2-40B4-BE49-F238E27FC236}">
+                <a16:creationId xmlns:a16="http://schemas.microsoft.com/office/drawing/2014/main" id="{A7929E80-197F-495A-BB96-C73BCAA08BF2}"/>
               </a:ext>
             </a:extLst>
           </p:cNvPr>
@@ -5384,7 +5602,7 @@
           <p:cNvPr id="2" name="slide-subtitle">
             <a:extLst xmlns:a="http://schemas.openxmlformats.org/drawingml/2006/main">
               <a:ext uri="{FF2B5EF4-FFF2-40B4-BE49-F238E27FC236}">
-                <a16:creationId xmlns:a16="http://schemas.microsoft.com/office/drawing/2014/main" id="{AD135551-D723-45B0-BABF-71CFA8C1935F}"/>
+                <a16:creationId xmlns:a16="http://schemas.microsoft.com/office/drawing/2014/main" id="{3A6FAD3F-7A89-49A3-A784-566FE824934E}"/>
               </a:ext>
             </a:extLst>
           </p:cNvPr>
@@ -5435,7 +5653,7 @@
           <p:cNvPr id="3" name="bullets">
             <a:extLst xmlns:a="http://schemas.openxmlformats.org/drawingml/2006/main">
               <a:ext uri="{FF2B5EF4-FFF2-40B4-BE49-F238E27FC236}">
-                <a16:creationId xmlns:a16="http://schemas.microsoft.com/office/drawing/2014/main" id="{D9A2686D-AC11-41DA-8CB5-DE92D9AC6E87}"/>
+                <a16:creationId xmlns:a16="http://schemas.microsoft.com/office/drawing/2014/main" id="{F341A2B1-4F0C-4E1B-8592-4EAD56EF37A1}"/>
               </a:ext>
             </a:extLst>
           </p:cNvPr>
@@ -5522,7 +5740,7 @@
           <p:cNvPr id="4" name="ambient-glow">
             <a:extLst xmlns:a="http://schemas.openxmlformats.org/drawingml/2006/main">
               <a:ext uri="{FF2B5EF4-FFF2-40B4-BE49-F238E27FC236}">
-                <a16:creationId xmlns:a16="http://schemas.microsoft.com/office/drawing/2014/main" id="{D6B49B11-5641-40A2-A2E0-4572E0FA6A7A}"/>
+                <a16:creationId xmlns:a16="http://schemas.microsoft.com/office/drawing/2014/main" id="{11BBA512-9DFC-4281-9870-5EC2260977C4}"/>
               </a:ext>
             </a:extLst>
           </p:cNvPr>
@@ -5559,7 +5777,7 @@
           <p:cNvPr id="5" name="ambient-core">
             <a:extLst xmlns:a="http://schemas.openxmlformats.org/drawingml/2006/main">
               <a:ext uri="{FF2B5EF4-FFF2-40B4-BE49-F238E27FC236}">
-                <a16:creationId xmlns:a16="http://schemas.microsoft.com/office/drawing/2014/main" id="{C46166C8-F77B-4956-9086-BB4D35A06C8A}"/>
+                <a16:creationId xmlns:a16="http://schemas.microsoft.com/office/drawing/2014/main" id="{0CFBCA76-D46E-4085-8546-51976A3F3F91}"/>
               </a:ext>
             </a:extLst>
           </p:cNvPr>
@@ -5596,7 +5814,7 @@
           <p:cNvPr id="6" name="section-number">
             <a:extLst xmlns:a="http://schemas.openxmlformats.org/drawingml/2006/main">
               <a:ext uri="{FF2B5EF4-FFF2-40B4-BE49-F238E27FC236}">
-                <a16:creationId xmlns:a16="http://schemas.microsoft.com/office/drawing/2014/main" id="{A24BCA22-9F29-4F9E-AFB8-A8A810D65EA7}"/>
+                <a16:creationId xmlns:a16="http://schemas.microsoft.com/office/drawing/2014/main" id="{8A1E770B-03B4-4717-8EEF-AED3CC919647}"/>
               </a:ext>
             </a:extLst>
           </p:cNvPr>
@@ -5647,7 +5865,7 @@
           <p:cNvPr id="7" name="eyebrow">
             <a:extLst xmlns:a="http://schemas.openxmlformats.org/drawingml/2006/main">
               <a:ext uri="{FF2B5EF4-FFF2-40B4-BE49-F238E27FC236}">
-                <a16:creationId xmlns:a16="http://schemas.microsoft.com/office/drawing/2014/main" id="{9C3F52C2-4065-4788-879A-687B58C5AB2E}"/>
+                <a16:creationId xmlns:a16="http://schemas.microsoft.com/office/drawing/2014/main" id="{77C97E51-C8AE-4028-8E4D-21541DD3A0FA}"/>
               </a:ext>
             </a:extLst>
           </p:cNvPr>
@@ -5695,10 +5913,69 @@
       </p:sp>
       <p:sp>
         <p:nvSpPr>
-          <p:cNvPr id="8" name="footer-rule">
-            <a:extLst xmlns:a="http://schemas.openxmlformats.org/drawingml/2006/main">
-              <a:ext uri="{FF2B5EF4-FFF2-40B4-BE49-F238E27FC236}">
-                <a16:creationId xmlns:a16="http://schemas.microsoft.com/office/drawing/2014/main" id="{2973A9BD-0318-4C40-B45D-0CC2F22ACF52}"/>
+          <p:cNvPr id="8" name="rescue-point-logo-background">
+            <a:extLst xmlns:a="http://schemas.openxmlformats.org/drawingml/2006/main">
+              <a:ext uri="{FF2B5EF4-FFF2-40B4-BE49-F238E27FC236}">
+                <a16:creationId xmlns:a16="http://schemas.microsoft.com/office/drawing/2014/main" id="{37380D3E-78B6-4E57-87A2-B0E4283C87A6}"/>
+              </a:ext>
+            </a:extLst>
+          </p:cNvPr>
+          <p:cNvSpPr>
+            <a:spLocks xmlns:a="http://schemas.openxmlformats.org/drawingml/2006/main" noGrp="1"/>
+          </p:cNvSpPr>
+          <p:nvPr/>
+        </p:nvSpPr>
+        <p:spPr>
+          <a:xfrm xmlns:a="http://schemas.openxmlformats.org/drawingml/2006/main">
+            <a:off x="9772650" y="133350"/>
+            <a:ext cx="1733550" cy="457200"/>
+          </a:xfrm>
+          <a:prstGeom xmlns:a="http://schemas.openxmlformats.org/drawingml/2006/main" prst="roundRect">
+            <a:avLst>
+              <a:gd name="adj" fmla="val 16667"/>
+            </a:avLst>
+          </a:prstGeom>
+          <a:solidFill xmlns:a="http://schemas.openxmlformats.org/drawingml/2006/main">
+            <a:srgbClr val="06142E"/>
+          </a:solidFill>
+          <a:ln xmlns:a="http://schemas.openxmlformats.org/drawingml/2006/main" w="9525">
+            <a:solidFill>
+              <a:srgbClr val="1EC5FF">
+                <a:alpha val="33333"/>
+              </a:srgbClr>
+            </a:solidFill>
+            <a:prstDash val="solid"/>
+          </a:ln>
+        </p:spPr>
+      </p:sp>
+      <p:pic>
+        <p:nvPicPr>
+          <p:cNvPr id="23" name="" descr="Figura oficial da documentação dbt usada para explicar: CI madura tem três níveis — Parse barato, seleção por impacto e validação completa cumprem papéis diferentes.."/>
+          <p:cNvPicPr>
+            <a:picLocks xmlns:a="http://schemas.openxmlformats.org/drawingml/2006/main" noChangeAspect="1"/>
+          </p:cNvPicPr>
+          <p:nvPr/>
+        </p:nvPicPr>
+        <p:blipFill>
+          <a:blip xmlns:r="http://schemas.openxmlformats.org/officeDocument/2006/relationships" xmlns:a="http://schemas.openxmlformats.org/drawingml/2006/main" r:embed="R45b1ba567bb841ac"/>
+          <a:stretch xmlns:a="http://schemas.openxmlformats.org/drawingml/2006/main"/>
+        </p:blipFill>
+        <p:spPr>
+          <a:xfrm xmlns:a="http://schemas.openxmlformats.org/drawingml/2006/main">
+            <a:off x="9893718" y="209550"/>
+            <a:ext cx="1491414" cy="323850"/>
+          </a:xfrm>
+          <a:prstGeom xmlns:a="http://schemas.openxmlformats.org/drawingml/2006/main" prst="rect">
+            <a:avLst/>
+          </a:prstGeom>
+        </p:spPr>
+      </p:pic>
+      <p:sp>
+        <p:nvSpPr>
+          <p:cNvPr id="10" name="footer-rule">
+            <a:extLst xmlns:a="http://schemas.openxmlformats.org/drawingml/2006/main">
+              <a:ext uri="{FF2B5EF4-FFF2-40B4-BE49-F238E27FC236}">
+                <a16:creationId xmlns:a16="http://schemas.microsoft.com/office/drawing/2014/main" id="{44D975F0-0A63-404A-BB7A-904EE898FCAE}"/>
               </a:ext>
             </a:extLst>
           </p:cNvPr>
@@ -5728,10 +6005,10 @@
       </p:sp>
       <p:sp>
         <p:nvSpPr>
-          <p:cNvPr id="9" name="footer">
-            <a:extLst xmlns:a="http://schemas.openxmlformats.org/drawingml/2006/main">
-              <a:ext uri="{FF2B5EF4-FFF2-40B4-BE49-F238E27FC236}">
-                <a16:creationId xmlns:a16="http://schemas.microsoft.com/office/drawing/2014/main" id="{AD697DF3-1A8E-4C4C-8E9C-AABAC7820229}"/>
+          <p:cNvPr id="11" name="footer">
+            <a:extLst xmlns:a="http://schemas.openxmlformats.org/drawingml/2006/main">
+              <a:ext uri="{FF2B5EF4-FFF2-40B4-BE49-F238E27FC236}">
+                <a16:creationId xmlns:a16="http://schemas.microsoft.com/office/drawing/2014/main" id="{5EBBE239-A82C-4906-95C9-F2E397D37C36}"/>
               </a:ext>
             </a:extLst>
           </p:cNvPr>
@@ -5783,10 +6060,10 @@
       </p:sp>
       <p:sp>
         <p:nvSpPr>
-          <p:cNvPr id="10" name="page-number">
-            <a:extLst xmlns:a="http://schemas.openxmlformats.org/drawingml/2006/main">
-              <a:ext uri="{FF2B5EF4-FFF2-40B4-BE49-F238E27FC236}">
-                <a16:creationId xmlns:a16="http://schemas.microsoft.com/office/drawing/2014/main" id="{06DF1F4F-07EF-4BC5-9B44-4DC4D6BD6B9D}"/>
+          <p:cNvPr id="12" name="page-number">
+            <a:extLst xmlns:a="http://schemas.openxmlformats.org/drawingml/2006/main">
+              <a:ext uri="{FF2B5EF4-FFF2-40B4-BE49-F238E27FC236}">
+                <a16:creationId xmlns:a16="http://schemas.microsoft.com/office/drawing/2014/main" id="{0F677B54-CF2F-4F33-9731-476799870C4E}"/>
               </a:ext>
             </a:extLst>
           </p:cNvPr>
@@ -5839,7 +6116,7 @@
     </p:spTree>
     <p:extLst>
       <p:ext uri="{BB962C8B-B14F-4D97-AF65-F5344CB8AC3E}">
-        <p14:creationId xmlns:p14="http://schemas.microsoft.com/office/powerpoint/2010/main" val="1565409998"/>
+        <p14:creationId xmlns:p14="http://schemas.microsoft.com/office/powerpoint/2010/main" val="1646858437"/>
       </p:ext>
     </p:extLst>
   </p:cSld>
@@ -5867,10 +6144,10 @@
       </p:grpSpPr>
       <p:sp>
         <p:nvSpPr>
-          <p:cNvPr id="9" name="slide-title">
-            <a:extLst xmlns:a="http://schemas.openxmlformats.org/drawingml/2006/main">
-              <a:ext uri="{FF2B5EF4-FFF2-40B4-BE49-F238E27FC236}">
-                <a16:creationId xmlns:a16="http://schemas.microsoft.com/office/drawing/2014/main" id="{64C8CB2E-F620-4FA4-A0B1-BE5F4B038145}"/>
+          <p:cNvPr id="11" name="slide-title">
+            <a:extLst xmlns:a="http://schemas.openxmlformats.org/drawingml/2006/main">
+              <a:ext uri="{FF2B5EF4-FFF2-40B4-BE49-F238E27FC236}">
+                <a16:creationId xmlns:a16="http://schemas.microsoft.com/office/drawing/2014/main" id="{C6C0F8BA-EE31-469F-8F7C-8CE545F0AA7C}"/>
               </a:ext>
             </a:extLst>
           </p:cNvPr>
@@ -5921,7 +6198,7 @@
           <p:cNvPr id="2" name="layer-1">
             <a:extLst xmlns:a="http://schemas.openxmlformats.org/drawingml/2006/main">
               <a:ext uri="{FF2B5EF4-FFF2-40B4-BE49-F238E27FC236}">
-                <a16:creationId xmlns:a16="http://schemas.microsoft.com/office/drawing/2014/main" id="{95CE90DC-2EA5-4477-955F-8AC1961660E0}"/>
+                <a16:creationId xmlns:a16="http://schemas.microsoft.com/office/drawing/2014/main" id="{65EB1310-707D-4F22-B00D-1D1C8A08132B}"/>
               </a:ext>
             </a:extLst>
           </p:cNvPr>
@@ -5978,7 +6255,7 @@
           <p:cNvPr id="3" name="layer-2">
             <a:extLst xmlns:a="http://schemas.openxmlformats.org/drawingml/2006/main">
               <a:ext uri="{FF2B5EF4-FFF2-40B4-BE49-F238E27FC236}">
-                <a16:creationId xmlns:a16="http://schemas.microsoft.com/office/drawing/2014/main" id="{6D163A0D-3C86-487B-A2C6-CDBFE1213B19}"/>
+                <a16:creationId xmlns:a16="http://schemas.microsoft.com/office/drawing/2014/main" id="{6B2D8E44-6F08-4F75-80FB-4DFE3398E0FD}"/>
               </a:ext>
             </a:extLst>
           </p:cNvPr>
@@ -6035,7 +6312,7 @@
           <p:cNvPr id="4" name="layer-3">
             <a:extLst xmlns:a="http://schemas.openxmlformats.org/drawingml/2006/main">
               <a:ext uri="{FF2B5EF4-FFF2-40B4-BE49-F238E27FC236}">
-                <a16:creationId xmlns:a16="http://schemas.microsoft.com/office/drawing/2014/main" id="{EF21FDD5-1B63-49EA-A77E-3F0BFE46C78B}"/>
+                <a16:creationId xmlns:a16="http://schemas.microsoft.com/office/drawing/2014/main" id="{998DF9FE-77BB-469F-BD03-B627A9B57BE0}"/>
               </a:ext>
             </a:extLst>
           </p:cNvPr>
@@ -6092,7 +6369,7 @@
           <p:cNvPr id="5" name="eyebrow">
             <a:extLst xmlns:a="http://schemas.openxmlformats.org/drawingml/2006/main">
               <a:ext uri="{FF2B5EF4-FFF2-40B4-BE49-F238E27FC236}">
-                <a16:creationId xmlns:a16="http://schemas.microsoft.com/office/drawing/2014/main" id="{23484B4A-4808-4662-9DC0-967830257409}"/>
+                <a16:creationId xmlns:a16="http://schemas.microsoft.com/office/drawing/2014/main" id="{C5E583BC-B364-4198-92F6-8226EEB9C5DD}"/>
               </a:ext>
             </a:extLst>
           </p:cNvPr>
@@ -6140,10 +6417,69 @@
       </p:sp>
       <p:sp>
         <p:nvSpPr>
-          <p:cNvPr id="6" name="footer-rule">
-            <a:extLst xmlns:a="http://schemas.openxmlformats.org/drawingml/2006/main">
-              <a:ext uri="{FF2B5EF4-FFF2-40B4-BE49-F238E27FC236}">
-                <a16:creationId xmlns:a16="http://schemas.microsoft.com/office/drawing/2014/main" id="{1D131327-E6FB-41D6-924C-7698A71E5B53}"/>
+          <p:cNvPr id="6" name="rescue-point-logo-background">
+            <a:extLst xmlns:a="http://schemas.openxmlformats.org/drawingml/2006/main">
+              <a:ext uri="{FF2B5EF4-FFF2-40B4-BE49-F238E27FC236}">
+                <a16:creationId xmlns:a16="http://schemas.microsoft.com/office/drawing/2014/main" id="{E7D26F4B-CAD9-4691-962A-E6BBB6A7B941}"/>
+              </a:ext>
+            </a:extLst>
+          </p:cNvPr>
+          <p:cNvSpPr>
+            <a:spLocks xmlns:a="http://schemas.openxmlformats.org/drawingml/2006/main" noGrp="1"/>
+          </p:cNvSpPr>
+          <p:nvPr/>
+        </p:nvSpPr>
+        <p:spPr>
+          <a:xfrm xmlns:a="http://schemas.openxmlformats.org/drawingml/2006/main">
+            <a:off x="9772650" y="133350"/>
+            <a:ext cx="1733550" cy="457200"/>
+          </a:xfrm>
+          <a:prstGeom xmlns:a="http://schemas.openxmlformats.org/drawingml/2006/main" prst="roundRect">
+            <a:avLst>
+              <a:gd name="adj" fmla="val 16667"/>
+            </a:avLst>
+          </a:prstGeom>
+          <a:solidFill xmlns:a="http://schemas.openxmlformats.org/drawingml/2006/main">
+            <a:srgbClr val="06142E"/>
+          </a:solidFill>
+          <a:ln xmlns:a="http://schemas.openxmlformats.org/drawingml/2006/main" w="9525">
+            <a:solidFill>
+              <a:srgbClr val="1EC5FF">
+                <a:alpha val="33333"/>
+              </a:srgbClr>
+            </a:solidFill>
+            <a:prstDash val="solid"/>
+          </a:ln>
+        </p:spPr>
+      </p:sp>
+      <p:pic>
+        <p:nvPicPr>
+          <p:cNvPr id="19" name="" descr="Figura oficial da documentação dbt usada para explicar: CI madura tem três níveis — Parse."/>
+          <p:cNvPicPr>
+            <a:picLocks xmlns:a="http://schemas.openxmlformats.org/drawingml/2006/main" noChangeAspect="1"/>
+          </p:cNvPicPr>
+          <p:nvPr/>
+        </p:nvPicPr>
+        <p:blipFill>
+          <a:blip xmlns:r="http://schemas.openxmlformats.org/officeDocument/2006/relationships" xmlns:a="http://schemas.openxmlformats.org/drawingml/2006/main" r:embed="R83fcf6e28f50451b"/>
+          <a:stretch xmlns:a="http://schemas.openxmlformats.org/drawingml/2006/main"/>
+        </p:blipFill>
+        <p:spPr>
+          <a:xfrm xmlns:a="http://schemas.openxmlformats.org/drawingml/2006/main">
+            <a:off x="9893718" y="209550"/>
+            <a:ext cx="1491414" cy="323850"/>
+          </a:xfrm>
+          <a:prstGeom xmlns:a="http://schemas.openxmlformats.org/drawingml/2006/main" prst="rect">
+            <a:avLst/>
+          </a:prstGeom>
+        </p:spPr>
+      </p:pic>
+      <p:sp>
+        <p:nvSpPr>
+          <p:cNvPr id="8" name="footer-rule">
+            <a:extLst xmlns:a="http://schemas.openxmlformats.org/drawingml/2006/main">
+              <a:ext uri="{FF2B5EF4-FFF2-40B4-BE49-F238E27FC236}">
+                <a16:creationId xmlns:a16="http://schemas.microsoft.com/office/drawing/2014/main" id="{9D86803E-529F-4767-8BE1-68F20950B9C4}"/>
               </a:ext>
             </a:extLst>
           </p:cNvPr>
@@ -6173,10 +6509,10 @@
       </p:sp>
       <p:sp>
         <p:nvSpPr>
-          <p:cNvPr id="7" name="footer">
-            <a:extLst xmlns:a="http://schemas.openxmlformats.org/drawingml/2006/main">
-              <a:ext uri="{FF2B5EF4-FFF2-40B4-BE49-F238E27FC236}">
-                <a16:creationId xmlns:a16="http://schemas.microsoft.com/office/drawing/2014/main" id="{51C2CE85-EF65-4A51-B12F-9925B877E21C}"/>
+          <p:cNvPr id="9" name="footer">
+            <a:extLst xmlns:a="http://schemas.openxmlformats.org/drawingml/2006/main">
+              <a:ext uri="{FF2B5EF4-FFF2-40B4-BE49-F238E27FC236}">
+                <a16:creationId xmlns:a16="http://schemas.microsoft.com/office/drawing/2014/main" id="{62AD9587-4050-4D32-AB66-C767ACED50C7}"/>
               </a:ext>
             </a:extLst>
           </p:cNvPr>
@@ -6228,10 +6564,10 @@
       </p:sp>
       <p:sp>
         <p:nvSpPr>
-          <p:cNvPr id="8" name="page-number">
-            <a:extLst xmlns:a="http://schemas.openxmlformats.org/drawingml/2006/main">
-              <a:ext uri="{FF2B5EF4-FFF2-40B4-BE49-F238E27FC236}">
-                <a16:creationId xmlns:a16="http://schemas.microsoft.com/office/drawing/2014/main" id="{B1B5A8AF-26B7-45A8-8343-F04ECE27ECB2}"/>
+          <p:cNvPr id="10" name="page-number">
+            <a:extLst xmlns:a="http://schemas.openxmlformats.org/drawingml/2006/main">
+              <a:ext uri="{FF2B5EF4-FFF2-40B4-BE49-F238E27FC236}">
+                <a16:creationId xmlns:a16="http://schemas.microsoft.com/office/drawing/2014/main" id="{9186CD6E-360E-4933-B39D-51F5A816EFEA}"/>
               </a:ext>
             </a:extLst>
           </p:cNvPr>
@@ -6284,7 +6620,7 @@
     </p:spTree>
     <p:extLst>
       <p:ext uri="{BB962C8B-B14F-4D97-AF65-F5344CB8AC3E}">
-        <p14:creationId xmlns:p14="http://schemas.microsoft.com/office/powerpoint/2010/main" val="506617080"/>
+        <p14:creationId xmlns:p14="http://schemas.microsoft.com/office/powerpoint/2010/main" val="488482184"/>
       </p:ext>
     </p:extLst>
   </p:cSld>
@@ -6320,10 +6656,10 @@
       </p:grpSpPr>
       <p:sp>
         <p:nvSpPr>
-          <p:cNvPr id="9" name="slide-title">
-            <a:extLst xmlns:a="http://schemas.openxmlformats.org/drawingml/2006/main">
-              <a:ext uri="{FF2B5EF4-FFF2-40B4-BE49-F238E27FC236}">
-                <a16:creationId xmlns:a16="http://schemas.microsoft.com/office/drawing/2014/main" id="{C2AB0085-A541-451C-827A-1E1320ACF063}"/>
+          <p:cNvPr id="11" name="slide-title">
+            <a:extLst xmlns:a="http://schemas.openxmlformats.org/drawingml/2006/main">
+              <a:ext uri="{FF2B5EF4-FFF2-40B4-BE49-F238E27FC236}">
+                <a16:creationId xmlns:a16="http://schemas.microsoft.com/office/drawing/2014/main" id="{CC506C1A-05E7-40D7-99BC-F6EE0AF2DB72}"/>
               </a:ext>
             </a:extLst>
           </p:cNvPr>
@@ -6374,7 +6710,7 @@
           <p:cNvPr id="2" name="code-surface">
             <a:extLst xmlns:a="http://schemas.openxmlformats.org/drawingml/2006/main">
               <a:ext uri="{FF2B5EF4-FFF2-40B4-BE49-F238E27FC236}">
-                <a16:creationId xmlns:a16="http://schemas.microsoft.com/office/drawing/2014/main" id="{78677BDC-06C8-4859-BC51-717E823816CD}"/>
+                <a16:creationId xmlns:a16="http://schemas.microsoft.com/office/drawing/2014/main" id="{D36E5C42-C1F6-449B-83B2-91F1D4CA2E8E}"/>
               </a:ext>
             </a:extLst>
           </p:cNvPr>
@@ -6409,7 +6745,7 @@
           <p:cNvPr id="3" name="command">
             <a:extLst xmlns:a="http://schemas.openxmlformats.org/drawingml/2006/main">
               <a:ext uri="{FF2B5EF4-FFF2-40B4-BE49-F238E27FC236}">
-                <a16:creationId xmlns:a16="http://schemas.microsoft.com/office/drawing/2014/main" id="{24222308-9F77-48E7-B785-90756A3E8518}"/>
+                <a16:creationId xmlns:a16="http://schemas.microsoft.com/office/drawing/2014/main" id="{D6FD220E-BFFF-48EB-8E4E-60510275408F}"/>
               </a:ext>
             </a:extLst>
           </p:cNvPr>
@@ -6460,7 +6796,7 @@
           <p:cNvPr id="4" name="command-help">
             <a:extLst xmlns:a="http://schemas.openxmlformats.org/drawingml/2006/main">
               <a:ext uri="{FF2B5EF4-FFF2-40B4-BE49-F238E27FC236}">
-                <a16:creationId xmlns:a16="http://schemas.microsoft.com/office/drawing/2014/main" id="{14B9A1EA-586B-4D71-B628-E120F5388924}"/>
+                <a16:creationId xmlns:a16="http://schemas.microsoft.com/office/drawing/2014/main" id="{1918A126-4E1E-424D-9C6A-49560CE31EF1}"/>
               </a:ext>
             </a:extLst>
           </p:cNvPr>
@@ -6511,7 +6847,7 @@
           <p:cNvPr id="5" name="eyebrow">
             <a:extLst xmlns:a="http://schemas.openxmlformats.org/drawingml/2006/main">
               <a:ext uri="{FF2B5EF4-FFF2-40B4-BE49-F238E27FC236}">
-                <a16:creationId xmlns:a16="http://schemas.microsoft.com/office/drawing/2014/main" id="{8FB3C386-D6FD-4447-A851-C6F6804F5462}"/>
+                <a16:creationId xmlns:a16="http://schemas.microsoft.com/office/drawing/2014/main" id="{CAD36389-6F40-45AA-8781-527969786277}"/>
               </a:ext>
             </a:extLst>
           </p:cNvPr>
@@ -6559,10 +6895,69 @@
       </p:sp>
       <p:sp>
         <p:nvSpPr>
-          <p:cNvPr id="6" name="footer-rule">
-            <a:extLst xmlns:a="http://schemas.openxmlformats.org/drawingml/2006/main">
-              <a:ext uri="{FF2B5EF4-FFF2-40B4-BE49-F238E27FC236}">
-                <a16:creationId xmlns:a16="http://schemas.microsoft.com/office/drawing/2014/main" id="{068B15E1-B3DA-4851-9BBC-C3E4246EC102}"/>
+          <p:cNvPr id="6" name="rescue-point-logo-background">
+            <a:extLst xmlns:a="http://schemas.openxmlformats.org/drawingml/2006/main">
+              <a:ext uri="{FF2B5EF4-FFF2-40B4-BE49-F238E27FC236}">
+                <a16:creationId xmlns:a16="http://schemas.microsoft.com/office/drawing/2014/main" id="{E562BCE8-C177-4200-A23C-70C1A4B79C73}"/>
+              </a:ext>
+            </a:extLst>
+          </p:cNvPr>
+          <p:cNvSpPr>
+            <a:spLocks xmlns:a="http://schemas.openxmlformats.org/drawingml/2006/main" noGrp="1"/>
+          </p:cNvSpPr>
+          <p:nvPr/>
+        </p:nvSpPr>
+        <p:spPr>
+          <a:xfrm xmlns:a="http://schemas.openxmlformats.org/drawingml/2006/main">
+            <a:off x="9772650" y="133350"/>
+            <a:ext cx="1733550" cy="457200"/>
+          </a:xfrm>
+          <a:prstGeom xmlns:a="http://schemas.openxmlformats.org/drawingml/2006/main" prst="roundRect">
+            <a:avLst>
+              <a:gd name="adj" fmla="val 16667"/>
+            </a:avLst>
+          </a:prstGeom>
+          <a:solidFill xmlns:a="http://schemas.openxmlformats.org/drawingml/2006/main">
+            <a:srgbClr val="06142E"/>
+          </a:solidFill>
+          <a:ln xmlns:a="http://schemas.openxmlformats.org/drawingml/2006/main" w="9525">
+            <a:solidFill>
+              <a:srgbClr val="1EC5FF">
+                <a:alpha val="33333"/>
+              </a:srgbClr>
+            </a:solidFill>
+            <a:prstDash val="solid"/>
+          </a:ln>
+        </p:spPr>
+      </p:sp>
+      <p:pic>
+        <p:nvPicPr>
+          <p:cNvPr id="19" name="" descr="Figura oficial da documentação dbt usada para explicar: Demonstração — execute — python course.py checkpoint 09."/>
+          <p:cNvPicPr>
+            <a:picLocks xmlns:a="http://schemas.openxmlformats.org/drawingml/2006/main" noChangeAspect="1"/>
+          </p:cNvPicPr>
+          <p:nvPr/>
+        </p:nvPicPr>
+        <p:blipFill>
+          <a:blip xmlns:r="http://schemas.openxmlformats.org/officeDocument/2006/relationships" xmlns:a="http://schemas.openxmlformats.org/drawingml/2006/main" r:embed="R613e6229a9354078"/>
+          <a:stretch xmlns:a="http://schemas.openxmlformats.org/drawingml/2006/main"/>
+        </p:blipFill>
+        <p:spPr>
+          <a:xfrm xmlns:a="http://schemas.openxmlformats.org/drawingml/2006/main">
+            <a:off x="9893718" y="209550"/>
+            <a:ext cx="1491414" cy="323850"/>
+          </a:xfrm>
+          <a:prstGeom xmlns:a="http://schemas.openxmlformats.org/drawingml/2006/main" prst="rect">
+            <a:avLst/>
+          </a:prstGeom>
+        </p:spPr>
+      </p:pic>
+      <p:sp>
+        <p:nvSpPr>
+          <p:cNvPr id="8" name="footer-rule">
+            <a:extLst xmlns:a="http://schemas.openxmlformats.org/drawingml/2006/main">
+              <a:ext uri="{FF2B5EF4-FFF2-40B4-BE49-F238E27FC236}">
+                <a16:creationId xmlns:a16="http://schemas.microsoft.com/office/drawing/2014/main" id="{9560A3DB-1F41-47DB-9142-453011088442}"/>
               </a:ext>
             </a:extLst>
           </p:cNvPr>
@@ -6592,10 +6987,10 @@
       </p:sp>
       <p:sp>
         <p:nvSpPr>
-          <p:cNvPr id="7" name="footer">
-            <a:extLst xmlns:a="http://schemas.openxmlformats.org/drawingml/2006/main">
-              <a:ext uri="{FF2B5EF4-FFF2-40B4-BE49-F238E27FC236}">
-                <a16:creationId xmlns:a16="http://schemas.microsoft.com/office/drawing/2014/main" id="{B5C7B447-89D8-422A-AD0A-AD86B9ADB27D}"/>
+          <p:cNvPr id="9" name="footer">
+            <a:extLst xmlns:a="http://schemas.openxmlformats.org/drawingml/2006/main">
+              <a:ext uri="{FF2B5EF4-FFF2-40B4-BE49-F238E27FC236}">
+                <a16:creationId xmlns:a16="http://schemas.microsoft.com/office/drawing/2014/main" id="{1E6CBA9B-6E9E-4CA5-87D3-575E38F1D0F6}"/>
               </a:ext>
             </a:extLst>
           </p:cNvPr>
@@ -6647,10 +7042,10 @@
       </p:sp>
       <p:sp>
         <p:nvSpPr>
-          <p:cNvPr id="8" name="page-number">
-            <a:extLst xmlns:a="http://schemas.openxmlformats.org/drawingml/2006/main">
-              <a:ext uri="{FF2B5EF4-FFF2-40B4-BE49-F238E27FC236}">
-                <a16:creationId xmlns:a16="http://schemas.microsoft.com/office/drawing/2014/main" id="{3FDC1C02-2B11-4A1B-A941-62D55690395F}"/>
+          <p:cNvPr id="10" name="page-number">
+            <a:extLst xmlns:a="http://schemas.openxmlformats.org/drawingml/2006/main">
+              <a:ext uri="{FF2B5EF4-FFF2-40B4-BE49-F238E27FC236}">
+                <a16:creationId xmlns:a16="http://schemas.microsoft.com/office/drawing/2014/main" id="{B433B5D6-8BC0-4C00-9D35-5891B9CDFC83}"/>
               </a:ext>
             </a:extLst>
           </p:cNvPr>
@@ -6703,7 +7098,7 @@
     </p:spTree>
     <p:extLst>
       <p:ext uri="{BB962C8B-B14F-4D97-AF65-F5344CB8AC3E}">
-        <p14:creationId xmlns:p14="http://schemas.microsoft.com/office/powerpoint/2010/main" val="1418170415"/>
+        <p14:creationId xmlns:p14="http://schemas.microsoft.com/office/powerpoint/2010/main" val="1525103946"/>
       </p:ext>
     </p:extLst>
   </p:cSld>
@@ -6731,10 +7126,10 @@
       </p:grpSpPr>
       <p:sp>
         <p:nvSpPr>
-          <p:cNvPr id="14" name="slide-title">
-            <a:extLst xmlns:a="http://schemas.openxmlformats.org/drawingml/2006/main">
-              <a:ext uri="{FF2B5EF4-FFF2-40B4-BE49-F238E27FC236}">
-                <a16:creationId xmlns:a16="http://schemas.microsoft.com/office/drawing/2014/main" id="{63DBD120-79E4-4DDB-921C-B0F80E8DA8B9}"/>
+          <p:cNvPr id="16" name="slide-title">
+            <a:extLst xmlns:a="http://schemas.openxmlformats.org/drawingml/2006/main">
+              <a:ext uri="{FF2B5EF4-FFF2-40B4-BE49-F238E27FC236}">
+                <a16:creationId xmlns:a16="http://schemas.microsoft.com/office/drawing/2014/main" id="{2C652247-6F24-465A-B25A-5B9D4D8384E7}"/>
               </a:ext>
             </a:extLst>
           </p:cNvPr>
@@ -6785,7 +7180,7 @@
           <p:cNvPr id="2" name="step-num-1">
             <a:extLst xmlns:a="http://schemas.openxmlformats.org/drawingml/2006/main">
               <a:ext uri="{FF2B5EF4-FFF2-40B4-BE49-F238E27FC236}">
-                <a16:creationId xmlns:a16="http://schemas.microsoft.com/office/drawing/2014/main" id="{2B8C583F-82DF-43C8-9F2E-3A59FC1A8C0A}"/>
+                <a16:creationId xmlns:a16="http://schemas.microsoft.com/office/drawing/2014/main" id="{B467B2B7-7B92-4E1A-B491-098DEF76EF8A}"/>
               </a:ext>
             </a:extLst>
           </p:cNvPr>
@@ -6836,7 +7231,7 @@
           <p:cNvPr id="3" name="step-label-1">
             <a:extLst xmlns:a="http://schemas.openxmlformats.org/drawingml/2006/main">
               <a:ext uri="{FF2B5EF4-FFF2-40B4-BE49-F238E27FC236}">
-                <a16:creationId xmlns:a16="http://schemas.microsoft.com/office/drawing/2014/main" id="{D323A62C-E70D-4145-9E23-62E9CBCF6E01}"/>
+                <a16:creationId xmlns:a16="http://schemas.microsoft.com/office/drawing/2014/main" id="{76B5E198-0C11-4E82-B430-430E28C39A8D}"/>
               </a:ext>
             </a:extLst>
           </p:cNvPr>
@@ -6887,7 +7282,7 @@
           <p:cNvPr id="4" name="step-line-1">
             <a:extLst xmlns:a="http://schemas.openxmlformats.org/drawingml/2006/main">
               <a:ext uri="{FF2B5EF4-FFF2-40B4-BE49-F238E27FC236}">
-                <a16:creationId xmlns:a16="http://schemas.microsoft.com/office/drawing/2014/main" id="{88824DEB-CCF7-4AB6-B1AF-95E6E2D3F888}"/>
+                <a16:creationId xmlns:a16="http://schemas.microsoft.com/office/drawing/2014/main" id="{102DD50A-FBBF-4637-9E54-6E9C62E4EBFB}"/>
               </a:ext>
             </a:extLst>
           </p:cNvPr>
@@ -6918,7 +7313,7 @@
           <p:cNvPr id="5" name="step-num-2">
             <a:extLst xmlns:a="http://schemas.openxmlformats.org/drawingml/2006/main">
               <a:ext uri="{FF2B5EF4-FFF2-40B4-BE49-F238E27FC236}">
-                <a16:creationId xmlns:a16="http://schemas.microsoft.com/office/drawing/2014/main" id="{0A8756AF-2596-4AEA-BF7D-AF29D3D2BC4F}"/>
+                <a16:creationId xmlns:a16="http://schemas.microsoft.com/office/drawing/2014/main" id="{2301B818-6E99-4516-B2FD-B148C614591B}"/>
               </a:ext>
             </a:extLst>
           </p:cNvPr>
@@ -6969,7 +7364,7 @@
           <p:cNvPr id="6" name="step-label-2">
             <a:extLst xmlns:a="http://schemas.openxmlformats.org/drawingml/2006/main">
               <a:ext uri="{FF2B5EF4-FFF2-40B4-BE49-F238E27FC236}">
-                <a16:creationId xmlns:a16="http://schemas.microsoft.com/office/drawing/2014/main" id="{C4D4F91C-CC00-43F7-9A54-5001A9A7BC16}"/>
+                <a16:creationId xmlns:a16="http://schemas.microsoft.com/office/drawing/2014/main" id="{3FEAE215-3381-472C-9F6D-9AAF77B64090}"/>
               </a:ext>
             </a:extLst>
           </p:cNvPr>
@@ -7020,7 +7415,7 @@
           <p:cNvPr id="7" name="step-line-2">
             <a:extLst xmlns:a="http://schemas.openxmlformats.org/drawingml/2006/main">
               <a:ext uri="{FF2B5EF4-FFF2-40B4-BE49-F238E27FC236}">
-                <a16:creationId xmlns:a16="http://schemas.microsoft.com/office/drawing/2014/main" id="{2CEC108A-9F5F-443D-946E-E725FC405FE4}"/>
+                <a16:creationId xmlns:a16="http://schemas.microsoft.com/office/drawing/2014/main" id="{0FFB532B-AE40-4758-8E59-6642A8F741B9}"/>
               </a:ext>
             </a:extLst>
           </p:cNvPr>
@@ -7051,7 +7446,7 @@
           <p:cNvPr id="8" name="step-num-3">
             <a:extLst xmlns:a="http://schemas.openxmlformats.org/drawingml/2006/main">
               <a:ext uri="{FF2B5EF4-FFF2-40B4-BE49-F238E27FC236}">
-                <a16:creationId xmlns:a16="http://schemas.microsoft.com/office/drawing/2014/main" id="{12E6B566-99C6-4A4B-8892-CAB56B5E5E89}"/>
+                <a16:creationId xmlns:a16="http://schemas.microsoft.com/office/drawing/2014/main" id="{092D2391-2202-4AAB-84DB-52A63410C4F0}"/>
               </a:ext>
             </a:extLst>
           </p:cNvPr>
@@ -7102,7 +7497,7 @@
           <p:cNvPr id="9" name="step-label-3">
             <a:extLst xmlns:a="http://schemas.openxmlformats.org/drawingml/2006/main">
               <a:ext uri="{FF2B5EF4-FFF2-40B4-BE49-F238E27FC236}">
-                <a16:creationId xmlns:a16="http://schemas.microsoft.com/office/drawing/2014/main" id="{BD09CCEF-EEF7-4DBE-9BAD-5ECFF47E6D50}"/>
+                <a16:creationId xmlns:a16="http://schemas.microsoft.com/office/drawing/2014/main" id="{4F83035F-040C-42C7-A146-6813EB7EA75B}"/>
               </a:ext>
             </a:extLst>
           </p:cNvPr>
@@ -7153,7 +7548,7 @@
           <p:cNvPr id="10" name="eyebrow">
             <a:extLst xmlns:a="http://schemas.openxmlformats.org/drawingml/2006/main">
               <a:ext uri="{FF2B5EF4-FFF2-40B4-BE49-F238E27FC236}">
-                <a16:creationId xmlns:a16="http://schemas.microsoft.com/office/drawing/2014/main" id="{53A4ECD3-50A2-4F21-92AB-661940364DDE}"/>
+                <a16:creationId xmlns:a16="http://schemas.microsoft.com/office/drawing/2014/main" id="{2BEB7EDF-0DEE-4D0C-931E-59348DABC9FC}"/>
               </a:ext>
             </a:extLst>
           </p:cNvPr>
@@ -7201,10 +7596,69 @@
       </p:sp>
       <p:sp>
         <p:nvSpPr>
-          <p:cNvPr id="11" name="footer-rule">
-            <a:extLst xmlns:a="http://schemas.openxmlformats.org/drawingml/2006/main">
-              <a:ext uri="{FF2B5EF4-FFF2-40B4-BE49-F238E27FC236}">
-                <a16:creationId xmlns:a16="http://schemas.microsoft.com/office/drawing/2014/main" id="{E2AC0074-A31F-4425-8EE6-35DA654776A2}"/>
+          <p:cNvPr id="11" name="rescue-point-logo-background">
+            <a:extLst xmlns:a="http://schemas.openxmlformats.org/drawingml/2006/main">
+              <a:ext uri="{FF2B5EF4-FFF2-40B4-BE49-F238E27FC236}">
+                <a16:creationId xmlns:a16="http://schemas.microsoft.com/office/drawing/2014/main" id="{382280B0-BB44-4C6F-8662-33C21B2106F9}"/>
+              </a:ext>
+            </a:extLst>
+          </p:cNvPr>
+          <p:cNvSpPr>
+            <a:spLocks xmlns:a="http://schemas.openxmlformats.org/drawingml/2006/main" noGrp="1"/>
+          </p:cNvSpPr>
+          <p:nvPr/>
+        </p:nvSpPr>
+        <p:spPr>
+          <a:xfrm xmlns:a="http://schemas.openxmlformats.org/drawingml/2006/main">
+            <a:off x="9772650" y="133350"/>
+            <a:ext cx="1733550" cy="457200"/>
+          </a:xfrm>
+          <a:prstGeom xmlns:a="http://schemas.openxmlformats.org/drawingml/2006/main" prst="roundRect">
+            <a:avLst>
+              <a:gd name="adj" fmla="val 16667"/>
+            </a:avLst>
+          </a:prstGeom>
+          <a:solidFill xmlns:a="http://schemas.openxmlformats.org/drawingml/2006/main">
+            <a:srgbClr val="06142E"/>
+          </a:solidFill>
+          <a:ln xmlns:a="http://schemas.openxmlformats.org/drawingml/2006/main" w="9525">
+            <a:solidFill>
+              <a:srgbClr val="1EC5FF">
+                <a:alpha val="33333"/>
+              </a:srgbClr>
+            </a:solidFill>
+            <a:prstDash val="solid"/>
+          </a:ln>
+        </p:spPr>
+      </p:sp>
+      <p:pic>
+        <p:nvPicPr>
+          <p:cNvPr id="29" name="" descr="Figura oficial da documentação dbt usada para explicar: Demonstração — observe — 01."/>
+          <p:cNvPicPr>
+            <a:picLocks xmlns:a="http://schemas.openxmlformats.org/drawingml/2006/main" noChangeAspect="1"/>
+          </p:cNvPicPr>
+          <p:nvPr/>
+        </p:nvPicPr>
+        <p:blipFill>
+          <a:blip xmlns:r="http://schemas.openxmlformats.org/officeDocument/2006/relationships" xmlns:a="http://schemas.openxmlformats.org/drawingml/2006/main" r:embed="Rc73234609e954cc5"/>
+          <a:stretch xmlns:a="http://schemas.openxmlformats.org/drawingml/2006/main"/>
+        </p:blipFill>
+        <p:spPr>
+          <a:xfrm xmlns:a="http://schemas.openxmlformats.org/drawingml/2006/main">
+            <a:off x="9893718" y="209550"/>
+            <a:ext cx="1491414" cy="323850"/>
+          </a:xfrm>
+          <a:prstGeom xmlns:a="http://schemas.openxmlformats.org/drawingml/2006/main" prst="rect">
+            <a:avLst/>
+          </a:prstGeom>
+        </p:spPr>
+      </p:pic>
+      <p:sp>
+        <p:nvSpPr>
+          <p:cNvPr id="13" name="footer-rule">
+            <a:extLst xmlns:a="http://schemas.openxmlformats.org/drawingml/2006/main">
+              <a:ext uri="{FF2B5EF4-FFF2-40B4-BE49-F238E27FC236}">
+                <a16:creationId xmlns:a16="http://schemas.microsoft.com/office/drawing/2014/main" id="{A4167911-7436-42E4-97C8-F77CE91DF2C9}"/>
               </a:ext>
             </a:extLst>
           </p:cNvPr>
@@ -7234,10 +7688,10 @@
       </p:sp>
       <p:sp>
         <p:nvSpPr>
-          <p:cNvPr id="12" name="footer">
-            <a:extLst xmlns:a="http://schemas.openxmlformats.org/drawingml/2006/main">
-              <a:ext uri="{FF2B5EF4-FFF2-40B4-BE49-F238E27FC236}">
-                <a16:creationId xmlns:a16="http://schemas.microsoft.com/office/drawing/2014/main" id="{D4B7B3B2-A81F-4223-92C1-6A5D83B3ED3B}"/>
+          <p:cNvPr id="14" name="footer">
+            <a:extLst xmlns:a="http://schemas.openxmlformats.org/drawingml/2006/main">
+              <a:ext uri="{FF2B5EF4-FFF2-40B4-BE49-F238E27FC236}">
+                <a16:creationId xmlns:a16="http://schemas.microsoft.com/office/drawing/2014/main" id="{6278094E-8B57-462F-9948-49FC13D493CD}"/>
               </a:ext>
             </a:extLst>
           </p:cNvPr>
@@ -7289,10 +7743,10 @@
       </p:sp>
       <p:sp>
         <p:nvSpPr>
-          <p:cNvPr id="13" name="page-number">
-            <a:extLst xmlns:a="http://schemas.openxmlformats.org/drawingml/2006/main">
-              <a:ext uri="{FF2B5EF4-FFF2-40B4-BE49-F238E27FC236}">
-                <a16:creationId xmlns:a16="http://schemas.microsoft.com/office/drawing/2014/main" id="{657897AD-59EF-4E99-B31A-B68490883898}"/>
+          <p:cNvPr id="15" name="page-number">
+            <a:extLst xmlns:a="http://schemas.openxmlformats.org/drawingml/2006/main">
+              <a:ext uri="{FF2B5EF4-FFF2-40B4-BE49-F238E27FC236}">
+                <a16:creationId xmlns:a16="http://schemas.microsoft.com/office/drawing/2014/main" id="{3C0046EF-C273-417B-A111-B3B8882B5492}"/>
               </a:ext>
             </a:extLst>
           </p:cNvPr>
@@ -7345,7 +7799,7 @@
     </p:spTree>
     <p:extLst>
       <p:ext uri="{BB962C8B-B14F-4D97-AF65-F5344CB8AC3E}">
-        <p14:creationId xmlns:p14="http://schemas.microsoft.com/office/powerpoint/2010/main" val="1896166518"/>
+        <p14:creationId xmlns:p14="http://schemas.microsoft.com/office/powerpoint/2010/main" val="1541787959"/>
       </p:ext>
     </p:extLst>
   </p:cSld>
@@ -7381,10 +7835,10 @@
       </p:grpSpPr>
       <p:sp>
         <p:nvSpPr>
-          <p:cNvPr id="10" name="result-label">
-            <a:extLst xmlns:a="http://schemas.openxmlformats.org/drawingml/2006/main">
-              <a:ext uri="{FF2B5EF4-FFF2-40B4-BE49-F238E27FC236}">
-                <a16:creationId xmlns:a16="http://schemas.microsoft.com/office/drawing/2014/main" id="{7DA857BF-4D4B-498E-BC85-472C4CF8D059}"/>
+          <p:cNvPr id="12" name="result-label">
+            <a:extLst xmlns:a="http://schemas.openxmlformats.org/drawingml/2006/main">
+              <a:ext uri="{FF2B5EF4-FFF2-40B4-BE49-F238E27FC236}">
+                <a16:creationId xmlns:a16="http://schemas.microsoft.com/office/drawing/2014/main" id="{68374B96-78FB-49D3-96DC-14DBCB1BD7C0}"/>
               </a:ext>
             </a:extLst>
           </p:cNvPr>
@@ -7435,7 +7889,7 @@
           <p:cNvPr id="2" name="result">
             <a:extLst xmlns:a="http://schemas.openxmlformats.org/drawingml/2006/main">
               <a:ext uri="{FF2B5EF4-FFF2-40B4-BE49-F238E27FC236}">
-                <a16:creationId xmlns:a16="http://schemas.microsoft.com/office/drawing/2014/main" id="{42B4653C-7957-4163-B34A-85F8CB4C960B}"/>
+                <a16:creationId xmlns:a16="http://schemas.microsoft.com/office/drawing/2014/main" id="{51CFA0C6-029E-469B-978A-CC2FF737F42A}"/>
               </a:ext>
             </a:extLst>
           </p:cNvPr>
@@ -7486,7 +7940,7 @@
           <p:cNvPr id="3" name="result-meta">
             <a:extLst xmlns:a="http://schemas.openxmlformats.org/drawingml/2006/main">
               <a:ext uri="{FF2B5EF4-FFF2-40B4-BE49-F238E27FC236}">
-                <a16:creationId xmlns:a16="http://schemas.microsoft.com/office/drawing/2014/main" id="{D463C541-2DE8-48FC-BDF1-AD5E3AA3085F}"/>
+                <a16:creationId xmlns:a16="http://schemas.microsoft.com/office/drawing/2014/main" id="{39614A1C-5DB4-4F1F-913B-87EBC0522A72}"/>
               </a:ext>
             </a:extLst>
           </p:cNvPr>
@@ -7537,7 +7991,7 @@
           <p:cNvPr id="4" name="ambient-glow">
             <a:extLst xmlns:a="http://schemas.openxmlformats.org/drawingml/2006/main">
               <a:ext uri="{FF2B5EF4-FFF2-40B4-BE49-F238E27FC236}">
-                <a16:creationId xmlns:a16="http://schemas.microsoft.com/office/drawing/2014/main" id="{D3F22457-8CC4-4EA6-97FC-2C0464574167}"/>
+                <a16:creationId xmlns:a16="http://schemas.microsoft.com/office/drawing/2014/main" id="{68B8D320-4C12-4B04-BCDC-0117E9FA5CC1}"/>
               </a:ext>
             </a:extLst>
           </p:cNvPr>
@@ -7574,7 +8028,7 @@
           <p:cNvPr id="5" name="ambient-core">
             <a:extLst xmlns:a="http://schemas.openxmlformats.org/drawingml/2006/main">
               <a:ext uri="{FF2B5EF4-FFF2-40B4-BE49-F238E27FC236}">
-                <a16:creationId xmlns:a16="http://schemas.microsoft.com/office/drawing/2014/main" id="{44E53C84-0F2F-4BE0-979A-0C0A1C6BF16D}"/>
+                <a16:creationId xmlns:a16="http://schemas.microsoft.com/office/drawing/2014/main" id="{740AE5F4-544E-4560-A493-3A22FE0481E2}"/>
               </a:ext>
             </a:extLst>
           </p:cNvPr>
@@ -7611,7 +8065,7 @@
           <p:cNvPr id="6" name="eyebrow">
             <a:extLst xmlns:a="http://schemas.openxmlformats.org/drawingml/2006/main">
               <a:ext uri="{FF2B5EF4-FFF2-40B4-BE49-F238E27FC236}">
-                <a16:creationId xmlns:a16="http://schemas.microsoft.com/office/drawing/2014/main" id="{9905B43A-86B6-4640-9BCA-D8DF991B3748}"/>
+                <a16:creationId xmlns:a16="http://schemas.microsoft.com/office/drawing/2014/main" id="{8F3014B2-67BF-4C1E-9C97-CDAB3D63D5D8}"/>
               </a:ext>
             </a:extLst>
           </p:cNvPr>
@@ -7659,10 +8113,69 @@
       </p:sp>
       <p:sp>
         <p:nvSpPr>
-          <p:cNvPr id="7" name="footer-rule">
-            <a:extLst xmlns:a="http://schemas.openxmlformats.org/drawingml/2006/main">
-              <a:ext uri="{FF2B5EF4-FFF2-40B4-BE49-F238E27FC236}">
-                <a16:creationId xmlns:a16="http://schemas.microsoft.com/office/drawing/2014/main" id="{D2CA3173-55AA-4FA9-A155-D04ED3CABB35}"/>
+          <p:cNvPr id="7" name="rescue-point-logo-background">
+            <a:extLst xmlns:a="http://schemas.openxmlformats.org/drawingml/2006/main">
+              <a:ext uri="{FF2B5EF4-FFF2-40B4-BE49-F238E27FC236}">
+                <a16:creationId xmlns:a16="http://schemas.microsoft.com/office/drawing/2014/main" id="{4D77CF2F-91CB-40AE-AED1-327CB86B2CE5}"/>
+              </a:ext>
+            </a:extLst>
+          </p:cNvPr>
+          <p:cNvSpPr>
+            <a:spLocks xmlns:a="http://schemas.openxmlformats.org/drawingml/2006/main" noGrp="1"/>
+          </p:cNvSpPr>
+          <p:nvPr/>
+        </p:nvSpPr>
+        <p:spPr>
+          <a:xfrm xmlns:a="http://schemas.openxmlformats.org/drawingml/2006/main">
+            <a:off x="9772650" y="133350"/>
+            <a:ext cx="1733550" cy="457200"/>
+          </a:xfrm>
+          <a:prstGeom xmlns:a="http://schemas.openxmlformats.org/drawingml/2006/main" prst="roundRect">
+            <a:avLst>
+              <a:gd name="adj" fmla="val 16667"/>
+            </a:avLst>
+          </a:prstGeom>
+          <a:solidFill xmlns:a="http://schemas.openxmlformats.org/drawingml/2006/main">
+            <a:srgbClr val="06142E"/>
+          </a:solidFill>
+          <a:ln xmlns:a="http://schemas.openxmlformats.org/drawingml/2006/main" w="9525">
+            <a:solidFill>
+              <a:srgbClr val="1EC5FF">
+                <a:alpha val="33333"/>
+              </a:srgbClr>
+            </a:solidFill>
+            <a:prstDash val="solid"/>
+          </a:ln>
+        </p:spPr>
+      </p:sp>
+      <p:pic>
+        <p:nvPicPr>
+          <p:cNvPr id="21" name="" descr="Figura oficial da documentação dbt usada para explicar: RESULTADO ESPERADO — Somente o ramo afetado é selecionado."/>
+          <p:cNvPicPr>
+            <a:picLocks xmlns:a="http://schemas.openxmlformats.org/drawingml/2006/main" noChangeAspect="1"/>
+          </p:cNvPicPr>
+          <p:nvPr/>
+        </p:nvPicPr>
+        <p:blipFill>
+          <a:blip xmlns:r="http://schemas.openxmlformats.org/officeDocument/2006/relationships" xmlns:a="http://schemas.openxmlformats.org/drawingml/2006/main" r:embed="R6b64eb47dc9d4080"/>
+          <a:stretch xmlns:a="http://schemas.openxmlformats.org/drawingml/2006/main"/>
+        </p:blipFill>
+        <p:spPr>
+          <a:xfrm xmlns:a="http://schemas.openxmlformats.org/drawingml/2006/main">
+            <a:off x="9893718" y="209550"/>
+            <a:ext cx="1491414" cy="323850"/>
+          </a:xfrm>
+          <a:prstGeom xmlns:a="http://schemas.openxmlformats.org/drawingml/2006/main" prst="rect">
+            <a:avLst/>
+          </a:prstGeom>
+        </p:spPr>
+      </p:pic>
+      <p:sp>
+        <p:nvSpPr>
+          <p:cNvPr id="9" name="footer-rule">
+            <a:extLst xmlns:a="http://schemas.openxmlformats.org/drawingml/2006/main">
+              <a:ext uri="{FF2B5EF4-FFF2-40B4-BE49-F238E27FC236}">
+                <a16:creationId xmlns:a16="http://schemas.microsoft.com/office/drawing/2014/main" id="{D355BA41-8B4A-459A-8939-766E2590BB4C}"/>
               </a:ext>
             </a:extLst>
           </p:cNvPr>
@@ -7692,10 +8205,10 @@
       </p:sp>
       <p:sp>
         <p:nvSpPr>
-          <p:cNvPr id="8" name="footer">
-            <a:extLst xmlns:a="http://schemas.openxmlformats.org/drawingml/2006/main">
-              <a:ext uri="{FF2B5EF4-FFF2-40B4-BE49-F238E27FC236}">
-                <a16:creationId xmlns:a16="http://schemas.microsoft.com/office/drawing/2014/main" id="{D6D29458-FF7C-4712-9630-59ACD1BE3118}"/>
+          <p:cNvPr id="10" name="footer">
+            <a:extLst xmlns:a="http://schemas.openxmlformats.org/drawingml/2006/main">
+              <a:ext uri="{FF2B5EF4-FFF2-40B4-BE49-F238E27FC236}">
+                <a16:creationId xmlns:a16="http://schemas.microsoft.com/office/drawing/2014/main" id="{B50B0031-D839-48BE-B9A3-2E06038105D7}"/>
               </a:ext>
             </a:extLst>
           </p:cNvPr>
@@ -7747,10 +8260,10 @@
       </p:sp>
       <p:sp>
         <p:nvSpPr>
-          <p:cNvPr id="9" name="page-number">
-            <a:extLst xmlns:a="http://schemas.openxmlformats.org/drawingml/2006/main">
-              <a:ext uri="{FF2B5EF4-FFF2-40B4-BE49-F238E27FC236}">
-                <a16:creationId xmlns:a16="http://schemas.microsoft.com/office/drawing/2014/main" id="{962B02AC-ED4B-4FDA-8F17-BD1F0FF2AF4C}"/>
+          <p:cNvPr id="11" name="page-number">
+            <a:extLst xmlns:a="http://schemas.openxmlformats.org/drawingml/2006/main">
+              <a:ext uri="{FF2B5EF4-FFF2-40B4-BE49-F238E27FC236}">
+                <a16:creationId xmlns:a16="http://schemas.microsoft.com/office/drawing/2014/main" id="{FD9C1AE7-6446-48DF-8EFA-439EB593142C}"/>
               </a:ext>
             </a:extLst>
           </p:cNvPr>
@@ -7803,7 +8316,7 @@
     </p:spTree>
     <p:extLst>
       <p:ext uri="{BB962C8B-B14F-4D97-AF65-F5344CB8AC3E}">
-        <p14:creationId xmlns:p14="http://schemas.microsoft.com/office/powerpoint/2010/main" val="917037861"/>
+        <p14:creationId xmlns:p14="http://schemas.microsoft.com/office/powerpoint/2010/main" val="641274446"/>
       </p:ext>
     </p:extLst>
   </p:cSld>
@@ -7831,10 +8344,10 @@
       </p:grpSpPr>
       <p:sp>
         <p:nvSpPr>
-          <p:cNvPr id="14" name="slide-title">
-            <a:extLst xmlns:a="http://schemas.openxmlformats.org/drawingml/2006/main">
-              <a:ext uri="{FF2B5EF4-FFF2-40B4-BE49-F238E27FC236}">
-                <a16:creationId xmlns:a16="http://schemas.microsoft.com/office/drawing/2014/main" id="{D43D7A4A-F510-46FD-9C5E-264365D74836}"/>
+          <p:cNvPr id="16" name="slide-title">
+            <a:extLst xmlns:a="http://schemas.openxmlformats.org/drawingml/2006/main">
+              <a:ext uri="{FF2B5EF4-FFF2-40B4-BE49-F238E27FC236}">
+                <a16:creationId xmlns:a16="http://schemas.microsoft.com/office/drawing/2014/main" id="{BED1ADAD-03F1-4885-A07D-6B30CEC310DF}"/>
               </a:ext>
             </a:extLst>
           </p:cNvPr>
@@ -7885,7 +8398,7 @@
           <p:cNvPr id="2" name="step-num-1">
             <a:extLst xmlns:a="http://schemas.openxmlformats.org/drawingml/2006/main">
               <a:ext uri="{FF2B5EF4-FFF2-40B4-BE49-F238E27FC236}">
-                <a16:creationId xmlns:a16="http://schemas.microsoft.com/office/drawing/2014/main" id="{6F9B29FD-D130-43F2-8382-8EDD209B4C06}"/>
+                <a16:creationId xmlns:a16="http://schemas.microsoft.com/office/drawing/2014/main" id="{A4E79699-FCC1-41E2-B715-75C74396824F}"/>
               </a:ext>
             </a:extLst>
           </p:cNvPr>
@@ -7936,7 +8449,7 @@
           <p:cNvPr id="3" name="step-label-1">
             <a:extLst xmlns:a="http://schemas.openxmlformats.org/drawingml/2006/main">
               <a:ext uri="{FF2B5EF4-FFF2-40B4-BE49-F238E27FC236}">
-                <a16:creationId xmlns:a16="http://schemas.microsoft.com/office/drawing/2014/main" id="{FA49A547-3EF8-4FA8-8975-7656C8B5C368}"/>
+                <a16:creationId xmlns:a16="http://schemas.microsoft.com/office/drawing/2014/main" id="{92B8BA91-7C1A-4F73-993B-E53451DACDF7}"/>
               </a:ext>
             </a:extLst>
           </p:cNvPr>
@@ -7987,7 +8500,7 @@
           <p:cNvPr id="4" name="step-line-1">
             <a:extLst xmlns:a="http://schemas.openxmlformats.org/drawingml/2006/main">
               <a:ext uri="{FF2B5EF4-FFF2-40B4-BE49-F238E27FC236}">
-                <a16:creationId xmlns:a16="http://schemas.microsoft.com/office/drawing/2014/main" id="{509B6122-7FEE-46CA-B262-B2B5ABB12906}"/>
+                <a16:creationId xmlns:a16="http://schemas.microsoft.com/office/drawing/2014/main" id="{5B69E9AC-695E-4C9D-944D-4E6C0A2AF573}"/>
               </a:ext>
             </a:extLst>
           </p:cNvPr>
@@ -8018,7 +8531,7 @@
           <p:cNvPr id="5" name="step-num-2">
             <a:extLst xmlns:a="http://schemas.openxmlformats.org/drawingml/2006/main">
               <a:ext uri="{FF2B5EF4-FFF2-40B4-BE49-F238E27FC236}">
-                <a16:creationId xmlns:a16="http://schemas.microsoft.com/office/drawing/2014/main" id="{1F7BD6DC-C67A-4D1F-BBEE-7583938C4AF8}"/>
+                <a16:creationId xmlns:a16="http://schemas.microsoft.com/office/drawing/2014/main" id="{2986BB7D-68D9-4095-B014-177467EC44AC}"/>
               </a:ext>
             </a:extLst>
           </p:cNvPr>
@@ -8069,7 +8582,7 @@
           <p:cNvPr id="6" name="step-label-2">
             <a:extLst xmlns:a="http://schemas.openxmlformats.org/drawingml/2006/main">
               <a:ext uri="{FF2B5EF4-FFF2-40B4-BE49-F238E27FC236}">
-                <a16:creationId xmlns:a16="http://schemas.microsoft.com/office/drawing/2014/main" id="{D77C34D3-66C6-4B0C-B3F7-3ED1B81E1AB9}"/>
+                <a16:creationId xmlns:a16="http://schemas.microsoft.com/office/drawing/2014/main" id="{D3E53D0A-948B-4194-8FFA-CD3014F788BE}"/>
               </a:ext>
             </a:extLst>
           </p:cNvPr>
@@ -8120,7 +8633,7 @@
           <p:cNvPr id="7" name="step-line-2">
             <a:extLst xmlns:a="http://schemas.openxmlformats.org/drawingml/2006/main">
               <a:ext uri="{FF2B5EF4-FFF2-40B4-BE49-F238E27FC236}">
-                <a16:creationId xmlns:a16="http://schemas.microsoft.com/office/drawing/2014/main" id="{B4269EA7-8FC2-4DAD-BF77-FB721B49DDDB}"/>
+                <a16:creationId xmlns:a16="http://schemas.microsoft.com/office/drawing/2014/main" id="{BE00D814-0D6E-4142-ACB5-AEF9E89B01A1}"/>
               </a:ext>
             </a:extLst>
           </p:cNvPr>
@@ -8151,7 +8664,7 @@
           <p:cNvPr id="8" name="step-num-3">
             <a:extLst xmlns:a="http://schemas.openxmlformats.org/drawingml/2006/main">
               <a:ext uri="{FF2B5EF4-FFF2-40B4-BE49-F238E27FC236}">
-                <a16:creationId xmlns:a16="http://schemas.microsoft.com/office/drawing/2014/main" id="{FE548400-8D4F-482F-A285-22FDDA494375}"/>
+                <a16:creationId xmlns:a16="http://schemas.microsoft.com/office/drawing/2014/main" id="{8C8D5131-36DA-4574-B374-C4F174E8CAB8}"/>
               </a:ext>
             </a:extLst>
           </p:cNvPr>
@@ -8202,7 +8715,7 @@
           <p:cNvPr id="9" name="step-label-3">
             <a:extLst xmlns:a="http://schemas.openxmlformats.org/drawingml/2006/main">
               <a:ext uri="{FF2B5EF4-FFF2-40B4-BE49-F238E27FC236}">
-                <a16:creationId xmlns:a16="http://schemas.microsoft.com/office/drawing/2014/main" id="{5D6C3641-0988-4009-8238-4694D155E851}"/>
+                <a16:creationId xmlns:a16="http://schemas.microsoft.com/office/drawing/2014/main" id="{C4016227-AEA7-46CA-B81A-E4BD2CA2B2D4}"/>
               </a:ext>
             </a:extLst>
           </p:cNvPr>
@@ -8253,7 +8766,7 @@
           <p:cNvPr id="10" name="eyebrow">
             <a:extLst xmlns:a="http://schemas.openxmlformats.org/drawingml/2006/main">
               <a:ext uri="{FF2B5EF4-FFF2-40B4-BE49-F238E27FC236}">
-                <a16:creationId xmlns:a16="http://schemas.microsoft.com/office/drawing/2014/main" id="{7661FEFA-CC17-479E-BF56-23B80202E4C0}"/>
+                <a16:creationId xmlns:a16="http://schemas.microsoft.com/office/drawing/2014/main" id="{180323E6-94BA-4F25-9516-9A78F02E4CB7}"/>
               </a:ext>
             </a:extLst>
           </p:cNvPr>
@@ -8301,10 +8814,69 @@
       </p:sp>
       <p:sp>
         <p:nvSpPr>
-          <p:cNvPr id="11" name="footer-rule">
-            <a:extLst xmlns:a="http://schemas.openxmlformats.org/drawingml/2006/main">
-              <a:ext uri="{FF2B5EF4-FFF2-40B4-BE49-F238E27FC236}">
-                <a16:creationId xmlns:a16="http://schemas.microsoft.com/office/drawing/2014/main" id="{31B9ACC8-AAA2-4641-A81C-AE2F04BC344B}"/>
+          <p:cNvPr id="11" name="rescue-point-logo-background">
+            <a:extLst xmlns:a="http://schemas.openxmlformats.org/drawingml/2006/main">
+              <a:ext uri="{FF2B5EF4-FFF2-40B4-BE49-F238E27FC236}">
+                <a16:creationId xmlns:a16="http://schemas.microsoft.com/office/drawing/2014/main" id="{23EDF99B-16E1-4EB3-934E-3059DF3E51AD}"/>
+              </a:ext>
+            </a:extLst>
+          </p:cNvPr>
+          <p:cNvSpPr>
+            <a:spLocks xmlns:a="http://schemas.openxmlformats.org/drawingml/2006/main" noGrp="1"/>
+          </p:cNvSpPr>
+          <p:nvPr/>
+        </p:nvSpPr>
+        <p:spPr>
+          <a:xfrm xmlns:a="http://schemas.openxmlformats.org/drawingml/2006/main">
+            <a:off x="9772650" y="133350"/>
+            <a:ext cx="1733550" cy="457200"/>
+          </a:xfrm>
+          <a:prstGeom xmlns:a="http://schemas.openxmlformats.org/drawingml/2006/main" prst="roundRect">
+            <a:avLst>
+              <a:gd name="adj" fmla="val 16667"/>
+            </a:avLst>
+          </a:prstGeom>
+          <a:solidFill xmlns:a="http://schemas.openxmlformats.org/drawingml/2006/main">
+            <a:srgbClr val="06142E"/>
+          </a:solidFill>
+          <a:ln xmlns:a="http://schemas.openxmlformats.org/drawingml/2006/main" w="9525">
+            <a:solidFill>
+              <a:srgbClr val="1EC5FF">
+                <a:alpha val="33333"/>
+              </a:srgbClr>
+            </a:solidFill>
+            <a:prstDash val="solid"/>
+          </a:ln>
+        </p:spPr>
+      </p:sp>
+      <p:pic>
+        <p:nvPicPr>
+          <p:cNvPr id="29" name="" descr="Figura oficial da documentação dbt usada para explicar: O mesmo recurso afeta três decisões — 01."/>
+          <p:cNvPicPr>
+            <a:picLocks xmlns:a="http://schemas.openxmlformats.org/drawingml/2006/main" noChangeAspect="1"/>
+          </p:cNvPicPr>
+          <p:nvPr/>
+        </p:nvPicPr>
+        <p:blipFill>
+          <a:blip xmlns:r="http://schemas.openxmlformats.org/officeDocument/2006/relationships" xmlns:a="http://schemas.openxmlformats.org/drawingml/2006/main" r:embed="R54c0d149ea7a491d"/>
+          <a:stretch xmlns:a="http://schemas.openxmlformats.org/drawingml/2006/main"/>
+        </p:blipFill>
+        <p:spPr>
+          <a:xfrm xmlns:a="http://schemas.openxmlformats.org/drawingml/2006/main">
+            <a:off x="9893718" y="209550"/>
+            <a:ext cx="1491414" cy="323850"/>
+          </a:xfrm>
+          <a:prstGeom xmlns:a="http://schemas.openxmlformats.org/drawingml/2006/main" prst="rect">
+            <a:avLst/>
+          </a:prstGeom>
+        </p:spPr>
+      </p:pic>
+      <p:sp>
+        <p:nvSpPr>
+          <p:cNvPr id="13" name="footer-rule">
+            <a:extLst xmlns:a="http://schemas.openxmlformats.org/drawingml/2006/main">
+              <a:ext uri="{FF2B5EF4-FFF2-40B4-BE49-F238E27FC236}">
+                <a16:creationId xmlns:a16="http://schemas.microsoft.com/office/drawing/2014/main" id="{CBDBA3B3-7B8E-4C98-98D1-DBCD16F22F17}"/>
               </a:ext>
             </a:extLst>
           </p:cNvPr>
@@ -8334,10 +8906,10 @@
       </p:sp>
       <p:sp>
         <p:nvSpPr>
-          <p:cNvPr id="12" name="footer">
-            <a:extLst xmlns:a="http://schemas.openxmlformats.org/drawingml/2006/main">
-              <a:ext uri="{FF2B5EF4-FFF2-40B4-BE49-F238E27FC236}">
-                <a16:creationId xmlns:a16="http://schemas.microsoft.com/office/drawing/2014/main" id="{CE751184-FA24-4EC4-9661-BB8C49C01EC0}"/>
+          <p:cNvPr id="14" name="footer">
+            <a:extLst xmlns:a="http://schemas.openxmlformats.org/drawingml/2006/main">
+              <a:ext uri="{FF2B5EF4-FFF2-40B4-BE49-F238E27FC236}">
+                <a16:creationId xmlns:a16="http://schemas.microsoft.com/office/drawing/2014/main" id="{D2D50015-4EE5-413B-B714-7A3936BCA40C}"/>
               </a:ext>
             </a:extLst>
           </p:cNvPr>
@@ -8389,10 +8961,10 @@
       </p:sp>
       <p:sp>
         <p:nvSpPr>
-          <p:cNvPr id="13" name="page-number">
-            <a:extLst xmlns:a="http://schemas.openxmlformats.org/drawingml/2006/main">
-              <a:ext uri="{FF2B5EF4-FFF2-40B4-BE49-F238E27FC236}">
-                <a16:creationId xmlns:a16="http://schemas.microsoft.com/office/drawing/2014/main" id="{75E153E3-4950-4577-9B1B-BFEDA8B5A636}"/>
+          <p:cNvPr id="15" name="page-number">
+            <a:extLst xmlns:a="http://schemas.openxmlformats.org/drawingml/2006/main">
+              <a:ext uri="{FF2B5EF4-FFF2-40B4-BE49-F238E27FC236}">
+                <a16:creationId xmlns:a16="http://schemas.microsoft.com/office/drawing/2014/main" id="{2B3B2385-8A59-4D27-8F98-0CA835A8EED5}"/>
               </a:ext>
             </a:extLst>
           </p:cNvPr>
@@ -8445,7 +9017,7 @@
     </p:spTree>
     <p:extLst>
       <p:ext uri="{BB962C8B-B14F-4D97-AF65-F5344CB8AC3E}">
-        <p14:creationId xmlns:p14="http://schemas.microsoft.com/office/powerpoint/2010/main" val="1513038394"/>
+        <p14:creationId xmlns:p14="http://schemas.microsoft.com/office/powerpoint/2010/main" val="2079436555"/>
       </p:ext>
     </p:extLst>
   </p:cSld>
@@ -8481,10 +9053,10 @@
       </p:grpSpPr>
       <p:sp>
         <p:nvSpPr>
-          <p:cNvPr id="9" name="case-number">
-            <a:extLst xmlns:a="http://schemas.openxmlformats.org/drawingml/2006/main">
-              <a:ext uri="{FF2B5EF4-FFF2-40B4-BE49-F238E27FC236}">
-                <a16:creationId xmlns:a16="http://schemas.microsoft.com/office/drawing/2014/main" id="{23EF13B4-07D5-4444-838C-A5E7AAAF0330}"/>
+          <p:cNvPr id="11" name="case-number">
+            <a:extLst xmlns:a="http://schemas.openxmlformats.org/drawingml/2006/main">
+              <a:ext uri="{FF2B5EF4-FFF2-40B4-BE49-F238E27FC236}">
+                <a16:creationId xmlns:a16="http://schemas.microsoft.com/office/drawing/2014/main" id="{88B9DA49-8ABA-4BA0-98E2-4703C64C147C}"/>
               </a:ext>
             </a:extLst>
           </p:cNvPr>
@@ -8535,7 +9107,7 @@
           <p:cNvPr id="2" name="case-label">
             <a:extLst xmlns:a="http://schemas.openxmlformats.org/drawingml/2006/main">
               <a:ext uri="{FF2B5EF4-FFF2-40B4-BE49-F238E27FC236}">
-                <a16:creationId xmlns:a16="http://schemas.microsoft.com/office/drawing/2014/main" id="{8A717108-164C-43F9-A9FF-613483A32CBD}"/>
+                <a16:creationId xmlns:a16="http://schemas.microsoft.com/office/drawing/2014/main" id="{7A05AE69-5381-484A-87F9-3C17C0E47CE3}"/>
               </a:ext>
             </a:extLst>
           </p:cNvPr>
@@ -8586,7 +9158,7 @@
           <p:cNvPr id="3" name="case-divider">
             <a:extLst xmlns:a="http://schemas.openxmlformats.org/drawingml/2006/main">
               <a:ext uri="{FF2B5EF4-FFF2-40B4-BE49-F238E27FC236}">
-                <a16:creationId xmlns:a16="http://schemas.microsoft.com/office/drawing/2014/main" id="{1F223353-0A84-4039-A3D5-4823B1A6D42F}"/>
+                <a16:creationId xmlns:a16="http://schemas.microsoft.com/office/drawing/2014/main" id="{97EAA9EC-5F3B-46BD-A472-A2812FF96EF5}"/>
               </a:ext>
             </a:extLst>
           </p:cNvPr>
@@ -8619,7 +9191,7 @@
           <p:cNvPr id="4" name="case-caveat">
             <a:extLst xmlns:a="http://schemas.openxmlformats.org/drawingml/2006/main">
               <a:ext uri="{FF2B5EF4-FFF2-40B4-BE49-F238E27FC236}">
-                <a16:creationId xmlns:a16="http://schemas.microsoft.com/office/drawing/2014/main" id="{98E0BF30-2727-4167-8896-0AC3A2336C30}"/>
+                <a16:creationId xmlns:a16="http://schemas.microsoft.com/office/drawing/2014/main" id="{CC6B4690-AA83-403C-B22B-54D1489F1B6A}"/>
               </a:ext>
             </a:extLst>
           </p:cNvPr>
@@ -8670,7 +9242,7 @@
           <p:cNvPr id="5" name="eyebrow">
             <a:extLst xmlns:a="http://schemas.openxmlformats.org/drawingml/2006/main">
               <a:ext uri="{FF2B5EF4-FFF2-40B4-BE49-F238E27FC236}">
-                <a16:creationId xmlns:a16="http://schemas.microsoft.com/office/drawing/2014/main" id="{A1503E1D-BFE6-4F39-9974-2447B447710E}"/>
+                <a16:creationId xmlns:a16="http://schemas.microsoft.com/office/drawing/2014/main" id="{334D1C7F-A19F-4CBA-A00C-7F7AAAA3E92A}"/>
               </a:ext>
             </a:extLst>
           </p:cNvPr>
@@ -8718,10 +9290,69 @@
       </p:sp>
       <p:sp>
         <p:nvSpPr>
-          <p:cNvPr id="6" name="footer-rule">
-            <a:extLst xmlns:a="http://schemas.openxmlformats.org/drawingml/2006/main">
-              <a:ext uri="{FF2B5EF4-FFF2-40B4-BE49-F238E27FC236}">
-                <a16:creationId xmlns:a16="http://schemas.microsoft.com/office/drawing/2014/main" id="{0E257305-2E3F-4CAE-AE71-990ACDC9C970}"/>
+          <p:cNvPr id="6" name="rescue-point-logo-background">
+            <a:extLst xmlns:a="http://schemas.openxmlformats.org/drawingml/2006/main">
+              <a:ext uri="{FF2B5EF4-FFF2-40B4-BE49-F238E27FC236}">
+                <a16:creationId xmlns:a16="http://schemas.microsoft.com/office/drawing/2014/main" id="{A995E94B-9BD6-41DB-B3FC-2E3538798B48}"/>
+              </a:ext>
+            </a:extLst>
+          </p:cNvPr>
+          <p:cNvSpPr>
+            <a:spLocks xmlns:a="http://schemas.openxmlformats.org/drawingml/2006/main" noGrp="1"/>
+          </p:cNvSpPr>
+          <p:nvPr/>
+        </p:nvSpPr>
+        <p:spPr>
+          <a:xfrm xmlns:a="http://schemas.openxmlformats.org/drawingml/2006/main">
+            <a:off x="9772650" y="133350"/>
+            <a:ext cx="1733550" cy="457200"/>
+          </a:xfrm>
+          <a:prstGeom xmlns:a="http://schemas.openxmlformats.org/drawingml/2006/main" prst="roundRect">
+            <a:avLst>
+              <a:gd name="adj" fmla="val 16667"/>
+            </a:avLst>
+          </a:prstGeom>
+          <a:solidFill xmlns:a="http://schemas.openxmlformats.org/drawingml/2006/main">
+            <a:srgbClr val="06142E"/>
+          </a:solidFill>
+          <a:ln xmlns:a="http://schemas.openxmlformats.org/drawingml/2006/main" w="9525">
+            <a:solidFill>
+              <a:srgbClr val="1EC5FF">
+                <a:alpha val="33333"/>
+              </a:srgbClr>
+            </a:solidFill>
+            <a:prstDash val="solid"/>
+          </a:ln>
+        </p:spPr>
+      </p:sp>
+      <p:pic>
+        <p:nvPicPr>
+          <p:cNvPr id="19" name="" descr="Figura oficial da documentação dbt usada para explicar: modified+ — mudança e descendentes."/>
+          <p:cNvPicPr>
+            <a:picLocks xmlns:a="http://schemas.openxmlformats.org/drawingml/2006/main" noChangeAspect="1"/>
+          </p:cNvPicPr>
+          <p:nvPr/>
+        </p:nvPicPr>
+        <p:blipFill>
+          <a:blip xmlns:r="http://schemas.openxmlformats.org/officeDocument/2006/relationships" xmlns:a="http://schemas.openxmlformats.org/drawingml/2006/main" r:embed="R045bcf5ef9914510"/>
+          <a:stretch xmlns:a="http://schemas.openxmlformats.org/drawingml/2006/main"/>
+        </p:blipFill>
+        <p:spPr>
+          <a:xfrm xmlns:a="http://schemas.openxmlformats.org/drawingml/2006/main">
+            <a:off x="9893718" y="209550"/>
+            <a:ext cx="1491414" cy="323850"/>
+          </a:xfrm>
+          <a:prstGeom xmlns:a="http://schemas.openxmlformats.org/drawingml/2006/main" prst="rect">
+            <a:avLst/>
+          </a:prstGeom>
+        </p:spPr>
+      </p:pic>
+      <p:sp>
+        <p:nvSpPr>
+          <p:cNvPr id="8" name="footer-rule">
+            <a:extLst xmlns:a="http://schemas.openxmlformats.org/drawingml/2006/main">
+              <a:ext uri="{FF2B5EF4-FFF2-40B4-BE49-F238E27FC236}">
+                <a16:creationId xmlns:a16="http://schemas.microsoft.com/office/drawing/2014/main" id="{74C214FA-358A-4A02-81C1-75681CF1AD59}"/>
               </a:ext>
             </a:extLst>
           </p:cNvPr>
@@ -8751,10 +9382,10 @@
       </p:sp>
       <p:sp>
         <p:nvSpPr>
-          <p:cNvPr id="7" name="footer">
-            <a:extLst xmlns:a="http://schemas.openxmlformats.org/drawingml/2006/main">
-              <a:ext uri="{FF2B5EF4-FFF2-40B4-BE49-F238E27FC236}">
-                <a16:creationId xmlns:a16="http://schemas.microsoft.com/office/drawing/2014/main" id="{8570716C-91DD-4E32-BC26-A55DC1BCAE74}"/>
+          <p:cNvPr id="9" name="footer">
+            <a:extLst xmlns:a="http://schemas.openxmlformats.org/drawingml/2006/main">
+              <a:ext uri="{FF2B5EF4-FFF2-40B4-BE49-F238E27FC236}">
+                <a16:creationId xmlns:a16="http://schemas.microsoft.com/office/drawing/2014/main" id="{4B0B5FA4-A2D0-4037-BB71-21A1CB0DFB6B}"/>
               </a:ext>
             </a:extLst>
           </p:cNvPr>
@@ -8806,10 +9437,10 @@
       </p:sp>
       <p:sp>
         <p:nvSpPr>
-          <p:cNvPr id="8" name="page-number">
-            <a:extLst xmlns:a="http://schemas.openxmlformats.org/drawingml/2006/main">
-              <a:ext uri="{FF2B5EF4-FFF2-40B4-BE49-F238E27FC236}">
-                <a16:creationId xmlns:a16="http://schemas.microsoft.com/office/drawing/2014/main" id="{7B797EFF-1664-490F-A353-9B02DA6B7884}"/>
+          <p:cNvPr id="10" name="page-number">
+            <a:extLst xmlns:a="http://schemas.openxmlformats.org/drawingml/2006/main">
+              <a:ext uri="{FF2B5EF4-FFF2-40B4-BE49-F238E27FC236}">
+                <a16:creationId xmlns:a16="http://schemas.microsoft.com/office/drawing/2014/main" id="{DC9482BB-5B87-4FDC-845D-BE7009B8BA1A}"/>
               </a:ext>
             </a:extLst>
           </p:cNvPr>
@@ -8862,7 +9493,7 @@
     </p:spTree>
     <p:extLst>
       <p:ext uri="{BB962C8B-B14F-4D97-AF65-F5344CB8AC3E}">
-        <p14:creationId xmlns:p14="http://schemas.microsoft.com/office/powerpoint/2010/main" val="1716912660"/>
+        <p14:creationId xmlns:p14="http://schemas.microsoft.com/office/powerpoint/2010/main" val="2040366151"/>
       </p:ext>
     </p:extLst>
   </p:cSld>
@@ -8890,10 +9521,10 @@
       </p:grpSpPr>
       <p:sp>
         <p:nvSpPr>
-          <p:cNvPr id="7" name="slide-title">
-            <a:extLst xmlns:a="http://schemas.openxmlformats.org/drawingml/2006/main">
-              <a:ext uri="{FF2B5EF4-FFF2-40B4-BE49-F238E27FC236}">
-                <a16:creationId xmlns:a16="http://schemas.microsoft.com/office/drawing/2014/main" id="{E52D5167-1DC7-4AB7-B9CF-EBAC96FBDD80}"/>
+          <p:cNvPr id="9" name="slide-title">
+            <a:extLst xmlns:a="http://schemas.openxmlformats.org/drawingml/2006/main">
+              <a:ext uri="{FF2B5EF4-FFF2-40B4-BE49-F238E27FC236}">
+                <a16:creationId xmlns:a16="http://schemas.microsoft.com/office/drawing/2014/main" id="{6907BA48-67E4-4AC5-AE80-9F7871B36A19}"/>
               </a:ext>
             </a:extLst>
           </p:cNvPr>
@@ -8944,7 +9575,7 @@
           <p:cNvPr id="2" name="bullets">
             <a:extLst xmlns:a="http://schemas.openxmlformats.org/drawingml/2006/main">
               <a:ext uri="{FF2B5EF4-FFF2-40B4-BE49-F238E27FC236}">
-                <a16:creationId xmlns:a16="http://schemas.microsoft.com/office/drawing/2014/main" id="{D337EB5B-4C41-447F-85BE-E6F4327E7AB2}"/>
+                <a16:creationId xmlns:a16="http://schemas.microsoft.com/office/drawing/2014/main" id="{26ED5D94-5AD3-4546-85BF-3807E42A0775}"/>
               </a:ext>
             </a:extLst>
           </p:cNvPr>
@@ -9031,7 +9662,7 @@
           <p:cNvPr id="3" name="eyebrow">
             <a:extLst xmlns:a="http://schemas.openxmlformats.org/drawingml/2006/main">
               <a:ext uri="{FF2B5EF4-FFF2-40B4-BE49-F238E27FC236}">
-                <a16:creationId xmlns:a16="http://schemas.microsoft.com/office/drawing/2014/main" id="{BC6F4E87-E163-4FFB-8D24-C1E7B17E07BC}"/>
+                <a16:creationId xmlns:a16="http://schemas.microsoft.com/office/drawing/2014/main" id="{E1EDF515-7EBC-4862-921F-925002F35EDA}"/>
               </a:ext>
             </a:extLst>
           </p:cNvPr>
@@ -9079,10 +9710,69 @@
       </p:sp>
       <p:sp>
         <p:nvSpPr>
-          <p:cNvPr id="4" name="footer-rule">
-            <a:extLst xmlns:a="http://schemas.openxmlformats.org/drawingml/2006/main">
-              <a:ext uri="{FF2B5EF4-FFF2-40B4-BE49-F238E27FC236}">
-                <a16:creationId xmlns:a16="http://schemas.microsoft.com/office/drawing/2014/main" id="{D935F522-3A0E-4C67-B091-8559C78AF942}"/>
+          <p:cNvPr id="4" name="rescue-point-logo-background">
+            <a:extLst xmlns:a="http://schemas.openxmlformats.org/drawingml/2006/main">
+              <a:ext uri="{FF2B5EF4-FFF2-40B4-BE49-F238E27FC236}">
+                <a16:creationId xmlns:a16="http://schemas.microsoft.com/office/drawing/2014/main" id="{915B704B-58E5-4262-90E2-6764BA5215E5}"/>
+              </a:ext>
+            </a:extLst>
+          </p:cNvPr>
+          <p:cNvSpPr>
+            <a:spLocks xmlns:a="http://schemas.openxmlformats.org/drawingml/2006/main" noGrp="1"/>
+          </p:cNvSpPr>
+          <p:nvPr/>
+        </p:nvSpPr>
+        <p:spPr>
+          <a:xfrm xmlns:a="http://schemas.openxmlformats.org/drawingml/2006/main">
+            <a:off x="9772650" y="133350"/>
+            <a:ext cx="1733550" cy="457200"/>
+          </a:xfrm>
+          <a:prstGeom xmlns:a="http://schemas.openxmlformats.org/drawingml/2006/main" prst="roundRect">
+            <a:avLst>
+              <a:gd name="adj" fmla="val 16667"/>
+            </a:avLst>
+          </a:prstGeom>
+          <a:solidFill xmlns:a="http://schemas.openxmlformats.org/drawingml/2006/main">
+            <a:srgbClr val="06142E"/>
+          </a:solidFill>
+          <a:ln xmlns:a="http://schemas.openxmlformats.org/drawingml/2006/main" w="9525">
+            <a:solidFill>
+              <a:srgbClr val="1EC5FF">
+                <a:alpha val="33333"/>
+              </a:srgbClr>
+            </a:solidFill>
+            <a:prstDash val="solid"/>
+          </a:ln>
+        </p:spPr>
+      </p:sp>
+      <p:pic>
+        <p:nvPicPr>
+          <p:cNvPr id="15" name="" descr="Figura oficial da documentação dbt usada para explicar: Limitações que precisam permanecer visíveis — • Estado velho seleciona errado."/>
+          <p:cNvPicPr>
+            <a:picLocks xmlns:a="http://schemas.openxmlformats.org/drawingml/2006/main" noChangeAspect="1"/>
+          </p:cNvPicPr>
+          <p:nvPr/>
+        </p:nvPicPr>
+        <p:blipFill>
+          <a:blip xmlns:r="http://schemas.openxmlformats.org/officeDocument/2006/relationships" xmlns:a="http://schemas.openxmlformats.org/drawingml/2006/main" r:embed="R96f5608e804c49fb"/>
+          <a:stretch xmlns:a="http://schemas.openxmlformats.org/drawingml/2006/main"/>
+        </p:blipFill>
+        <p:spPr>
+          <a:xfrm xmlns:a="http://schemas.openxmlformats.org/drawingml/2006/main">
+            <a:off x="9893718" y="209550"/>
+            <a:ext cx="1491414" cy="323850"/>
+          </a:xfrm>
+          <a:prstGeom xmlns:a="http://schemas.openxmlformats.org/drawingml/2006/main" prst="rect">
+            <a:avLst/>
+          </a:prstGeom>
+        </p:spPr>
+      </p:pic>
+      <p:sp>
+        <p:nvSpPr>
+          <p:cNvPr id="6" name="footer-rule">
+            <a:extLst xmlns:a="http://schemas.openxmlformats.org/drawingml/2006/main">
+              <a:ext uri="{FF2B5EF4-FFF2-40B4-BE49-F238E27FC236}">
+                <a16:creationId xmlns:a16="http://schemas.microsoft.com/office/drawing/2014/main" id="{6DF2C44D-553E-4369-B507-27E8393E7A57}"/>
               </a:ext>
             </a:extLst>
           </p:cNvPr>
@@ -9112,10 +9802,10 @@
       </p:sp>
       <p:sp>
         <p:nvSpPr>
-          <p:cNvPr id="5" name="footer">
-            <a:extLst xmlns:a="http://schemas.openxmlformats.org/drawingml/2006/main">
-              <a:ext uri="{FF2B5EF4-FFF2-40B4-BE49-F238E27FC236}">
-                <a16:creationId xmlns:a16="http://schemas.microsoft.com/office/drawing/2014/main" id="{EDE43BB7-E8CA-4D5E-8306-6B47944FE578}"/>
+          <p:cNvPr id="7" name="footer">
+            <a:extLst xmlns:a="http://schemas.openxmlformats.org/drawingml/2006/main">
+              <a:ext uri="{FF2B5EF4-FFF2-40B4-BE49-F238E27FC236}">
+                <a16:creationId xmlns:a16="http://schemas.microsoft.com/office/drawing/2014/main" id="{E7AA1AE6-D763-4563-A8F8-4297DB6381E1}"/>
               </a:ext>
             </a:extLst>
           </p:cNvPr>
@@ -9167,10 +9857,10 @@
       </p:sp>
       <p:sp>
         <p:nvSpPr>
-          <p:cNvPr id="6" name="page-number">
-            <a:extLst xmlns:a="http://schemas.openxmlformats.org/drawingml/2006/main">
-              <a:ext uri="{FF2B5EF4-FFF2-40B4-BE49-F238E27FC236}">
-                <a16:creationId xmlns:a16="http://schemas.microsoft.com/office/drawing/2014/main" id="{1B289896-35F9-4C3D-B1BF-2AA7806B5043}"/>
+          <p:cNvPr id="8" name="page-number">
+            <a:extLst xmlns:a="http://schemas.openxmlformats.org/drawingml/2006/main">
+              <a:ext uri="{FF2B5EF4-FFF2-40B4-BE49-F238E27FC236}">
+                <a16:creationId xmlns:a16="http://schemas.microsoft.com/office/drawing/2014/main" id="{45CA8004-5ADA-4B92-9EB0-0E87D87499D0}"/>
               </a:ext>
             </a:extLst>
           </p:cNvPr>
@@ -9223,7 +9913,7 @@
     </p:spTree>
     <p:extLst>
       <p:ext uri="{BB962C8B-B14F-4D97-AF65-F5344CB8AC3E}">
-        <p14:creationId xmlns:p14="http://schemas.microsoft.com/office/powerpoint/2010/main" val="454827854"/>
+        <p14:creationId xmlns:p14="http://schemas.microsoft.com/office/powerpoint/2010/main" val="1444193448"/>
       </p:ext>
     </p:extLst>
   </p:cSld>
@@ -9259,10 +9949,10 @@
       </p:grpSpPr>
       <p:sp>
         <p:nvSpPr>
-          <p:cNvPr id="10" name="radar-label">
-            <a:extLst xmlns:a="http://schemas.openxmlformats.org/drawingml/2006/main">
-              <a:ext uri="{FF2B5EF4-FFF2-40B4-BE49-F238E27FC236}">
-                <a16:creationId xmlns:a16="http://schemas.microsoft.com/office/drawing/2014/main" id="{88368737-5885-4EB3-AFD7-BB56AE512A55}"/>
+          <p:cNvPr id="12" name="radar-label">
+            <a:extLst xmlns:a="http://schemas.openxmlformats.org/drawingml/2006/main">
+              <a:ext uri="{FF2B5EF4-FFF2-40B4-BE49-F238E27FC236}">
+                <a16:creationId xmlns:a16="http://schemas.microsoft.com/office/drawing/2014/main" id="{5EBAE61F-1E5E-4052-AAF2-C7AD737E61CF}"/>
               </a:ext>
             </a:extLst>
           </p:cNvPr>
@@ -9313,7 +10003,7 @@
           <p:cNvPr id="2" name="radar-text">
             <a:extLst xmlns:a="http://schemas.openxmlformats.org/drawingml/2006/main">
               <a:ext uri="{FF2B5EF4-FFF2-40B4-BE49-F238E27FC236}">
-                <a16:creationId xmlns:a16="http://schemas.microsoft.com/office/drawing/2014/main" id="{C26EAA5F-53E6-49E2-A290-A5BAFDAB9062}"/>
+                <a16:creationId xmlns:a16="http://schemas.microsoft.com/office/drawing/2014/main" id="{0FDB03BC-C9BC-4EB8-BC88-18BDC7FCFF00}"/>
               </a:ext>
             </a:extLst>
           </p:cNvPr>
@@ -9364,7 +10054,7 @@
           <p:cNvPr id="3" name="radar-rule">
             <a:extLst xmlns:a="http://schemas.openxmlformats.org/drawingml/2006/main">
               <a:ext uri="{FF2B5EF4-FFF2-40B4-BE49-F238E27FC236}">
-                <a16:creationId xmlns:a16="http://schemas.microsoft.com/office/drawing/2014/main" id="{EF81B098-8A15-4AAC-BCC0-E46C0BE40AE8}"/>
+                <a16:creationId xmlns:a16="http://schemas.microsoft.com/office/drawing/2014/main" id="{77277043-B2A8-4619-B569-CAB7AC7F0DB0}"/>
               </a:ext>
             </a:extLst>
           </p:cNvPr>
@@ -9415,7 +10105,7 @@
           <p:cNvPr id="4" name="ambient-glow">
             <a:extLst xmlns:a="http://schemas.openxmlformats.org/drawingml/2006/main">
               <a:ext uri="{FF2B5EF4-FFF2-40B4-BE49-F238E27FC236}">
-                <a16:creationId xmlns:a16="http://schemas.microsoft.com/office/drawing/2014/main" id="{7FB2DEA0-C470-4097-A282-6EEB8091B814}"/>
+                <a16:creationId xmlns:a16="http://schemas.microsoft.com/office/drawing/2014/main" id="{8EF8108C-4254-4D08-8552-337502468B3E}"/>
               </a:ext>
             </a:extLst>
           </p:cNvPr>
@@ -9452,7 +10142,7 @@
           <p:cNvPr id="5" name="ambient-core">
             <a:extLst xmlns:a="http://schemas.openxmlformats.org/drawingml/2006/main">
               <a:ext uri="{FF2B5EF4-FFF2-40B4-BE49-F238E27FC236}">
-                <a16:creationId xmlns:a16="http://schemas.microsoft.com/office/drawing/2014/main" id="{C75AD3B6-8383-4671-AA3E-73643257067C}"/>
+                <a16:creationId xmlns:a16="http://schemas.microsoft.com/office/drawing/2014/main" id="{878B5F81-2A78-46D3-85AE-25074462AE76}"/>
               </a:ext>
             </a:extLst>
           </p:cNvPr>
@@ -9489,7 +10179,7 @@
           <p:cNvPr id="6" name="eyebrow">
             <a:extLst xmlns:a="http://schemas.openxmlformats.org/drawingml/2006/main">
               <a:ext uri="{FF2B5EF4-FFF2-40B4-BE49-F238E27FC236}">
-                <a16:creationId xmlns:a16="http://schemas.microsoft.com/office/drawing/2014/main" id="{CA8352A8-08D4-475B-B91F-A0A9CA37AC4C}"/>
+                <a16:creationId xmlns:a16="http://schemas.microsoft.com/office/drawing/2014/main" id="{5734AFD5-14E8-42AC-81E3-9BB67AE0218F}"/>
               </a:ext>
             </a:extLst>
           </p:cNvPr>
@@ -9537,10 +10227,69 @@
       </p:sp>
       <p:sp>
         <p:nvSpPr>
-          <p:cNvPr id="7" name="footer-rule">
-            <a:extLst xmlns:a="http://schemas.openxmlformats.org/drawingml/2006/main">
-              <a:ext uri="{FF2B5EF4-FFF2-40B4-BE49-F238E27FC236}">
-                <a16:creationId xmlns:a16="http://schemas.microsoft.com/office/drawing/2014/main" id="{95007C46-C44A-4A32-B999-ACE2B3E1CA02}"/>
+          <p:cNvPr id="7" name="rescue-point-logo-background">
+            <a:extLst xmlns:a="http://schemas.openxmlformats.org/drawingml/2006/main">
+              <a:ext uri="{FF2B5EF4-FFF2-40B4-BE49-F238E27FC236}">
+                <a16:creationId xmlns:a16="http://schemas.microsoft.com/office/drawing/2014/main" id="{D1487878-89D3-48A0-8126-0EC52EA8CC46}"/>
+              </a:ext>
+            </a:extLst>
+          </p:cNvPr>
+          <p:cNvSpPr>
+            <a:spLocks xmlns:a="http://schemas.openxmlformats.org/drawingml/2006/main" noGrp="1"/>
+          </p:cNvSpPr>
+          <p:nvPr/>
+        </p:nvSpPr>
+        <p:spPr>
+          <a:xfrm xmlns:a="http://schemas.openxmlformats.org/drawingml/2006/main">
+            <a:off x="9772650" y="133350"/>
+            <a:ext cx="1733550" cy="457200"/>
+          </a:xfrm>
+          <a:prstGeom xmlns:a="http://schemas.openxmlformats.org/drawingml/2006/main" prst="roundRect">
+            <a:avLst>
+              <a:gd name="adj" fmla="val 16667"/>
+            </a:avLst>
+          </a:prstGeom>
+          <a:solidFill xmlns:a="http://schemas.openxmlformats.org/drawingml/2006/main">
+            <a:srgbClr val="06142E"/>
+          </a:solidFill>
+          <a:ln xmlns:a="http://schemas.openxmlformats.org/drawingml/2006/main" w="9525">
+            <a:solidFill>
+              <a:srgbClr val="1EC5FF">
+                <a:alpha val="33333"/>
+              </a:srgbClr>
+            </a:solidFill>
+            <a:prstDash val="solid"/>
+          </a:ln>
+        </p:spPr>
+      </p:sp>
+      <p:pic>
+        <p:nvPicPr>
+          <p:cNvPr id="21" name="" descr="Figura oficial da documentação dbt usada para explicar: RADAR — dbt State gerenciado permanece fora; artifacts abertos sustentam a aula.."/>
+          <p:cNvPicPr>
+            <a:picLocks xmlns:a="http://schemas.openxmlformats.org/drawingml/2006/main" noChangeAspect="1"/>
+          </p:cNvPicPr>
+          <p:nvPr/>
+        </p:nvPicPr>
+        <p:blipFill>
+          <a:blip xmlns:r="http://schemas.openxmlformats.org/officeDocument/2006/relationships" xmlns:a="http://schemas.openxmlformats.org/drawingml/2006/main" r:embed="R42f5fbf5c7674c4a"/>
+          <a:stretch xmlns:a="http://schemas.openxmlformats.org/drawingml/2006/main"/>
+        </p:blipFill>
+        <p:spPr>
+          <a:xfrm xmlns:a="http://schemas.openxmlformats.org/drawingml/2006/main">
+            <a:off x="9893718" y="209550"/>
+            <a:ext cx="1491414" cy="323850"/>
+          </a:xfrm>
+          <a:prstGeom xmlns:a="http://schemas.openxmlformats.org/drawingml/2006/main" prst="rect">
+            <a:avLst/>
+          </a:prstGeom>
+        </p:spPr>
+      </p:pic>
+      <p:sp>
+        <p:nvSpPr>
+          <p:cNvPr id="9" name="footer-rule">
+            <a:extLst xmlns:a="http://schemas.openxmlformats.org/drawingml/2006/main">
+              <a:ext uri="{FF2B5EF4-FFF2-40B4-BE49-F238E27FC236}">
+                <a16:creationId xmlns:a16="http://schemas.microsoft.com/office/drawing/2014/main" id="{F5A3E083-2E9E-4889-B41B-BFA82F464354}"/>
               </a:ext>
             </a:extLst>
           </p:cNvPr>
@@ -9570,10 +10319,10 @@
       </p:sp>
       <p:sp>
         <p:nvSpPr>
-          <p:cNvPr id="8" name="footer">
-            <a:extLst xmlns:a="http://schemas.openxmlformats.org/drawingml/2006/main">
-              <a:ext uri="{FF2B5EF4-FFF2-40B4-BE49-F238E27FC236}">
-                <a16:creationId xmlns:a16="http://schemas.microsoft.com/office/drawing/2014/main" id="{8C3FE03C-A9FF-46AC-B5A6-F5D594F25BEA}"/>
+          <p:cNvPr id="10" name="footer">
+            <a:extLst xmlns:a="http://schemas.openxmlformats.org/drawingml/2006/main">
+              <a:ext uri="{FF2B5EF4-FFF2-40B4-BE49-F238E27FC236}">
+                <a16:creationId xmlns:a16="http://schemas.microsoft.com/office/drawing/2014/main" id="{C1C625C6-3F87-4918-9776-5B24E53AE1CC}"/>
               </a:ext>
             </a:extLst>
           </p:cNvPr>
@@ -9625,10 +10374,10 @@
       </p:sp>
       <p:sp>
         <p:nvSpPr>
-          <p:cNvPr id="9" name="page-number">
-            <a:extLst xmlns:a="http://schemas.openxmlformats.org/drawingml/2006/main">
-              <a:ext uri="{FF2B5EF4-FFF2-40B4-BE49-F238E27FC236}">
-                <a16:creationId xmlns:a16="http://schemas.microsoft.com/office/drawing/2014/main" id="{CCE52DA1-01E4-4DE0-925E-BB76CEF78530}"/>
+          <p:cNvPr id="11" name="page-number">
+            <a:extLst xmlns:a="http://schemas.openxmlformats.org/drawingml/2006/main">
+              <a:ext uri="{FF2B5EF4-FFF2-40B4-BE49-F238E27FC236}">
+                <a16:creationId xmlns:a16="http://schemas.microsoft.com/office/drawing/2014/main" id="{A1342D3D-24A8-4B55-AD1B-E698908C3975}"/>
               </a:ext>
             </a:extLst>
           </p:cNvPr>
@@ -9681,7 +10430,7 @@
     </p:spTree>
     <p:extLst>
       <p:ext uri="{BB962C8B-B14F-4D97-AF65-F5344CB8AC3E}">
-        <p14:creationId xmlns:p14="http://schemas.microsoft.com/office/powerpoint/2010/main" val="1851869733"/>
+        <p14:creationId xmlns:p14="http://schemas.microsoft.com/office/powerpoint/2010/main" val="1328813760"/>
       </p:ext>
     </p:extLst>
   </p:cSld>
@@ -9709,10 +10458,10 @@
       </p:grpSpPr>
       <p:sp>
         <p:nvSpPr>
-          <p:cNvPr id="10" name="hook">
-            <a:extLst xmlns:a="http://schemas.openxmlformats.org/drawingml/2006/main">
-              <a:ext uri="{FF2B5EF4-FFF2-40B4-BE49-F238E27FC236}">
-                <a16:creationId xmlns:a16="http://schemas.microsoft.com/office/drawing/2014/main" id="{9EAA4BEC-14D5-4EA5-A813-C1F70327111D}"/>
+          <p:cNvPr id="12" name="hook">
+            <a:extLst xmlns:a="http://schemas.openxmlformats.org/drawingml/2006/main">
+              <a:ext uri="{FF2B5EF4-FFF2-40B4-BE49-F238E27FC236}">
+                <a16:creationId xmlns:a16="http://schemas.microsoft.com/office/drawing/2014/main" id="{2272A561-224C-4A0B-9EB8-45E1A707A135}"/>
               </a:ext>
             </a:extLst>
           </p:cNvPr>
@@ -9763,7 +10512,7 @@
           <p:cNvPr id="2" name="hook-rule">
             <a:extLst xmlns:a="http://schemas.openxmlformats.org/drawingml/2006/main">
               <a:ext uri="{FF2B5EF4-FFF2-40B4-BE49-F238E27FC236}">
-                <a16:creationId xmlns:a16="http://schemas.microsoft.com/office/drawing/2014/main" id="{DF380909-6C73-4510-BD10-EEACA1924F27}"/>
+                <a16:creationId xmlns:a16="http://schemas.microsoft.com/office/drawing/2014/main" id="{AC624068-CAD7-48B5-A511-5849555DE974}"/>
               </a:ext>
             </a:extLst>
           </p:cNvPr>
@@ -9794,7 +10543,7 @@
           <p:cNvPr id="3" name="hook-label">
             <a:extLst xmlns:a="http://schemas.openxmlformats.org/drawingml/2006/main">
               <a:ext uri="{FF2B5EF4-FFF2-40B4-BE49-F238E27FC236}">
-                <a16:creationId xmlns:a16="http://schemas.microsoft.com/office/drawing/2014/main" id="{DC41801F-2875-4259-8FE9-BBE1B5D8BA3E}"/>
+                <a16:creationId xmlns:a16="http://schemas.microsoft.com/office/drawing/2014/main" id="{753D0ACD-B9E7-45B2-AF92-9C6B0DBF3551}"/>
               </a:ext>
             </a:extLst>
           </p:cNvPr>
@@ -9845,7 +10594,7 @@
           <p:cNvPr id="4" name="diagram-surface">
             <a:extLst xmlns:a="http://schemas.openxmlformats.org/drawingml/2006/main">
               <a:ext uri="{FF2B5EF4-FFF2-40B4-BE49-F238E27FC236}">
-                <a16:creationId xmlns:a16="http://schemas.microsoft.com/office/drawing/2014/main" id="{D889389E-9166-414B-B564-82F30E138B64}"/>
+                <a16:creationId xmlns:a16="http://schemas.microsoft.com/office/drawing/2014/main" id="{8299EFFF-876E-43F7-BE6C-A7C05DF2BEE8}"/>
               </a:ext>
             </a:extLst>
           </p:cNvPr>
@@ -9877,14 +10626,14 @@
       </p:sp>
       <p:pic>
         <p:nvPicPr>
-          <p:cNvPr id="16" name="" descr="Diagrama didático autoral que apresenta: CI rápida não significa selecionar menos; significa selecionar o impacto correto. — A pergunta que guia a aula."/>
+          <p:cNvPr id="19" name="" descr="Diagrama didático autoral que apresenta: CI rápida não significa selecionar menos; significa selecionar o impacto correto. — A pergunta que guia a aula."/>
           <p:cNvPicPr>
             <a:picLocks xmlns:a="http://schemas.openxmlformats.org/drawingml/2006/main" noChangeAspect="1"/>
           </p:cNvPicPr>
           <p:nvPr/>
         </p:nvPicPr>
         <p:blipFill>
-          <a:blip xmlns:r="http://schemas.openxmlformats.org/officeDocument/2006/relationships" xmlns:a="http://schemas.openxmlformats.org/drawingml/2006/main" r:embed="R0830353b45d14b6e"/>
+          <a:blip xmlns:r="http://schemas.openxmlformats.org/officeDocument/2006/relationships" xmlns:a="http://schemas.openxmlformats.org/drawingml/2006/main" r:embed="Rfd80c6c48a4a44d6"/>
           <a:stretch xmlns:a="http://schemas.openxmlformats.org/drawingml/2006/main"/>
         </p:blipFill>
         <p:spPr>
@@ -9902,7 +10651,7 @@
           <p:cNvPr id="6" name="eyebrow">
             <a:extLst xmlns:a="http://schemas.openxmlformats.org/drawingml/2006/main">
               <a:ext uri="{FF2B5EF4-FFF2-40B4-BE49-F238E27FC236}">
-                <a16:creationId xmlns:a16="http://schemas.microsoft.com/office/drawing/2014/main" id="{9E5A7BBD-0580-4D52-BBAF-AF965A6EA094}"/>
+                <a16:creationId xmlns:a16="http://schemas.microsoft.com/office/drawing/2014/main" id="{32269C3A-3EF4-47DC-9354-5E6279C1F9B8}"/>
               </a:ext>
             </a:extLst>
           </p:cNvPr>
@@ -9950,10 +10699,69 @@
       </p:sp>
       <p:sp>
         <p:nvSpPr>
-          <p:cNvPr id="7" name="footer-rule">
-            <a:extLst xmlns:a="http://schemas.openxmlformats.org/drawingml/2006/main">
-              <a:ext uri="{FF2B5EF4-FFF2-40B4-BE49-F238E27FC236}">
-                <a16:creationId xmlns:a16="http://schemas.microsoft.com/office/drawing/2014/main" id="{A0F2D8B1-6979-4C7F-B53D-23A0A3A9A2EA}"/>
+          <p:cNvPr id="7" name="rescue-point-logo-background">
+            <a:extLst xmlns:a="http://schemas.openxmlformats.org/drawingml/2006/main">
+              <a:ext uri="{FF2B5EF4-FFF2-40B4-BE49-F238E27FC236}">
+                <a16:creationId xmlns:a16="http://schemas.microsoft.com/office/drawing/2014/main" id="{47DD2085-A14E-4FF7-8535-CABB2DBBBBF8}"/>
+              </a:ext>
+            </a:extLst>
+          </p:cNvPr>
+          <p:cNvSpPr>
+            <a:spLocks xmlns:a="http://schemas.openxmlformats.org/drawingml/2006/main" noGrp="1"/>
+          </p:cNvSpPr>
+          <p:nvPr/>
+        </p:nvSpPr>
+        <p:spPr>
+          <a:xfrm xmlns:a="http://schemas.openxmlformats.org/drawingml/2006/main">
+            <a:off x="9772650" y="133350"/>
+            <a:ext cx="1733550" cy="457200"/>
+          </a:xfrm>
+          <a:prstGeom xmlns:a="http://schemas.openxmlformats.org/drawingml/2006/main" prst="roundRect">
+            <a:avLst>
+              <a:gd name="adj" fmla="val 16667"/>
+            </a:avLst>
+          </a:prstGeom>
+          <a:solidFill xmlns:a="http://schemas.openxmlformats.org/drawingml/2006/main">
+            <a:srgbClr val="06142E"/>
+          </a:solidFill>
+          <a:ln xmlns:a="http://schemas.openxmlformats.org/drawingml/2006/main" w="9525">
+            <a:solidFill>
+              <a:srgbClr val="1EC5FF">
+                <a:alpha val="33333"/>
+              </a:srgbClr>
+            </a:solidFill>
+            <a:prstDash val="solid"/>
+          </a:ln>
+        </p:spPr>
+      </p:sp>
+      <p:pic>
+        <p:nvPicPr>
+          <p:cNvPr id="22" name="" descr="Diagrama didático autoral que apresenta: CI rápida não significa selecionar menos; significa selecionar o impacto correto. — A pergunta que guia a aula."/>
+          <p:cNvPicPr>
+            <a:picLocks xmlns:a="http://schemas.openxmlformats.org/drawingml/2006/main" noChangeAspect="1"/>
+          </p:cNvPicPr>
+          <p:nvPr/>
+        </p:nvPicPr>
+        <p:blipFill>
+          <a:blip xmlns:r="http://schemas.openxmlformats.org/officeDocument/2006/relationships" xmlns:a="http://schemas.openxmlformats.org/drawingml/2006/main" r:embed="R8a2ebe103e1c40b0"/>
+          <a:stretch xmlns:a="http://schemas.openxmlformats.org/drawingml/2006/main"/>
+        </p:blipFill>
+        <p:spPr>
+          <a:xfrm xmlns:a="http://schemas.openxmlformats.org/drawingml/2006/main">
+            <a:off x="9893718" y="209550"/>
+            <a:ext cx="1491414" cy="323850"/>
+          </a:xfrm>
+          <a:prstGeom xmlns:a="http://schemas.openxmlformats.org/drawingml/2006/main" prst="rect">
+            <a:avLst/>
+          </a:prstGeom>
+        </p:spPr>
+      </p:pic>
+      <p:sp>
+        <p:nvSpPr>
+          <p:cNvPr id="9" name="footer-rule">
+            <a:extLst xmlns:a="http://schemas.openxmlformats.org/drawingml/2006/main">
+              <a:ext uri="{FF2B5EF4-FFF2-40B4-BE49-F238E27FC236}">
+                <a16:creationId xmlns:a16="http://schemas.microsoft.com/office/drawing/2014/main" id="{EEC3A148-F71D-4CDB-8026-53B826F64FD5}"/>
               </a:ext>
             </a:extLst>
           </p:cNvPr>
@@ -9983,10 +10791,10 @@
       </p:sp>
       <p:sp>
         <p:nvSpPr>
-          <p:cNvPr id="8" name="footer">
-            <a:extLst xmlns:a="http://schemas.openxmlformats.org/drawingml/2006/main">
-              <a:ext uri="{FF2B5EF4-FFF2-40B4-BE49-F238E27FC236}">
-                <a16:creationId xmlns:a16="http://schemas.microsoft.com/office/drawing/2014/main" id="{29F630ED-1CE7-4C17-9962-C279C8CEB6CA}"/>
+          <p:cNvPr id="10" name="footer">
+            <a:extLst xmlns:a="http://schemas.openxmlformats.org/drawingml/2006/main">
+              <a:ext uri="{FF2B5EF4-FFF2-40B4-BE49-F238E27FC236}">
+                <a16:creationId xmlns:a16="http://schemas.microsoft.com/office/drawing/2014/main" id="{BC35810E-A19D-4268-AEFA-71B668F98372}"/>
               </a:ext>
             </a:extLst>
           </p:cNvPr>
@@ -10038,10 +10846,10 @@
       </p:sp>
       <p:sp>
         <p:nvSpPr>
-          <p:cNvPr id="9" name="page-number">
-            <a:extLst xmlns:a="http://schemas.openxmlformats.org/drawingml/2006/main">
-              <a:ext uri="{FF2B5EF4-FFF2-40B4-BE49-F238E27FC236}">
-                <a16:creationId xmlns:a16="http://schemas.microsoft.com/office/drawing/2014/main" id="{8962E892-993C-4026-AD24-15B31A1F2137}"/>
+          <p:cNvPr id="11" name="page-number">
+            <a:extLst xmlns:a="http://schemas.openxmlformats.org/drawingml/2006/main">
+              <a:ext uri="{FF2B5EF4-FFF2-40B4-BE49-F238E27FC236}">
+                <a16:creationId xmlns:a16="http://schemas.microsoft.com/office/drawing/2014/main" id="{172A39D2-767D-4C13-BDD8-E188574D1564}"/>
               </a:ext>
             </a:extLst>
           </p:cNvPr>
@@ -10094,7 +10902,7 @@
     </p:spTree>
     <p:extLst>
       <p:ext uri="{BB962C8B-B14F-4D97-AF65-F5344CB8AC3E}">
-        <p14:creationId xmlns:p14="http://schemas.microsoft.com/office/powerpoint/2010/main" val="2017419998"/>
+        <p14:creationId xmlns:p14="http://schemas.microsoft.com/office/powerpoint/2010/main" val="796887018"/>
       </p:ext>
     </p:extLst>
   </p:cSld>
@@ -10122,10 +10930,10 @@
       </p:grpSpPr>
       <p:sp>
         <p:nvSpPr>
-          <p:cNvPr id="8" name="cta-label">
-            <a:extLst xmlns:a="http://schemas.openxmlformats.org/drawingml/2006/main">
-              <a:ext uri="{FF2B5EF4-FFF2-40B4-BE49-F238E27FC236}">
-                <a16:creationId xmlns:a16="http://schemas.microsoft.com/office/drawing/2014/main" id="{C74FEF11-56CB-4A7D-852E-1B7C9BB99537}"/>
+          <p:cNvPr id="10" name="cta-label">
+            <a:extLst xmlns:a="http://schemas.openxmlformats.org/drawingml/2006/main">
+              <a:ext uri="{FF2B5EF4-FFF2-40B4-BE49-F238E27FC236}">
+                <a16:creationId xmlns:a16="http://schemas.microsoft.com/office/drawing/2014/main" id="{9F28EEB9-78FB-422E-BF0D-78E3FF18DBDE}"/>
               </a:ext>
             </a:extLst>
           </p:cNvPr>
@@ -10176,7 +10984,7 @@
           <p:cNvPr id="2" name="cta">
             <a:extLst xmlns:a="http://schemas.openxmlformats.org/drawingml/2006/main">
               <a:ext uri="{FF2B5EF4-FFF2-40B4-BE49-F238E27FC236}">
-                <a16:creationId xmlns:a16="http://schemas.microsoft.com/office/drawing/2014/main" id="{348D63E5-642B-4618-9E9D-7D6D64D901EB}"/>
+                <a16:creationId xmlns:a16="http://schemas.microsoft.com/office/drawing/2014/main" id="{FC57BFC7-DF3B-42A5-AE8E-F887DC3631C7}"/>
               </a:ext>
             </a:extLst>
           </p:cNvPr>
@@ -10227,7 +11035,7 @@
           <p:cNvPr id="3" name="cta-meta">
             <a:extLst xmlns:a="http://schemas.openxmlformats.org/drawingml/2006/main">
               <a:ext uri="{FF2B5EF4-FFF2-40B4-BE49-F238E27FC236}">
-                <a16:creationId xmlns:a16="http://schemas.microsoft.com/office/drawing/2014/main" id="{D1667DC8-477D-44F3-B890-308C20BAD8D7}"/>
+                <a16:creationId xmlns:a16="http://schemas.microsoft.com/office/drawing/2014/main" id="{66B8ED40-9CC9-428A-A32E-66016DBF27E4}"/>
               </a:ext>
             </a:extLst>
           </p:cNvPr>
@@ -10278,7 +11086,7 @@
           <p:cNvPr id="4" name="eyebrow">
             <a:extLst xmlns:a="http://schemas.openxmlformats.org/drawingml/2006/main">
               <a:ext uri="{FF2B5EF4-FFF2-40B4-BE49-F238E27FC236}">
-                <a16:creationId xmlns:a16="http://schemas.microsoft.com/office/drawing/2014/main" id="{8F245D16-A279-406A-B7B3-F17DDF72AFFD}"/>
+                <a16:creationId xmlns:a16="http://schemas.microsoft.com/office/drawing/2014/main" id="{CAEF8626-3DB1-46F7-84BC-B425E2FD142B}"/>
               </a:ext>
             </a:extLst>
           </p:cNvPr>
@@ -10326,10 +11134,69 @@
       </p:sp>
       <p:sp>
         <p:nvSpPr>
-          <p:cNvPr id="5" name="footer-rule">
-            <a:extLst xmlns:a="http://schemas.openxmlformats.org/drawingml/2006/main">
-              <a:ext uri="{FF2B5EF4-FFF2-40B4-BE49-F238E27FC236}">
-                <a16:creationId xmlns:a16="http://schemas.microsoft.com/office/drawing/2014/main" id="{0ACBD8B4-56AA-46FF-A64E-B2633B601D2F}"/>
+          <p:cNvPr id="5" name="rescue-point-logo-background">
+            <a:extLst xmlns:a="http://schemas.openxmlformats.org/drawingml/2006/main">
+              <a:ext uri="{FF2B5EF4-FFF2-40B4-BE49-F238E27FC236}">
+                <a16:creationId xmlns:a16="http://schemas.microsoft.com/office/drawing/2014/main" id="{94FC9ED0-5FA7-4FBD-87B3-90256359D002}"/>
+              </a:ext>
+            </a:extLst>
+          </p:cNvPr>
+          <p:cNvSpPr>
+            <a:spLocks xmlns:a="http://schemas.openxmlformats.org/drawingml/2006/main" noGrp="1"/>
+          </p:cNvSpPr>
+          <p:nvPr/>
+        </p:nvSpPr>
+        <p:spPr>
+          <a:xfrm xmlns:a="http://schemas.openxmlformats.org/drawingml/2006/main">
+            <a:off x="9772650" y="133350"/>
+            <a:ext cx="1733550" cy="457200"/>
+          </a:xfrm>
+          <a:prstGeom xmlns:a="http://schemas.openxmlformats.org/drawingml/2006/main" prst="roundRect">
+            <a:avLst>
+              <a:gd name="adj" fmla="val 16667"/>
+            </a:avLst>
+          </a:prstGeom>
+          <a:solidFill xmlns:a="http://schemas.openxmlformats.org/drawingml/2006/main">
+            <a:srgbClr val="06142E"/>
+          </a:solidFill>
+          <a:ln xmlns:a="http://schemas.openxmlformats.org/drawingml/2006/main" w="9525">
+            <a:solidFill>
+              <a:srgbClr val="1EC5FF">
+                <a:alpha val="33333"/>
+              </a:srgbClr>
+            </a:solidFill>
+            <a:prstDash val="solid"/>
+          </a:ln>
+        </p:spPr>
+      </p:sp>
+      <p:pic>
+        <p:nvPicPr>
+          <p:cNvPr id="17" name="" descr="Figura oficial da documentação dbt usada para explicar: PRÓXIMO PASSO — Salve um manifest e compare a seleção antes e depois de uma mudança.."/>
+          <p:cNvPicPr>
+            <a:picLocks xmlns:a="http://schemas.openxmlformats.org/drawingml/2006/main" noChangeAspect="1"/>
+          </p:cNvPicPr>
+          <p:nvPr/>
+        </p:nvPicPr>
+        <p:blipFill>
+          <a:blip xmlns:r="http://schemas.openxmlformats.org/officeDocument/2006/relationships" xmlns:a="http://schemas.openxmlformats.org/drawingml/2006/main" r:embed="R28597f7881fb41ad"/>
+          <a:stretch xmlns:a="http://schemas.openxmlformats.org/drawingml/2006/main"/>
+        </p:blipFill>
+        <p:spPr>
+          <a:xfrm xmlns:a="http://schemas.openxmlformats.org/drawingml/2006/main">
+            <a:off x="9893718" y="209550"/>
+            <a:ext cx="1491414" cy="323850"/>
+          </a:xfrm>
+          <a:prstGeom xmlns:a="http://schemas.openxmlformats.org/drawingml/2006/main" prst="rect">
+            <a:avLst/>
+          </a:prstGeom>
+        </p:spPr>
+      </p:pic>
+      <p:sp>
+        <p:nvSpPr>
+          <p:cNvPr id="7" name="footer-rule">
+            <a:extLst xmlns:a="http://schemas.openxmlformats.org/drawingml/2006/main">
+              <a:ext uri="{FF2B5EF4-FFF2-40B4-BE49-F238E27FC236}">
+                <a16:creationId xmlns:a16="http://schemas.microsoft.com/office/drawing/2014/main" id="{9EF709FC-D4A9-4014-BC2B-E3E64D575494}"/>
               </a:ext>
             </a:extLst>
           </p:cNvPr>
@@ -10359,10 +11226,10 @@
       </p:sp>
       <p:sp>
         <p:nvSpPr>
-          <p:cNvPr id="6" name="footer">
-            <a:extLst xmlns:a="http://schemas.openxmlformats.org/drawingml/2006/main">
-              <a:ext uri="{FF2B5EF4-FFF2-40B4-BE49-F238E27FC236}">
-                <a16:creationId xmlns:a16="http://schemas.microsoft.com/office/drawing/2014/main" id="{13FC195A-C483-4080-8758-DDF9F546236F}"/>
+          <p:cNvPr id="8" name="footer">
+            <a:extLst xmlns:a="http://schemas.openxmlformats.org/drawingml/2006/main">
+              <a:ext uri="{FF2B5EF4-FFF2-40B4-BE49-F238E27FC236}">
+                <a16:creationId xmlns:a16="http://schemas.microsoft.com/office/drawing/2014/main" id="{1F298A7F-E37A-45DD-A8AD-79A485F5D945}"/>
               </a:ext>
             </a:extLst>
           </p:cNvPr>
@@ -10414,10 +11281,10 @@
       </p:sp>
       <p:sp>
         <p:nvSpPr>
-          <p:cNvPr id="7" name="page-number">
-            <a:extLst xmlns:a="http://schemas.openxmlformats.org/drawingml/2006/main">
-              <a:ext uri="{FF2B5EF4-FFF2-40B4-BE49-F238E27FC236}">
-                <a16:creationId xmlns:a16="http://schemas.microsoft.com/office/drawing/2014/main" id="{C6D84489-3F47-41A2-80A5-16BE1B5D8EC9}"/>
+          <p:cNvPr id="9" name="page-number">
+            <a:extLst xmlns:a="http://schemas.openxmlformats.org/drawingml/2006/main">
+              <a:ext uri="{FF2B5EF4-FFF2-40B4-BE49-F238E27FC236}">
+                <a16:creationId xmlns:a16="http://schemas.microsoft.com/office/drawing/2014/main" id="{EF0E2B20-740C-40F6-B151-AD13C1C2F5BC}"/>
               </a:ext>
             </a:extLst>
           </p:cNvPr>
@@ -10470,7 +11337,7 @@
     </p:spTree>
     <p:extLst>
       <p:ext uri="{BB962C8B-B14F-4D97-AF65-F5344CB8AC3E}">
-        <p14:creationId xmlns:p14="http://schemas.microsoft.com/office/powerpoint/2010/main" val="1247985021"/>
+        <p14:creationId xmlns:p14="http://schemas.microsoft.com/office/powerpoint/2010/main" val="1496861055"/>
       </p:ext>
     </p:extLst>
   </p:cSld>
@@ -10506,10 +11373,10 @@
       </p:grpSpPr>
       <p:sp>
         <p:nvSpPr>
-          <p:cNvPr id="14" name="slide-title">
-            <a:extLst xmlns:a="http://schemas.openxmlformats.org/drawingml/2006/main">
-              <a:ext uri="{FF2B5EF4-FFF2-40B4-BE49-F238E27FC236}">
-                <a16:creationId xmlns:a16="http://schemas.microsoft.com/office/drawing/2014/main" id="{3BFA1711-D845-4EEB-9E6B-C7274651DAA7}"/>
+          <p:cNvPr id="16" name="slide-title">
+            <a:extLst xmlns:a="http://schemas.openxmlformats.org/drawingml/2006/main">
+              <a:ext uri="{FF2B5EF4-FFF2-40B4-BE49-F238E27FC236}">
+                <a16:creationId xmlns:a16="http://schemas.microsoft.com/office/drawing/2014/main" id="{EEA56017-59A6-4EF2-9BBA-0AFACE7FA784}"/>
               </a:ext>
             </a:extLst>
           </p:cNvPr>
@@ -10560,7 +11427,7 @@
           <p:cNvPr id="2" name="step-num-1">
             <a:extLst xmlns:a="http://schemas.openxmlformats.org/drawingml/2006/main">
               <a:ext uri="{FF2B5EF4-FFF2-40B4-BE49-F238E27FC236}">
-                <a16:creationId xmlns:a16="http://schemas.microsoft.com/office/drawing/2014/main" id="{8DFF8C10-8B08-4239-BFC9-DB41CB863979}"/>
+                <a16:creationId xmlns:a16="http://schemas.microsoft.com/office/drawing/2014/main" id="{59902628-0C98-4A7A-8690-A108BBFDBBAF}"/>
               </a:ext>
             </a:extLst>
           </p:cNvPr>
@@ -10611,7 +11478,7 @@
           <p:cNvPr id="3" name="step-label-1">
             <a:extLst xmlns:a="http://schemas.openxmlformats.org/drawingml/2006/main">
               <a:ext uri="{FF2B5EF4-FFF2-40B4-BE49-F238E27FC236}">
-                <a16:creationId xmlns:a16="http://schemas.microsoft.com/office/drawing/2014/main" id="{61A332FC-E263-4464-98BE-7D4EEEBAC7B6}"/>
+                <a16:creationId xmlns:a16="http://schemas.microsoft.com/office/drawing/2014/main" id="{63BD5AF4-25DD-4336-91AA-3B8D4ABBF6C5}"/>
               </a:ext>
             </a:extLst>
           </p:cNvPr>
@@ -10662,7 +11529,7 @@
           <p:cNvPr id="4" name="step-line-1">
             <a:extLst xmlns:a="http://schemas.openxmlformats.org/drawingml/2006/main">
               <a:ext uri="{FF2B5EF4-FFF2-40B4-BE49-F238E27FC236}">
-                <a16:creationId xmlns:a16="http://schemas.microsoft.com/office/drawing/2014/main" id="{6F4D3917-E423-4338-B449-1A5105FDA0CA}"/>
+                <a16:creationId xmlns:a16="http://schemas.microsoft.com/office/drawing/2014/main" id="{A0D396EF-9DB7-4764-9A28-4B2A2BC1A6B8}"/>
               </a:ext>
             </a:extLst>
           </p:cNvPr>
@@ -10693,7 +11560,7 @@
           <p:cNvPr id="5" name="step-num-2">
             <a:extLst xmlns:a="http://schemas.openxmlformats.org/drawingml/2006/main">
               <a:ext uri="{FF2B5EF4-FFF2-40B4-BE49-F238E27FC236}">
-                <a16:creationId xmlns:a16="http://schemas.microsoft.com/office/drawing/2014/main" id="{2BA3AA17-909E-480D-84A9-CA2741A82754}"/>
+                <a16:creationId xmlns:a16="http://schemas.microsoft.com/office/drawing/2014/main" id="{527202F6-00FA-4009-AAA7-20EFFD867452}"/>
               </a:ext>
             </a:extLst>
           </p:cNvPr>
@@ -10744,7 +11611,7 @@
           <p:cNvPr id="6" name="step-label-2">
             <a:extLst xmlns:a="http://schemas.openxmlformats.org/drawingml/2006/main">
               <a:ext uri="{FF2B5EF4-FFF2-40B4-BE49-F238E27FC236}">
-                <a16:creationId xmlns:a16="http://schemas.microsoft.com/office/drawing/2014/main" id="{D1A5FE3C-FF7E-4B26-88BE-E15B68B2895A}"/>
+                <a16:creationId xmlns:a16="http://schemas.microsoft.com/office/drawing/2014/main" id="{631B8CC9-DE44-469C-8AAD-0B2D85B96CBF}"/>
               </a:ext>
             </a:extLst>
           </p:cNvPr>
@@ -10795,7 +11662,7 @@
           <p:cNvPr id="7" name="step-line-2">
             <a:extLst xmlns:a="http://schemas.openxmlformats.org/drawingml/2006/main">
               <a:ext uri="{FF2B5EF4-FFF2-40B4-BE49-F238E27FC236}">
-                <a16:creationId xmlns:a16="http://schemas.microsoft.com/office/drawing/2014/main" id="{D033A3C1-17E9-44F9-93D0-7B6154119F66}"/>
+                <a16:creationId xmlns:a16="http://schemas.microsoft.com/office/drawing/2014/main" id="{0D92FF66-5A1D-4731-ADFF-99B44CC17E3E}"/>
               </a:ext>
             </a:extLst>
           </p:cNvPr>
@@ -10826,7 +11693,7 @@
           <p:cNvPr id="8" name="step-num-3">
             <a:extLst xmlns:a="http://schemas.openxmlformats.org/drawingml/2006/main">
               <a:ext uri="{FF2B5EF4-FFF2-40B4-BE49-F238E27FC236}">
-                <a16:creationId xmlns:a16="http://schemas.microsoft.com/office/drawing/2014/main" id="{42919279-DCFA-4D0E-9EDA-2877689F511F}"/>
+                <a16:creationId xmlns:a16="http://schemas.microsoft.com/office/drawing/2014/main" id="{7EBEB178-56A0-4B8C-B82A-C1379BE9D72A}"/>
               </a:ext>
             </a:extLst>
           </p:cNvPr>
@@ -10877,7 +11744,7 @@
           <p:cNvPr id="9" name="step-label-3">
             <a:extLst xmlns:a="http://schemas.openxmlformats.org/drawingml/2006/main">
               <a:ext uri="{FF2B5EF4-FFF2-40B4-BE49-F238E27FC236}">
-                <a16:creationId xmlns:a16="http://schemas.microsoft.com/office/drawing/2014/main" id="{74A704E7-143A-4DE0-B233-879DF7F12709}"/>
+                <a16:creationId xmlns:a16="http://schemas.microsoft.com/office/drawing/2014/main" id="{A171D45D-2789-4E2B-9ABA-B2DA882EDFC2}"/>
               </a:ext>
             </a:extLst>
           </p:cNvPr>
@@ -10928,7 +11795,7 @@
           <p:cNvPr id="10" name="eyebrow">
             <a:extLst xmlns:a="http://schemas.openxmlformats.org/drawingml/2006/main">
               <a:ext uri="{FF2B5EF4-FFF2-40B4-BE49-F238E27FC236}">
-                <a16:creationId xmlns:a16="http://schemas.microsoft.com/office/drawing/2014/main" id="{EC9A69C2-99A5-4D35-B994-F08B18462E00}"/>
+                <a16:creationId xmlns:a16="http://schemas.microsoft.com/office/drawing/2014/main" id="{22B9B117-D275-47ED-98D0-CC4784999E75}"/>
               </a:ext>
             </a:extLst>
           </p:cNvPr>
@@ -10976,10 +11843,69 @@
       </p:sp>
       <p:sp>
         <p:nvSpPr>
-          <p:cNvPr id="11" name="footer-rule">
-            <a:extLst xmlns:a="http://schemas.openxmlformats.org/drawingml/2006/main">
-              <a:ext uri="{FF2B5EF4-FFF2-40B4-BE49-F238E27FC236}">
-                <a16:creationId xmlns:a16="http://schemas.microsoft.com/office/drawing/2014/main" id="{4F1217D6-ACE0-4555-8443-1430EC4E0656}"/>
+          <p:cNvPr id="11" name="rescue-point-logo-background">
+            <a:extLst xmlns:a="http://schemas.openxmlformats.org/drawingml/2006/main">
+              <a:ext uri="{FF2B5EF4-FFF2-40B4-BE49-F238E27FC236}">
+                <a16:creationId xmlns:a16="http://schemas.microsoft.com/office/drawing/2014/main" id="{DF35919D-8FE3-45D6-969B-8D823AA2604C}"/>
+              </a:ext>
+            </a:extLst>
+          </p:cNvPr>
+          <p:cNvSpPr>
+            <a:spLocks xmlns:a="http://schemas.openxmlformats.org/drawingml/2006/main" noGrp="1"/>
+          </p:cNvSpPr>
+          <p:nvPr/>
+        </p:nvSpPr>
+        <p:spPr>
+          <a:xfrm xmlns:a="http://schemas.openxmlformats.org/drawingml/2006/main">
+            <a:off x="9772650" y="133350"/>
+            <a:ext cx="1733550" cy="457200"/>
+          </a:xfrm>
+          <a:prstGeom xmlns:a="http://schemas.openxmlformats.org/drawingml/2006/main" prst="roundRect">
+            <a:avLst>
+              <a:gd name="adj" fmla="val 16667"/>
+            </a:avLst>
+          </a:prstGeom>
+          <a:solidFill xmlns:a="http://schemas.openxmlformats.org/drawingml/2006/main">
+            <a:srgbClr val="06142E"/>
+          </a:solidFill>
+          <a:ln xmlns:a="http://schemas.openxmlformats.org/drawingml/2006/main" w="9525">
+            <a:solidFill>
+              <a:srgbClr val="1EC5FF">
+                <a:alpha val="33333"/>
+              </a:srgbClr>
+            </a:solidFill>
+            <a:prstDash val="solid"/>
+          </a:ln>
+        </p:spPr>
+      </p:sp>
+      <p:pic>
+        <p:nvPicPr>
+          <p:cNvPr id="29" name="" descr="Figura oficial da documentação dbt usada para explicar: Ao final, você consegue... — 01."/>
+          <p:cNvPicPr>
+            <a:picLocks xmlns:a="http://schemas.openxmlformats.org/drawingml/2006/main" noChangeAspect="1"/>
+          </p:cNvPicPr>
+          <p:nvPr/>
+        </p:nvPicPr>
+        <p:blipFill>
+          <a:blip xmlns:r="http://schemas.openxmlformats.org/officeDocument/2006/relationships" xmlns:a="http://schemas.openxmlformats.org/drawingml/2006/main" r:embed="R1eeb5aa12fab4fcd"/>
+          <a:stretch xmlns:a="http://schemas.openxmlformats.org/drawingml/2006/main"/>
+        </p:blipFill>
+        <p:spPr>
+          <a:xfrm xmlns:a="http://schemas.openxmlformats.org/drawingml/2006/main">
+            <a:off x="9893718" y="209550"/>
+            <a:ext cx="1491414" cy="323850"/>
+          </a:xfrm>
+          <a:prstGeom xmlns:a="http://schemas.openxmlformats.org/drawingml/2006/main" prst="rect">
+            <a:avLst/>
+          </a:prstGeom>
+        </p:spPr>
+      </p:pic>
+      <p:sp>
+        <p:nvSpPr>
+          <p:cNvPr id="13" name="footer-rule">
+            <a:extLst xmlns:a="http://schemas.openxmlformats.org/drawingml/2006/main">
+              <a:ext uri="{FF2B5EF4-FFF2-40B4-BE49-F238E27FC236}">
+                <a16:creationId xmlns:a16="http://schemas.microsoft.com/office/drawing/2014/main" id="{32D54FE4-D5CF-4C73-B22F-82F921C25A31}"/>
               </a:ext>
             </a:extLst>
           </p:cNvPr>
@@ -11009,10 +11935,10 @@
       </p:sp>
       <p:sp>
         <p:nvSpPr>
-          <p:cNvPr id="12" name="footer">
-            <a:extLst xmlns:a="http://schemas.openxmlformats.org/drawingml/2006/main">
-              <a:ext uri="{FF2B5EF4-FFF2-40B4-BE49-F238E27FC236}">
-                <a16:creationId xmlns:a16="http://schemas.microsoft.com/office/drawing/2014/main" id="{0E270D60-6DF9-49B6-8577-A811824C3BB9}"/>
+          <p:cNvPr id="14" name="footer">
+            <a:extLst xmlns:a="http://schemas.openxmlformats.org/drawingml/2006/main">
+              <a:ext uri="{FF2B5EF4-FFF2-40B4-BE49-F238E27FC236}">
+                <a16:creationId xmlns:a16="http://schemas.microsoft.com/office/drawing/2014/main" id="{C3C91B44-8335-46BB-BE5F-7645516BE002}"/>
               </a:ext>
             </a:extLst>
           </p:cNvPr>
@@ -11064,10 +11990,10 @@
       </p:sp>
       <p:sp>
         <p:nvSpPr>
-          <p:cNvPr id="13" name="page-number">
-            <a:extLst xmlns:a="http://schemas.openxmlformats.org/drawingml/2006/main">
-              <a:ext uri="{FF2B5EF4-FFF2-40B4-BE49-F238E27FC236}">
-                <a16:creationId xmlns:a16="http://schemas.microsoft.com/office/drawing/2014/main" id="{B1E7B65C-3E5C-4E04-AEC5-970E6B1DF4ED}"/>
+          <p:cNvPr id="15" name="page-number">
+            <a:extLst xmlns:a="http://schemas.openxmlformats.org/drawingml/2006/main">
+              <a:ext uri="{FF2B5EF4-FFF2-40B4-BE49-F238E27FC236}">
+                <a16:creationId xmlns:a16="http://schemas.microsoft.com/office/drawing/2014/main" id="{5449BCFD-0EA7-43B0-B65E-1D4D7FC334A3}"/>
               </a:ext>
             </a:extLst>
           </p:cNvPr>
@@ -11120,7 +12046,7 @@
     </p:spTree>
     <p:extLst>
       <p:ext uri="{BB962C8B-B14F-4D97-AF65-F5344CB8AC3E}">
-        <p14:creationId xmlns:p14="http://schemas.microsoft.com/office/powerpoint/2010/main" val="520098986"/>
+        <p14:creationId xmlns:p14="http://schemas.microsoft.com/office/powerpoint/2010/main" val="1872071241"/>
       </p:ext>
     </p:extLst>
   </p:cSld>
@@ -11156,10 +12082,10 @@
       </p:grpSpPr>
       <p:sp>
         <p:nvSpPr>
-          <p:cNvPr id="11" name="slide-title">
-            <a:extLst xmlns:a="http://schemas.openxmlformats.org/drawingml/2006/main">
-              <a:ext uri="{FF2B5EF4-FFF2-40B4-BE49-F238E27FC236}">
-                <a16:creationId xmlns:a16="http://schemas.microsoft.com/office/drawing/2014/main" id="{BCF2BD00-F6EF-4FEE-B794-31B7A0B71961}"/>
+          <p:cNvPr id="13" name="slide-title">
+            <a:extLst xmlns:a="http://schemas.openxmlformats.org/drawingml/2006/main">
+              <a:ext uri="{FF2B5EF4-FFF2-40B4-BE49-F238E27FC236}">
+                <a16:creationId xmlns:a16="http://schemas.microsoft.com/office/drawing/2014/main" id="{E2C678CE-D41F-4655-BAAE-8B1B5429B60F}"/>
               </a:ext>
             </a:extLst>
           </p:cNvPr>
@@ -11210,7 +12136,7 @@
           <p:cNvPr id="2" name="slide-subtitle">
             <a:extLst xmlns:a="http://schemas.openxmlformats.org/drawingml/2006/main">
               <a:ext uri="{FF2B5EF4-FFF2-40B4-BE49-F238E27FC236}">
-                <a16:creationId xmlns:a16="http://schemas.microsoft.com/office/drawing/2014/main" id="{02C2CD6E-4615-4CD7-8A87-B4C743905CBC}"/>
+                <a16:creationId xmlns:a16="http://schemas.microsoft.com/office/drawing/2014/main" id="{76710745-B47D-4A8D-9CFD-DCC6ED316C4C}"/>
               </a:ext>
             </a:extLst>
           </p:cNvPr>
@@ -11261,7 +12187,7 @@
           <p:cNvPr id="3" name="bullets">
             <a:extLst xmlns:a="http://schemas.openxmlformats.org/drawingml/2006/main">
               <a:ext uri="{FF2B5EF4-FFF2-40B4-BE49-F238E27FC236}">
-                <a16:creationId xmlns:a16="http://schemas.microsoft.com/office/drawing/2014/main" id="{B4199F1C-56C2-4F63-A330-0A63574DC0DA}"/>
+                <a16:creationId xmlns:a16="http://schemas.microsoft.com/office/drawing/2014/main" id="{5F3CF686-B55F-4874-9B32-F09BE4AA25D6}"/>
               </a:ext>
             </a:extLst>
           </p:cNvPr>
@@ -11348,7 +12274,7 @@
           <p:cNvPr id="4" name="ambient-glow">
             <a:extLst xmlns:a="http://schemas.openxmlformats.org/drawingml/2006/main">
               <a:ext uri="{FF2B5EF4-FFF2-40B4-BE49-F238E27FC236}">
-                <a16:creationId xmlns:a16="http://schemas.microsoft.com/office/drawing/2014/main" id="{627966ED-149E-4FCA-A8D9-5C8F583A78FD}"/>
+                <a16:creationId xmlns:a16="http://schemas.microsoft.com/office/drawing/2014/main" id="{F1B68912-2110-4500-83CC-1ADFA0484256}"/>
               </a:ext>
             </a:extLst>
           </p:cNvPr>
@@ -11385,7 +12311,7 @@
           <p:cNvPr id="5" name="ambient-core">
             <a:extLst xmlns:a="http://schemas.openxmlformats.org/drawingml/2006/main">
               <a:ext uri="{FF2B5EF4-FFF2-40B4-BE49-F238E27FC236}">
-                <a16:creationId xmlns:a16="http://schemas.microsoft.com/office/drawing/2014/main" id="{AD104DE5-6694-4517-B5F3-AC241FB2651A}"/>
+                <a16:creationId xmlns:a16="http://schemas.microsoft.com/office/drawing/2014/main" id="{5EC6D5BC-654D-4741-A69C-21EA7B2BD321}"/>
               </a:ext>
             </a:extLst>
           </p:cNvPr>
@@ -11422,7 +12348,7 @@
           <p:cNvPr id="6" name="section-number">
             <a:extLst xmlns:a="http://schemas.openxmlformats.org/drawingml/2006/main">
               <a:ext uri="{FF2B5EF4-FFF2-40B4-BE49-F238E27FC236}">
-                <a16:creationId xmlns:a16="http://schemas.microsoft.com/office/drawing/2014/main" id="{A03036AC-967E-4D11-A000-2D8565DCCC8C}"/>
+                <a16:creationId xmlns:a16="http://schemas.microsoft.com/office/drawing/2014/main" id="{ACDCF420-6A82-46E1-BA60-A3B818211537}"/>
               </a:ext>
             </a:extLst>
           </p:cNvPr>
@@ -11473,7 +12399,7 @@
           <p:cNvPr id="7" name="eyebrow">
             <a:extLst xmlns:a="http://schemas.openxmlformats.org/drawingml/2006/main">
               <a:ext uri="{FF2B5EF4-FFF2-40B4-BE49-F238E27FC236}">
-                <a16:creationId xmlns:a16="http://schemas.microsoft.com/office/drawing/2014/main" id="{C115C495-05B1-4CD8-ADCD-2DCF1889AF7E}"/>
+                <a16:creationId xmlns:a16="http://schemas.microsoft.com/office/drawing/2014/main" id="{831849BE-1AF0-4E4B-88C6-48A053A502C9}"/>
               </a:ext>
             </a:extLst>
           </p:cNvPr>
@@ -11521,10 +12447,69 @@
       </p:sp>
       <p:sp>
         <p:nvSpPr>
-          <p:cNvPr id="8" name="footer-rule">
-            <a:extLst xmlns:a="http://schemas.openxmlformats.org/drawingml/2006/main">
-              <a:ext uri="{FF2B5EF4-FFF2-40B4-BE49-F238E27FC236}">
-                <a16:creationId xmlns:a16="http://schemas.microsoft.com/office/drawing/2014/main" id="{A3E9CEC8-ED14-4B9F-A24C-60E494DFE601}"/>
+          <p:cNvPr id="8" name="rescue-point-logo-background">
+            <a:extLst xmlns:a="http://schemas.openxmlformats.org/drawingml/2006/main">
+              <a:ext uri="{FF2B5EF4-FFF2-40B4-BE49-F238E27FC236}">
+                <a16:creationId xmlns:a16="http://schemas.microsoft.com/office/drawing/2014/main" id="{213D99D3-A07B-4E3D-B42B-F4DC3B43F7C4}"/>
+              </a:ext>
+            </a:extLst>
+          </p:cNvPr>
+          <p:cNvSpPr>
+            <a:spLocks xmlns:a="http://schemas.openxmlformats.org/drawingml/2006/main" noGrp="1"/>
+          </p:cNvSpPr>
+          <p:nvPr/>
+        </p:nvSpPr>
+        <p:spPr>
+          <a:xfrm xmlns:a="http://schemas.openxmlformats.org/drawingml/2006/main">
+            <a:off x="9772650" y="133350"/>
+            <a:ext cx="1733550" cy="457200"/>
+          </a:xfrm>
+          <a:prstGeom xmlns:a="http://schemas.openxmlformats.org/drawingml/2006/main" prst="roundRect">
+            <a:avLst>
+              <a:gd name="adj" fmla="val 16667"/>
+            </a:avLst>
+          </a:prstGeom>
+          <a:solidFill xmlns:a="http://schemas.openxmlformats.org/drawingml/2006/main">
+            <a:srgbClr val="06142E"/>
+          </a:solidFill>
+          <a:ln xmlns:a="http://schemas.openxmlformats.org/drawingml/2006/main" w="9525">
+            <a:solidFill>
+              <a:srgbClr val="1EC5FF">
+                <a:alpha val="33333"/>
+              </a:srgbClr>
+            </a:solidFill>
+            <a:prstDash val="solid"/>
+          </a:ln>
+        </p:spPr>
+      </p:sp>
+      <p:pic>
+        <p:nvPicPr>
+          <p:cNvPr id="23" name="" descr="Figura oficial da documentação dbt usada para explicar: Artifact não é lixo de build — O manifest anterior é a referência que permite calcular mudança.."/>
+          <p:cNvPicPr>
+            <a:picLocks xmlns:a="http://schemas.openxmlformats.org/drawingml/2006/main" noChangeAspect="1"/>
+          </p:cNvPicPr>
+          <p:nvPr/>
+        </p:nvPicPr>
+        <p:blipFill>
+          <a:blip xmlns:r="http://schemas.openxmlformats.org/officeDocument/2006/relationships" xmlns:a="http://schemas.openxmlformats.org/drawingml/2006/main" r:embed="R7c4676d955f049c9"/>
+          <a:stretch xmlns:a="http://schemas.openxmlformats.org/drawingml/2006/main"/>
+        </p:blipFill>
+        <p:spPr>
+          <a:xfrm xmlns:a="http://schemas.openxmlformats.org/drawingml/2006/main">
+            <a:off x="9893718" y="209550"/>
+            <a:ext cx="1491414" cy="323850"/>
+          </a:xfrm>
+          <a:prstGeom xmlns:a="http://schemas.openxmlformats.org/drawingml/2006/main" prst="rect">
+            <a:avLst/>
+          </a:prstGeom>
+        </p:spPr>
+      </p:pic>
+      <p:sp>
+        <p:nvSpPr>
+          <p:cNvPr id="10" name="footer-rule">
+            <a:extLst xmlns:a="http://schemas.openxmlformats.org/drawingml/2006/main">
+              <a:ext uri="{FF2B5EF4-FFF2-40B4-BE49-F238E27FC236}">
+                <a16:creationId xmlns:a16="http://schemas.microsoft.com/office/drawing/2014/main" id="{8ED496AE-F0A9-4897-A7CF-6FFDA9CC151B}"/>
               </a:ext>
             </a:extLst>
           </p:cNvPr>
@@ -11554,10 +12539,10 @@
       </p:sp>
       <p:sp>
         <p:nvSpPr>
-          <p:cNvPr id="9" name="footer">
-            <a:extLst xmlns:a="http://schemas.openxmlformats.org/drawingml/2006/main">
-              <a:ext uri="{FF2B5EF4-FFF2-40B4-BE49-F238E27FC236}">
-                <a16:creationId xmlns:a16="http://schemas.microsoft.com/office/drawing/2014/main" id="{99BE1E17-04F4-4A7E-AC68-6238C32C89D8}"/>
+          <p:cNvPr id="11" name="footer">
+            <a:extLst xmlns:a="http://schemas.openxmlformats.org/drawingml/2006/main">
+              <a:ext uri="{FF2B5EF4-FFF2-40B4-BE49-F238E27FC236}">
+                <a16:creationId xmlns:a16="http://schemas.microsoft.com/office/drawing/2014/main" id="{F57A0308-BB86-4213-ADC2-F7CC95E9EE75}"/>
               </a:ext>
             </a:extLst>
           </p:cNvPr>
@@ -11609,10 +12594,10 @@
       </p:sp>
       <p:sp>
         <p:nvSpPr>
-          <p:cNvPr id="10" name="page-number">
-            <a:extLst xmlns:a="http://schemas.openxmlformats.org/drawingml/2006/main">
-              <a:ext uri="{FF2B5EF4-FFF2-40B4-BE49-F238E27FC236}">
-                <a16:creationId xmlns:a16="http://schemas.microsoft.com/office/drawing/2014/main" id="{E6CF99CF-183F-4C08-BEC2-1E07A375098B}"/>
+          <p:cNvPr id="12" name="page-number">
+            <a:extLst xmlns:a="http://schemas.openxmlformats.org/drawingml/2006/main">
+              <a:ext uri="{FF2B5EF4-FFF2-40B4-BE49-F238E27FC236}">
+                <a16:creationId xmlns:a16="http://schemas.microsoft.com/office/drawing/2014/main" id="{95BD5639-B81C-4D06-8AF1-7A36E882AEC7}"/>
               </a:ext>
             </a:extLst>
           </p:cNvPr>
@@ -11665,7 +12650,7 @@
     </p:spTree>
     <p:extLst>
       <p:ext uri="{BB962C8B-B14F-4D97-AF65-F5344CB8AC3E}">
-        <p14:creationId xmlns:p14="http://schemas.microsoft.com/office/powerpoint/2010/main" val="806881453"/>
+        <p14:creationId xmlns:p14="http://schemas.microsoft.com/office/powerpoint/2010/main" val="127683214"/>
       </p:ext>
     </p:extLst>
   </p:cSld>
@@ -11693,10 +12678,10 @@
       </p:grpSpPr>
       <p:sp>
         <p:nvSpPr>
-          <p:cNvPr id="11" name="slide-title">
-            <a:extLst xmlns:a="http://schemas.openxmlformats.org/drawingml/2006/main">
-              <a:ext uri="{FF2B5EF4-FFF2-40B4-BE49-F238E27FC236}">
-                <a16:creationId xmlns:a16="http://schemas.microsoft.com/office/drawing/2014/main" id="{2EE7693B-9BD1-478C-952D-56F0A2B866AE}"/>
+          <p:cNvPr id="13" name="slide-title">
+            <a:extLst xmlns:a="http://schemas.openxmlformats.org/drawingml/2006/main">
+              <a:ext uri="{FF2B5EF4-FFF2-40B4-BE49-F238E27FC236}">
+                <a16:creationId xmlns:a16="http://schemas.microsoft.com/office/drawing/2014/main" id="{F1D1C882-561D-4ECE-8FD2-0A14D34EDBA1}"/>
               </a:ext>
             </a:extLst>
           </p:cNvPr>
@@ -11747,7 +12732,7 @@
           <p:cNvPr id="2" name="slide-subtitle">
             <a:extLst xmlns:a="http://schemas.openxmlformats.org/drawingml/2006/main">
               <a:ext uri="{FF2B5EF4-FFF2-40B4-BE49-F238E27FC236}">
-                <a16:creationId xmlns:a16="http://schemas.microsoft.com/office/drawing/2014/main" id="{9D06F306-C5AD-416A-A8C2-26C68660CAFC}"/>
+                <a16:creationId xmlns:a16="http://schemas.microsoft.com/office/drawing/2014/main" id="{C5EE9E8D-D742-424F-8E0C-5AADEA4F81C6}"/>
               </a:ext>
             </a:extLst>
           </p:cNvPr>
@@ -11798,7 +12783,7 @@
           <p:cNvPr id="3" name="bullets">
             <a:extLst xmlns:a="http://schemas.openxmlformats.org/drawingml/2006/main">
               <a:ext uri="{FF2B5EF4-FFF2-40B4-BE49-F238E27FC236}">
-                <a16:creationId xmlns:a16="http://schemas.microsoft.com/office/drawing/2014/main" id="{E58A4C78-A9B7-4969-B189-B07F362A154E}"/>
+                <a16:creationId xmlns:a16="http://schemas.microsoft.com/office/drawing/2014/main" id="{8D57DF1D-6799-47FD-A734-0D2617614FAA}"/>
               </a:ext>
             </a:extLst>
           </p:cNvPr>
@@ -11885,7 +12870,7 @@
           <p:cNvPr id="4" name="ambient-glow">
             <a:extLst xmlns:a="http://schemas.openxmlformats.org/drawingml/2006/main">
               <a:ext uri="{FF2B5EF4-FFF2-40B4-BE49-F238E27FC236}">
-                <a16:creationId xmlns:a16="http://schemas.microsoft.com/office/drawing/2014/main" id="{EA3056DA-8BEF-4E49-9DEF-A5374BCB750E}"/>
+                <a16:creationId xmlns:a16="http://schemas.microsoft.com/office/drawing/2014/main" id="{B85CBD64-2E46-4CF4-BFCB-326BE4D12A66}"/>
               </a:ext>
             </a:extLst>
           </p:cNvPr>
@@ -11922,7 +12907,7 @@
           <p:cNvPr id="5" name="ambient-core">
             <a:extLst xmlns:a="http://schemas.openxmlformats.org/drawingml/2006/main">
               <a:ext uri="{FF2B5EF4-FFF2-40B4-BE49-F238E27FC236}">
-                <a16:creationId xmlns:a16="http://schemas.microsoft.com/office/drawing/2014/main" id="{59504E62-56E5-4AD4-A446-B72D78125A89}"/>
+                <a16:creationId xmlns:a16="http://schemas.microsoft.com/office/drawing/2014/main" id="{66EB1866-66A8-400E-AF14-8C2E29B8580F}"/>
               </a:ext>
             </a:extLst>
           </p:cNvPr>
@@ -11959,7 +12944,7 @@
           <p:cNvPr id="6" name="section-number">
             <a:extLst xmlns:a="http://schemas.openxmlformats.org/drawingml/2006/main">
               <a:ext uri="{FF2B5EF4-FFF2-40B4-BE49-F238E27FC236}">
-                <a16:creationId xmlns:a16="http://schemas.microsoft.com/office/drawing/2014/main" id="{B4DE5E78-3020-4129-A828-63E4ECA58886}"/>
+                <a16:creationId xmlns:a16="http://schemas.microsoft.com/office/drawing/2014/main" id="{141EE2CB-2C44-4728-980A-614B5A63B9A6}"/>
               </a:ext>
             </a:extLst>
           </p:cNvPr>
@@ -12010,7 +12995,7 @@
           <p:cNvPr id="7" name="eyebrow">
             <a:extLst xmlns:a="http://schemas.openxmlformats.org/drawingml/2006/main">
               <a:ext uri="{FF2B5EF4-FFF2-40B4-BE49-F238E27FC236}">
-                <a16:creationId xmlns:a16="http://schemas.microsoft.com/office/drawing/2014/main" id="{60DC2A93-5744-4AFD-ADE9-AE11734C7EA4}"/>
+                <a16:creationId xmlns:a16="http://schemas.microsoft.com/office/drawing/2014/main" id="{0E89B9BC-8067-47A0-8DEF-236B9670C072}"/>
               </a:ext>
             </a:extLst>
           </p:cNvPr>
@@ -12058,10 +13043,69 @@
       </p:sp>
       <p:sp>
         <p:nvSpPr>
-          <p:cNvPr id="8" name="footer-rule">
-            <a:extLst xmlns:a="http://schemas.openxmlformats.org/drawingml/2006/main">
-              <a:ext uri="{FF2B5EF4-FFF2-40B4-BE49-F238E27FC236}">
-                <a16:creationId xmlns:a16="http://schemas.microsoft.com/office/drawing/2014/main" id="{8BDA4931-C705-4466-9C2F-67B9C5A170FF}"/>
+          <p:cNvPr id="8" name="rescue-point-logo-background">
+            <a:extLst xmlns:a="http://schemas.openxmlformats.org/drawingml/2006/main">
+              <a:ext uri="{FF2B5EF4-FFF2-40B4-BE49-F238E27FC236}">
+                <a16:creationId xmlns:a16="http://schemas.microsoft.com/office/drawing/2014/main" id="{C5C5139D-5838-4EBB-A17B-FC98AD5BDA1E}"/>
+              </a:ext>
+            </a:extLst>
+          </p:cNvPr>
+          <p:cNvSpPr>
+            <a:spLocks xmlns:a="http://schemas.openxmlformats.org/drawingml/2006/main" noGrp="1"/>
+          </p:cNvSpPr>
+          <p:nvPr/>
+        </p:nvSpPr>
+        <p:spPr>
+          <a:xfrm xmlns:a="http://schemas.openxmlformats.org/drawingml/2006/main">
+            <a:off x="9772650" y="133350"/>
+            <a:ext cx="1733550" cy="457200"/>
+          </a:xfrm>
+          <a:prstGeom xmlns:a="http://schemas.openxmlformats.org/drawingml/2006/main" prst="roundRect">
+            <a:avLst>
+              <a:gd name="adj" fmla="val 16667"/>
+            </a:avLst>
+          </a:prstGeom>
+          <a:solidFill xmlns:a="http://schemas.openxmlformats.org/drawingml/2006/main">
+            <a:srgbClr val="06142E"/>
+          </a:solidFill>
+          <a:ln xmlns:a="http://schemas.openxmlformats.org/drawingml/2006/main" w="9525">
+            <a:solidFill>
+              <a:srgbClr val="1EC5FF">
+                <a:alpha val="33333"/>
+              </a:srgbClr>
+            </a:solidFill>
+            <a:prstDash val="solid"/>
+          </a:ln>
+        </p:spPr>
+      </p:sp>
+      <p:pic>
+        <p:nvPicPr>
+          <p:cNvPr id="23" name="" descr="Figura oficial da documentação dbt usada para explicar: state:modified encontra a mudança — O sufixo + inclui descendentes que podem ser afetados.."/>
+          <p:cNvPicPr>
+            <a:picLocks xmlns:a="http://schemas.openxmlformats.org/drawingml/2006/main" noChangeAspect="1"/>
+          </p:cNvPicPr>
+          <p:nvPr/>
+        </p:nvPicPr>
+        <p:blipFill>
+          <a:blip xmlns:r="http://schemas.openxmlformats.org/officeDocument/2006/relationships" xmlns:a="http://schemas.openxmlformats.org/drawingml/2006/main" r:embed="R6c2f4b0eaf004801"/>
+          <a:stretch xmlns:a="http://schemas.openxmlformats.org/drawingml/2006/main"/>
+        </p:blipFill>
+        <p:spPr>
+          <a:xfrm xmlns:a="http://schemas.openxmlformats.org/drawingml/2006/main">
+            <a:off x="9893718" y="209550"/>
+            <a:ext cx="1491414" cy="323850"/>
+          </a:xfrm>
+          <a:prstGeom xmlns:a="http://schemas.openxmlformats.org/drawingml/2006/main" prst="rect">
+            <a:avLst/>
+          </a:prstGeom>
+        </p:spPr>
+      </p:pic>
+      <p:sp>
+        <p:nvSpPr>
+          <p:cNvPr id="10" name="footer-rule">
+            <a:extLst xmlns:a="http://schemas.openxmlformats.org/drawingml/2006/main">
+              <a:ext uri="{FF2B5EF4-FFF2-40B4-BE49-F238E27FC236}">
+                <a16:creationId xmlns:a16="http://schemas.microsoft.com/office/drawing/2014/main" id="{DA80C0BF-7774-4936-B043-D43578632429}"/>
               </a:ext>
             </a:extLst>
           </p:cNvPr>
@@ -12091,10 +13135,10 @@
       </p:sp>
       <p:sp>
         <p:nvSpPr>
-          <p:cNvPr id="9" name="footer">
-            <a:extLst xmlns:a="http://schemas.openxmlformats.org/drawingml/2006/main">
-              <a:ext uri="{FF2B5EF4-FFF2-40B4-BE49-F238E27FC236}">
-                <a16:creationId xmlns:a16="http://schemas.microsoft.com/office/drawing/2014/main" id="{9B44B242-5CF4-4544-8753-ED515A60221C}"/>
+          <p:cNvPr id="11" name="footer">
+            <a:extLst xmlns:a="http://schemas.openxmlformats.org/drawingml/2006/main">
+              <a:ext uri="{FF2B5EF4-FFF2-40B4-BE49-F238E27FC236}">
+                <a16:creationId xmlns:a16="http://schemas.microsoft.com/office/drawing/2014/main" id="{72BBCF22-16F7-440D-B33E-BC0579E7CA90}"/>
               </a:ext>
             </a:extLst>
           </p:cNvPr>
@@ -12146,10 +13190,10 @@
       </p:sp>
       <p:sp>
         <p:nvSpPr>
-          <p:cNvPr id="10" name="page-number">
-            <a:extLst xmlns:a="http://schemas.openxmlformats.org/drawingml/2006/main">
-              <a:ext uri="{FF2B5EF4-FFF2-40B4-BE49-F238E27FC236}">
-                <a16:creationId xmlns:a16="http://schemas.microsoft.com/office/drawing/2014/main" id="{2BEA2418-CA5E-4C02-8228-C627FAC35825}"/>
+          <p:cNvPr id="12" name="page-number">
+            <a:extLst xmlns:a="http://schemas.openxmlformats.org/drawingml/2006/main">
+              <a:ext uri="{FF2B5EF4-FFF2-40B4-BE49-F238E27FC236}">
+                <a16:creationId xmlns:a16="http://schemas.microsoft.com/office/drawing/2014/main" id="{D0FA908E-AD7D-4966-852A-E7309AD98047}"/>
               </a:ext>
             </a:extLst>
           </p:cNvPr>
@@ -12202,7 +13246,7 @@
     </p:spTree>
     <p:extLst>
       <p:ext uri="{BB962C8B-B14F-4D97-AF65-F5344CB8AC3E}">
-        <p14:creationId xmlns:p14="http://schemas.microsoft.com/office/powerpoint/2010/main" val="1558168550"/>
+        <p14:creationId xmlns:p14="http://schemas.microsoft.com/office/powerpoint/2010/main" val="1228757313"/>
       </p:ext>
     </p:extLst>
   </p:cSld>
@@ -12238,10 +13282,10 @@
       </p:grpSpPr>
       <p:sp>
         <p:nvSpPr>
-          <p:cNvPr id="13" name="slide-title">
-            <a:extLst xmlns:a="http://schemas.openxmlformats.org/drawingml/2006/main">
-              <a:ext uri="{FF2B5EF4-FFF2-40B4-BE49-F238E27FC236}">
-                <a16:creationId xmlns:a16="http://schemas.microsoft.com/office/drawing/2014/main" id="{80B82620-D839-4417-962F-8C2FD7C58431}"/>
+          <p:cNvPr id="15" name="slide-title">
+            <a:extLst xmlns:a="http://schemas.openxmlformats.org/drawingml/2006/main">
+              <a:ext uri="{FF2B5EF4-FFF2-40B4-BE49-F238E27FC236}">
+                <a16:creationId xmlns:a16="http://schemas.microsoft.com/office/drawing/2014/main" id="{5A4C600C-A900-489D-BC23-7562EA79AB49}"/>
               </a:ext>
             </a:extLst>
           </p:cNvPr>
@@ -12292,7 +13336,7 @@
           <p:cNvPr id="2" name="flow-1">
             <a:extLst xmlns:a="http://schemas.openxmlformats.org/drawingml/2006/main">
               <a:ext uri="{FF2B5EF4-FFF2-40B4-BE49-F238E27FC236}">
-                <a16:creationId xmlns:a16="http://schemas.microsoft.com/office/drawing/2014/main" id="{F14AF267-4CCF-4DD2-B2C5-D39AB319553F}"/>
+                <a16:creationId xmlns:a16="http://schemas.microsoft.com/office/drawing/2014/main" id="{B6AC3B74-7687-4503-888F-42E414194693}"/>
               </a:ext>
             </a:extLst>
           </p:cNvPr>
@@ -12349,7 +13393,7 @@
           <p:cNvPr id="3" name="flow-2">
             <a:extLst xmlns:a="http://schemas.openxmlformats.org/drawingml/2006/main">
               <a:ext uri="{FF2B5EF4-FFF2-40B4-BE49-F238E27FC236}">
-                <a16:creationId xmlns:a16="http://schemas.microsoft.com/office/drawing/2014/main" id="{347C43E8-7919-443A-98EC-B2B36BD9D71D}"/>
+                <a16:creationId xmlns:a16="http://schemas.microsoft.com/office/drawing/2014/main" id="{5989CB82-4CF9-425F-BE75-E2D0CC02AC8C}"/>
               </a:ext>
             </a:extLst>
           </p:cNvPr>
@@ -12406,7 +13450,7 @@
           <p:cNvPr id="4" name="flow-3">
             <a:extLst xmlns:a="http://schemas.openxmlformats.org/drawingml/2006/main">
               <a:ext uri="{FF2B5EF4-FFF2-40B4-BE49-F238E27FC236}">
-                <a16:creationId xmlns:a16="http://schemas.microsoft.com/office/drawing/2014/main" id="{26198295-969E-41B9-9467-2364124EBD61}"/>
+                <a16:creationId xmlns:a16="http://schemas.microsoft.com/office/drawing/2014/main" id="{22DD7EB2-7151-4B2C-AEA3-B3E6CFBB5023}"/>
               </a:ext>
             </a:extLst>
           </p:cNvPr>
@@ -12463,7 +13507,7 @@
           <p:cNvPr id="5" name="flow-4">
             <a:extLst xmlns:a="http://schemas.openxmlformats.org/drawingml/2006/main">
               <a:ext uri="{FF2B5EF4-FFF2-40B4-BE49-F238E27FC236}">
-                <a16:creationId xmlns:a16="http://schemas.microsoft.com/office/drawing/2014/main" id="{5EC59CFE-34B7-4DCC-8143-B633781A2F70}"/>
+                <a16:creationId xmlns:a16="http://schemas.microsoft.com/office/drawing/2014/main" id="{E9CDD928-806D-425D-A5CC-56245E2F9B50}"/>
               </a:ext>
             </a:extLst>
           </p:cNvPr>
@@ -12517,7 +13561,7 @@
       </p:sp>
       <p:cxnSp>
         <p:nvCxnSpPr>
-          <p:cNvPr id="26" name=""/>
+          <p:cNvPr id="29" name=""/>
           <p:cNvCxnSpPr>
             <a:stCxn xmlns:a="http://schemas.openxmlformats.org/drawingml/2006/main" id="2" idx="3"/>
             <a:endCxn xmlns:a="http://schemas.openxmlformats.org/drawingml/2006/main" id="3" idx="1"/>
@@ -12543,7 +13587,7 @@
       </p:cxnSp>
       <p:cxnSp>
         <p:nvCxnSpPr>
-          <p:cNvPr id="27" name=""/>
+          <p:cNvPr id="30" name=""/>
           <p:cNvCxnSpPr>
             <a:stCxn xmlns:a="http://schemas.openxmlformats.org/drawingml/2006/main" id="3" idx="3"/>
             <a:endCxn xmlns:a="http://schemas.openxmlformats.org/drawingml/2006/main" id="4" idx="1"/>
@@ -12569,7 +13613,7 @@
       </p:cxnSp>
       <p:cxnSp>
         <p:nvCxnSpPr>
-          <p:cNvPr id="28" name=""/>
+          <p:cNvPr id="31" name=""/>
           <p:cNvCxnSpPr>
             <a:stCxn xmlns:a="http://schemas.openxmlformats.org/drawingml/2006/main" id="4" idx="3"/>
             <a:endCxn xmlns:a="http://schemas.openxmlformats.org/drawingml/2006/main" id="5" idx="1"/>
@@ -12598,7 +13642,7 @@
           <p:cNvPr id="9" name="eyebrow">
             <a:extLst xmlns:a="http://schemas.openxmlformats.org/drawingml/2006/main">
               <a:ext uri="{FF2B5EF4-FFF2-40B4-BE49-F238E27FC236}">
-                <a16:creationId xmlns:a16="http://schemas.microsoft.com/office/drawing/2014/main" id="{39F97F57-6B83-4B36-8CF6-63F3814344D9}"/>
+                <a16:creationId xmlns:a16="http://schemas.microsoft.com/office/drawing/2014/main" id="{FB9DE61A-E354-495A-967F-D9B54364910F}"/>
               </a:ext>
             </a:extLst>
           </p:cNvPr>
@@ -12646,10 +13690,69 @@
       </p:sp>
       <p:sp>
         <p:nvSpPr>
-          <p:cNvPr id="10" name="footer-rule">
-            <a:extLst xmlns:a="http://schemas.openxmlformats.org/drawingml/2006/main">
-              <a:ext uri="{FF2B5EF4-FFF2-40B4-BE49-F238E27FC236}">
-                <a16:creationId xmlns:a16="http://schemas.microsoft.com/office/drawing/2014/main" id="{7A10ABF4-00E9-41CA-B067-84BBE3F154D1}"/>
+          <p:cNvPr id="10" name="rescue-point-logo-background">
+            <a:extLst xmlns:a="http://schemas.openxmlformats.org/drawingml/2006/main">
+              <a:ext uri="{FF2B5EF4-FFF2-40B4-BE49-F238E27FC236}">
+                <a16:creationId xmlns:a16="http://schemas.microsoft.com/office/drawing/2014/main" id="{9256B420-7AF6-43CC-9167-940AEB2CECF2}"/>
+              </a:ext>
+            </a:extLst>
+          </p:cNvPr>
+          <p:cNvSpPr>
+            <a:spLocks xmlns:a="http://schemas.openxmlformats.org/drawingml/2006/main" noGrp="1"/>
+          </p:cNvSpPr>
+          <p:nvPr/>
+        </p:nvSpPr>
+        <p:spPr>
+          <a:xfrm xmlns:a="http://schemas.openxmlformats.org/drawingml/2006/main">
+            <a:off x="9772650" y="133350"/>
+            <a:ext cx="1733550" cy="457200"/>
+          </a:xfrm>
+          <a:prstGeom xmlns:a="http://schemas.openxmlformats.org/drawingml/2006/main" prst="roundRect">
+            <a:avLst>
+              <a:gd name="adj" fmla="val 16667"/>
+            </a:avLst>
+          </a:prstGeom>
+          <a:solidFill xmlns:a="http://schemas.openxmlformats.org/drawingml/2006/main">
+            <a:srgbClr val="06142E"/>
+          </a:solidFill>
+          <a:ln xmlns:a="http://schemas.openxmlformats.org/drawingml/2006/main" w="9525">
+            <a:solidFill>
+              <a:srgbClr val="1EC5FF">
+                <a:alpha val="33333"/>
+              </a:srgbClr>
+            </a:solidFill>
+            <a:prstDash val="solid"/>
+          </a:ln>
+        </p:spPr>
+      </p:sp>
+      <p:pic>
+        <p:nvPicPr>
+          <p:cNvPr id="34" name="" descr="Figura oficial da documentação dbt usada para explicar: state:modified encontra a mudança — Mudou."/>
+          <p:cNvPicPr>
+            <a:picLocks xmlns:a="http://schemas.openxmlformats.org/drawingml/2006/main" noChangeAspect="1"/>
+          </p:cNvPicPr>
+          <p:nvPr/>
+        </p:nvPicPr>
+        <p:blipFill>
+          <a:blip xmlns:r="http://schemas.openxmlformats.org/officeDocument/2006/relationships" xmlns:a="http://schemas.openxmlformats.org/drawingml/2006/main" r:embed="R5d029626e4324634"/>
+          <a:stretch xmlns:a="http://schemas.openxmlformats.org/drawingml/2006/main"/>
+        </p:blipFill>
+        <p:spPr>
+          <a:xfrm xmlns:a="http://schemas.openxmlformats.org/drawingml/2006/main">
+            <a:off x="9893718" y="209550"/>
+            <a:ext cx="1491414" cy="323850"/>
+          </a:xfrm>
+          <a:prstGeom xmlns:a="http://schemas.openxmlformats.org/drawingml/2006/main" prst="rect">
+            <a:avLst/>
+          </a:prstGeom>
+        </p:spPr>
+      </p:pic>
+      <p:sp>
+        <p:nvSpPr>
+          <p:cNvPr id="12" name="footer-rule">
+            <a:extLst xmlns:a="http://schemas.openxmlformats.org/drawingml/2006/main">
+              <a:ext uri="{FF2B5EF4-FFF2-40B4-BE49-F238E27FC236}">
+                <a16:creationId xmlns:a16="http://schemas.microsoft.com/office/drawing/2014/main" id="{F0327BBE-CF01-4616-9BBB-866E5BB590DD}"/>
               </a:ext>
             </a:extLst>
           </p:cNvPr>
@@ -12679,10 +13782,10 @@
       </p:sp>
       <p:sp>
         <p:nvSpPr>
-          <p:cNvPr id="11" name="footer">
-            <a:extLst xmlns:a="http://schemas.openxmlformats.org/drawingml/2006/main">
-              <a:ext uri="{FF2B5EF4-FFF2-40B4-BE49-F238E27FC236}">
-                <a16:creationId xmlns:a16="http://schemas.microsoft.com/office/drawing/2014/main" id="{72A1076F-3FD8-45FB-B1E1-A79B8721B7F9}"/>
+          <p:cNvPr id="13" name="footer">
+            <a:extLst xmlns:a="http://schemas.openxmlformats.org/drawingml/2006/main">
+              <a:ext uri="{FF2B5EF4-FFF2-40B4-BE49-F238E27FC236}">
+                <a16:creationId xmlns:a16="http://schemas.microsoft.com/office/drawing/2014/main" id="{DE4A993C-137F-4B56-A800-518CD6D75A9E}"/>
               </a:ext>
             </a:extLst>
           </p:cNvPr>
@@ -12734,10 +13837,10 @@
       </p:sp>
       <p:sp>
         <p:nvSpPr>
-          <p:cNvPr id="12" name="page-number">
-            <a:extLst xmlns:a="http://schemas.openxmlformats.org/drawingml/2006/main">
-              <a:ext uri="{FF2B5EF4-FFF2-40B4-BE49-F238E27FC236}">
-                <a16:creationId xmlns:a16="http://schemas.microsoft.com/office/drawing/2014/main" id="{FB2D6637-BCD5-4023-8364-4541916BA99E}"/>
+          <p:cNvPr id="14" name="page-number">
+            <a:extLst xmlns:a="http://schemas.openxmlformats.org/drawingml/2006/main">
+              <a:ext uri="{FF2B5EF4-FFF2-40B4-BE49-F238E27FC236}">
+                <a16:creationId xmlns:a16="http://schemas.microsoft.com/office/drawing/2014/main" id="{DD2E959B-2B92-42FC-89A4-4A1B1FEFBCE7}"/>
               </a:ext>
             </a:extLst>
           </p:cNvPr>
@@ -12790,7 +13893,7 @@
     </p:spTree>
     <p:extLst>
       <p:ext uri="{BB962C8B-B14F-4D97-AF65-F5344CB8AC3E}">
-        <p14:creationId xmlns:p14="http://schemas.microsoft.com/office/powerpoint/2010/main" val="2102791970"/>
+        <p14:creationId xmlns:p14="http://schemas.microsoft.com/office/powerpoint/2010/main" val="908613360"/>
       </p:ext>
     </p:extLst>
   </p:cSld>
@@ -12826,10 +13929,10 @@
       </p:grpSpPr>
       <p:sp>
         <p:nvSpPr>
-          <p:cNvPr id="11" name="slide-title">
-            <a:extLst xmlns:a="http://schemas.openxmlformats.org/drawingml/2006/main">
-              <a:ext uri="{FF2B5EF4-FFF2-40B4-BE49-F238E27FC236}">
-                <a16:creationId xmlns:a16="http://schemas.microsoft.com/office/drawing/2014/main" id="{23C47070-69ED-443A-AA40-A89ABC21C52A}"/>
+          <p:cNvPr id="13" name="slide-title">
+            <a:extLst xmlns:a="http://schemas.openxmlformats.org/drawingml/2006/main">
+              <a:ext uri="{FF2B5EF4-FFF2-40B4-BE49-F238E27FC236}">
+                <a16:creationId xmlns:a16="http://schemas.microsoft.com/office/drawing/2014/main" id="{E0C1DD14-87BC-4B31-8FB1-9DB0224FFEA5}"/>
               </a:ext>
             </a:extLst>
           </p:cNvPr>
@@ -12880,7 +13983,7 @@
           <p:cNvPr id="2" name="slide-subtitle">
             <a:extLst xmlns:a="http://schemas.openxmlformats.org/drawingml/2006/main">
               <a:ext uri="{FF2B5EF4-FFF2-40B4-BE49-F238E27FC236}">
-                <a16:creationId xmlns:a16="http://schemas.microsoft.com/office/drawing/2014/main" id="{9C02464E-5C61-48DE-A602-F2539452C48F}"/>
+                <a16:creationId xmlns:a16="http://schemas.microsoft.com/office/drawing/2014/main" id="{1E86FBF7-B8DA-44B5-97BB-12E11C600D67}"/>
               </a:ext>
             </a:extLst>
           </p:cNvPr>
@@ -12931,7 +14034,7 @@
           <p:cNvPr id="3" name="bullets">
             <a:extLst xmlns:a="http://schemas.openxmlformats.org/drawingml/2006/main">
               <a:ext uri="{FF2B5EF4-FFF2-40B4-BE49-F238E27FC236}">
-                <a16:creationId xmlns:a16="http://schemas.microsoft.com/office/drawing/2014/main" id="{A2A00ED6-C568-450B-A9F2-9ADF5EFFA5BF}"/>
+                <a16:creationId xmlns:a16="http://schemas.microsoft.com/office/drawing/2014/main" id="{6A719B2A-B83F-4585-9182-260B1E830E44}"/>
               </a:ext>
             </a:extLst>
           </p:cNvPr>
@@ -13018,7 +14121,7 @@
           <p:cNvPr id="4" name="ambient-glow">
             <a:extLst xmlns:a="http://schemas.openxmlformats.org/drawingml/2006/main">
               <a:ext uri="{FF2B5EF4-FFF2-40B4-BE49-F238E27FC236}">
-                <a16:creationId xmlns:a16="http://schemas.microsoft.com/office/drawing/2014/main" id="{5A16B45D-EBD7-4432-A550-51660BDAD9EF}"/>
+                <a16:creationId xmlns:a16="http://schemas.microsoft.com/office/drawing/2014/main" id="{305A4682-899B-42E4-9FBC-A93038702B25}"/>
               </a:ext>
             </a:extLst>
           </p:cNvPr>
@@ -13055,7 +14158,7 @@
           <p:cNvPr id="5" name="ambient-core">
             <a:extLst xmlns:a="http://schemas.openxmlformats.org/drawingml/2006/main">
               <a:ext uri="{FF2B5EF4-FFF2-40B4-BE49-F238E27FC236}">
-                <a16:creationId xmlns:a16="http://schemas.microsoft.com/office/drawing/2014/main" id="{6B2713AE-C297-45CB-8EFD-A7007A686857}"/>
+                <a16:creationId xmlns:a16="http://schemas.microsoft.com/office/drawing/2014/main" id="{17FD995D-ADB1-464F-8D2F-D790828C5912}"/>
               </a:ext>
             </a:extLst>
           </p:cNvPr>
@@ -13092,7 +14195,7 @@
           <p:cNvPr id="6" name="section-number">
             <a:extLst xmlns:a="http://schemas.openxmlformats.org/drawingml/2006/main">
               <a:ext uri="{FF2B5EF4-FFF2-40B4-BE49-F238E27FC236}">
-                <a16:creationId xmlns:a16="http://schemas.microsoft.com/office/drawing/2014/main" id="{6E1FEDDD-9C18-4A32-9890-256612B278DC}"/>
+                <a16:creationId xmlns:a16="http://schemas.microsoft.com/office/drawing/2014/main" id="{848B2DA6-7834-4ADD-87DC-7F2F5BB572DF}"/>
               </a:ext>
             </a:extLst>
           </p:cNvPr>
@@ -13143,7 +14246,7 @@
           <p:cNvPr id="7" name="eyebrow">
             <a:extLst xmlns:a="http://schemas.openxmlformats.org/drawingml/2006/main">
               <a:ext uri="{FF2B5EF4-FFF2-40B4-BE49-F238E27FC236}">
-                <a16:creationId xmlns:a16="http://schemas.microsoft.com/office/drawing/2014/main" id="{FC50BFC2-4A9D-4ADF-8E95-876FC00C194D}"/>
+                <a16:creationId xmlns:a16="http://schemas.microsoft.com/office/drawing/2014/main" id="{F62B09C4-1B92-4C3C-A861-AB7E2D90AAB1}"/>
               </a:ext>
             </a:extLst>
           </p:cNvPr>
@@ -13191,10 +14294,69 @@
       </p:sp>
       <p:sp>
         <p:nvSpPr>
-          <p:cNvPr id="8" name="footer-rule">
-            <a:extLst xmlns:a="http://schemas.openxmlformats.org/drawingml/2006/main">
-              <a:ext uri="{FF2B5EF4-FFF2-40B4-BE49-F238E27FC236}">
-                <a16:creationId xmlns:a16="http://schemas.microsoft.com/office/drawing/2014/main" id="{12D6AB4E-E423-4E8C-9617-1AB4B8591478}"/>
+          <p:cNvPr id="8" name="rescue-point-logo-background">
+            <a:extLst xmlns:a="http://schemas.openxmlformats.org/drawingml/2006/main">
+              <a:ext uri="{FF2B5EF4-FFF2-40B4-BE49-F238E27FC236}">
+                <a16:creationId xmlns:a16="http://schemas.microsoft.com/office/drawing/2014/main" id="{F114E105-252D-472B-9C55-69AB031A353A}"/>
+              </a:ext>
+            </a:extLst>
+          </p:cNvPr>
+          <p:cNvSpPr>
+            <a:spLocks xmlns:a="http://schemas.openxmlformats.org/drawingml/2006/main" noGrp="1"/>
+          </p:cNvSpPr>
+          <p:nvPr/>
+        </p:nvSpPr>
+        <p:spPr>
+          <a:xfrm xmlns:a="http://schemas.openxmlformats.org/drawingml/2006/main">
+            <a:off x="9772650" y="133350"/>
+            <a:ext cx="1733550" cy="457200"/>
+          </a:xfrm>
+          <a:prstGeom xmlns:a="http://schemas.openxmlformats.org/drawingml/2006/main" prst="roundRect">
+            <a:avLst>
+              <a:gd name="adj" fmla="val 16667"/>
+            </a:avLst>
+          </a:prstGeom>
+          <a:solidFill xmlns:a="http://schemas.openxmlformats.org/drawingml/2006/main">
+            <a:srgbClr val="06142E"/>
+          </a:solidFill>
+          <a:ln xmlns:a="http://schemas.openxmlformats.org/drawingml/2006/main" w="9525">
+            <a:solidFill>
+              <a:srgbClr val="1EC5FF">
+                <a:alpha val="33333"/>
+              </a:srgbClr>
+            </a:solidFill>
+            <a:prstDash val="solid"/>
+          </a:ln>
+        </p:spPr>
+      </p:sp>
+      <p:pic>
+        <p:nvPicPr>
+          <p:cNvPr id="23" name="" descr="Figura oficial da documentação dbt usada para explicar: Seleção mínima ingênua perde risco — Testar apenas o arquivo alterado pode ignorar contratos e consumidores.."/>
+          <p:cNvPicPr>
+            <a:picLocks xmlns:a="http://schemas.openxmlformats.org/drawingml/2006/main" noChangeAspect="1"/>
+          </p:cNvPicPr>
+          <p:nvPr/>
+        </p:nvPicPr>
+        <p:blipFill>
+          <a:blip xmlns:r="http://schemas.openxmlformats.org/officeDocument/2006/relationships" xmlns:a="http://schemas.openxmlformats.org/drawingml/2006/main" r:embed="R4ee3d52dbc3b4f30"/>
+          <a:stretch xmlns:a="http://schemas.openxmlformats.org/drawingml/2006/main"/>
+        </p:blipFill>
+        <p:spPr>
+          <a:xfrm xmlns:a="http://schemas.openxmlformats.org/drawingml/2006/main">
+            <a:off x="9893718" y="209550"/>
+            <a:ext cx="1491414" cy="323850"/>
+          </a:xfrm>
+          <a:prstGeom xmlns:a="http://schemas.openxmlformats.org/drawingml/2006/main" prst="rect">
+            <a:avLst/>
+          </a:prstGeom>
+        </p:spPr>
+      </p:pic>
+      <p:sp>
+        <p:nvSpPr>
+          <p:cNvPr id="10" name="footer-rule">
+            <a:extLst xmlns:a="http://schemas.openxmlformats.org/drawingml/2006/main">
+              <a:ext uri="{FF2B5EF4-FFF2-40B4-BE49-F238E27FC236}">
+                <a16:creationId xmlns:a16="http://schemas.microsoft.com/office/drawing/2014/main" id="{2C7E21A1-5187-4CEC-9896-578DDF31020D}"/>
               </a:ext>
             </a:extLst>
           </p:cNvPr>
@@ -13224,10 +14386,10 @@
       </p:sp>
       <p:sp>
         <p:nvSpPr>
-          <p:cNvPr id="9" name="footer">
-            <a:extLst xmlns:a="http://schemas.openxmlformats.org/drawingml/2006/main">
-              <a:ext uri="{FF2B5EF4-FFF2-40B4-BE49-F238E27FC236}">
-                <a16:creationId xmlns:a16="http://schemas.microsoft.com/office/drawing/2014/main" id="{EA288940-A9DE-4808-AD22-8CAF97B678C8}"/>
+          <p:cNvPr id="11" name="footer">
+            <a:extLst xmlns:a="http://schemas.openxmlformats.org/drawingml/2006/main">
+              <a:ext uri="{FF2B5EF4-FFF2-40B4-BE49-F238E27FC236}">
+                <a16:creationId xmlns:a16="http://schemas.microsoft.com/office/drawing/2014/main" id="{61363E94-DB89-4316-A7EC-11F5512728AD}"/>
               </a:ext>
             </a:extLst>
           </p:cNvPr>
@@ -13279,10 +14441,10 @@
       </p:sp>
       <p:sp>
         <p:nvSpPr>
-          <p:cNvPr id="10" name="page-number">
-            <a:extLst xmlns:a="http://schemas.openxmlformats.org/drawingml/2006/main">
-              <a:ext uri="{FF2B5EF4-FFF2-40B4-BE49-F238E27FC236}">
-                <a16:creationId xmlns:a16="http://schemas.microsoft.com/office/drawing/2014/main" id="{B79F5833-BA55-4E22-AE2A-BA071745E937}"/>
+          <p:cNvPr id="12" name="page-number">
+            <a:extLst xmlns:a="http://schemas.openxmlformats.org/drawingml/2006/main">
+              <a:ext uri="{FF2B5EF4-FFF2-40B4-BE49-F238E27FC236}">
+                <a16:creationId xmlns:a16="http://schemas.microsoft.com/office/drawing/2014/main" id="{AD6FEEF9-A617-4581-999D-92100AF0B1B3}"/>
               </a:ext>
             </a:extLst>
           </p:cNvPr>
@@ -13335,7 +14497,7 @@
     </p:spTree>
     <p:extLst>
       <p:ext uri="{BB962C8B-B14F-4D97-AF65-F5344CB8AC3E}">
-        <p14:creationId xmlns:p14="http://schemas.microsoft.com/office/powerpoint/2010/main" val="7192643"/>
+        <p14:creationId xmlns:p14="http://schemas.microsoft.com/office/powerpoint/2010/main" val="2034022411"/>
       </p:ext>
     </p:extLst>
   </p:cSld>
@@ -13363,10 +14525,10 @@
       </p:grpSpPr>
       <p:sp>
         <p:nvSpPr>
-          <p:cNvPr id="11" name="slide-title">
-            <a:extLst xmlns:a="http://schemas.openxmlformats.org/drawingml/2006/main">
-              <a:ext uri="{FF2B5EF4-FFF2-40B4-BE49-F238E27FC236}">
-                <a16:creationId xmlns:a16="http://schemas.microsoft.com/office/drawing/2014/main" id="{45C9A645-7DAA-4032-A4FE-2F4D4A842DB6}"/>
+          <p:cNvPr id="13" name="slide-title">
+            <a:extLst xmlns:a="http://schemas.openxmlformats.org/drawingml/2006/main">
+              <a:ext uri="{FF2B5EF4-FFF2-40B4-BE49-F238E27FC236}">
+                <a16:creationId xmlns:a16="http://schemas.microsoft.com/office/drawing/2014/main" id="{0E4FDC92-C076-4B5E-B2CF-6B24BE205F6B}"/>
               </a:ext>
             </a:extLst>
           </p:cNvPr>
@@ -13417,7 +14579,7 @@
           <p:cNvPr id="2" name="compare-left-title">
             <a:extLst xmlns:a="http://schemas.openxmlformats.org/drawingml/2006/main">
               <a:ext uri="{FF2B5EF4-FFF2-40B4-BE49-F238E27FC236}">
-                <a16:creationId xmlns:a16="http://schemas.microsoft.com/office/drawing/2014/main" id="{F450DDEE-D3D9-43FE-BC14-FD8DEB09BA79}"/>
+                <a16:creationId xmlns:a16="http://schemas.microsoft.com/office/drawing/2014/main" id="{F2CB06A6-C3B8-4FFF-BC05-460A9EA36A20}"/>
               </a:ext>
             </a:extLst>
           </p:cNvPr>
@@ -13468,7 +14630,7 @@
           <p:cNvPr id="3" name="compare-right-title">
             <a:extLst xmlns:a="http://schemas.openxmlformats.org/drawingml/2006/main">
               <a:ext uri="{FF2B5EF4-FFF2-40B4-BE49-F238E27FC236}">
-                <a16:creationId xmlns:a16="http://schemas.microsoft.com/office/drawing/2014/main" id="{82176D22-B9D4-4264-B2F7-C7C0CF465BF9}"/>
+                <a16:creationId xmlns:a16="http://schemas.microsoft.com/office/drawing/2014/main" id="{4AB68357-4B5A-4D9E-84C2-BF058131C344}"/>
               </a:ext>
             </a:extLst>
           </p:cNvPr>
@@ -13519,7 +14681,7 @@
           <p:cNvPr id="4" name="compare-divider">
             <a:extLst xmlns:a="http://schemas.openxmlformats.org/drawingml/2006/main">
               <a:ext uri="{FF2B5EF4-FFF2-40B4-BE49-F238E27FC236}">
-                <a16:creationId xmlns:a16="http://schemas.microsoft.com/office/drawing/2014/main" id="{26A8B50D-95AB-4C39-A943-52271A623BFD}"/>
+                <a16:creationId xmlns:a16="http://schemas.microsoft.com/office/drawing/2014/main" id="{45C3BFCB-2A32-4379-BFB4-E0E4D1327222}"/>
               </a:ext>
             </a:extLst>
           </p:cNvPr>
@@ -13550,7 +14712,7 @@
           <p:cNvPr id="5" name="bullets">
             <a:extLst xmlns:a="http://schemas.openxmlformats.org/drawingml/2006/main">
               <a:ext uri="{FF2B5EF4-FFF2-40B4-BE49-F238E27FC236}">
-                <a16:creationId xmlns:a16="http://schemas.microsoft.com/office/drawing/2014/main" id="{180A70F2-0373-48D8-9AA5-CE5314ACD071}"/>
+                <a16:creationId xmlns:a16="http://schemas.microsoft.com/office/drawing/2014/main" id="{CF8FF3A4-6034-4F3C-B449-2899A60741A6}"/>
               </a:ext>
             </a:extLst>
           </p:cNvPr>
@@ -13619,7 +14781,7 @@
           <p:cNvPr id="6" name="bullets">
             <a:extLst xmlns:a="http://schemas.openxmlformats.org/drawingml/2006/main">
               <a:ext uri="{FF2B5EF4-FFF2-40B4-BE49-F238E27FC236}">
-                <a16:creationId xmlns:a16="http://schemas.microsoft.com/office/drawing/2014/main" id="{2167E8F6-4B1E-4AF7-8AB3-EED3B91FD2AE}"/>
+                <a16:creationId xmlns:a16="http://schemas.microsoft.com/office/drawing/2014/main" id="{0A510A7E-F812-4D85-A367-CF42E4FEC3C5}"/>
               </a:ext>
             </a:extLst>
           </p:cNvPr>
@@ -13670,7 +14832,7 @@
           <p:cNvPr id="7" name="eyebrow">
             <a:extLst xmlns:a="http://schemas.openxmlformats.org/drawingml/2006/main">
               <a:ext uri="{FF2B5EF4-FFF2-40B4-BE49-F238E27FC236}">
-                <a16:creationId xmlns:a16="http://schemas.microsoft.com/office/drawing/2014/main" id="{B9C5F443-3C6F-4422-B4F8-7CB5E29A3434}"/>
+                <a16:creationId xmlns:a16="http://schemas.microsoft.com/office/drawing/2014/main" id="{CAF05CC3-CC30-4586-8A21-98FA0D784EE5}"/>
               </a:ext>
             </a:extLst>
           </p:cNvPr>
@@ -13718,10 +14880,69 @@
       </p:sp>
       <p:sp>
         <p:nvSpPr>
-          <p:cNvPr id="8" name="footer-rule">
-            <a:extLst xmlns:a="http://schemas.openxmlformats.org/drawingml/2006/main">
-              <a:ext uri="{FF2B5EF4-FFF2-40B4-BE49-F238E27FC236}">
-                <a16:creationId xmlns:a16="http://schemas.microsoft.com/office/drawing/2014/main" id="{B4810302-4D13-4F28-B639-09CEC3C9561B}"/>
+          <p:cNvPr id="8" name="rescue-point-logo-background">
+            <a:extLst xmlns:a="http://schemas.openxmlformats.org/drawingml/2006/main">
+              <a:ext uri="{FF2B5EF4-FFF2-40B4-BE49-F238E27FC236}">
+                <a16:creationId xmlns:a16="http://schemas.microsoft.com/office/drawing/2014/main" id="{DAD92B21-E297-40B7-A950-B003F5AE986F}"/>
+              </a:ext>
+            </a:extLst>
+          </p:cNvPr>
+          <p:cNvSpPr>
+            <a:spLocks xmlns:a="http://schemas.openxmlformats.org/drawingml/2006/main" noGrp="1"/>
+          </p:cNvSpPr>
+          <p:nvPr/>
+        </p:nvSpPr>
+        <p:spPr>
+          <a:xfrm xmlns:a="http://schemas.openxmlformats.org/drawingml/2006/main">
+            <a:off x="9772650" y="133350"/>
+            <a:ext cx="1733550" cy="457200"/>
+          </a:xfrm>
+          <a:prstGeom xmlns:a="http://schemas.openxmlformats.org/drawingml/2006/main" prst="roundRect">
+            <a:avLst>
+              <a:gd name="adj" fmla="val 16667"/>
+            </a:avLst>
+          </a:prstGeom>
+          <a:solidFill xmlns:a="http://schemas.openxmlformats.org/drawingml/2006/main">
+            <a:srgbClr val="06142E"/>
+          </a:solidFill>
+          <a:ln xmlns:a="http://schemas.openxmlformats.org/drawingml/2006/main" w="9525">
+            <a:solidFill>
+              <a:srgbClr val="1EC5FF">
+                <a:alpha val="33333"/>
+              </a:srgbClr>
+            </a:solidFill>
+            <a:prstDash val="solid"/>
+          </a:ln>
+        </p:spPr>
+      </p:sp>
+      <p:pic>
+        <p:nvPicPr>
+          <p:cNvPr id="23" name="" descr="Figura oficial da documentação dbt usada para explicar: Seleção mínima ingênua perde risco — Arquivo."/>
+          <p:cNvPicPr>
+            <a:picLocks xmlns:a="http://schemas.openxmlformats.org/drawingml/2006/main" noChangeAspect="1"/>
+          </p:cNvPicPr>
+          <p:nvPr/>
+        </p:nvPicPr>
+        <p:blipFill>
+          <a:blip xmlns:r="http://schemas.openxmlformats.org/officeDocument/2006/relationships" xmlns:a="http://schemas.openxmlformats.org/drawingml/2006/main" r:embed="R3469880ff0194e2b"/>
+          <a:stretch xmlns:a="http://schemas.openxmlformats.org/drawingml/2006/main"/>
+        </p:blipFill>
+        <p:spPr>
+          <a:xfrm xmlns:a="http://schemas.openxmlformats.org/drawingml/2006/main">
+            <a:off x="9893718" y="209550"/>
+            <a:ext cx="1491414" cy="323850"/>
+          </a:xfrm>
+          <a:prstGeom xmlns:a="http://schemas.openxmlformats.org/drawingml/2006/main" prst="rect">
+            <a:avLst/>
+          </a:prstGeom>
+        </p:spPr>
+      </p:pic>
+      <p:sp>
+        <p:nvSpPr>
+          <p:cNvPr id="10" name="footer-rule">
+            <a:extLst xmlns:a="http://schemas.openxmlformats.org/drawingml/2006/main">
+              <a:ext uri="{FF2B5EF4-FFF2-40B4-BE49-F238E27FC236}">
+                <a16:creationId xmlns:a16="http://schemas.microsoft.com/office/drawing/2014/main" id="{B5F9675E-B492-40EE-BF6D-B9E5BD3AD93D}"/>
               </a:ext>
             </a:extLst>
           </p:cNvPr>
@@ -13751,10 +14972,10 @@
       </p:sp>
       <p:sp>
         <p:nvSpPr>
-          <p:cNvPr id="9" name="footer">
-            <a:extLst xmlns:a="http://schemas.openxmlformats.org/drawingml/2006/main">
-              <a:ext uri="{FF2B5EF4-FFF2-40B4-BE49-F238E27FC236}">
-                <a16:creationId xmlns:a16="http://schemas.microsoft.com/office/drawing/2014/main" id="{C84580C9-26FB-4973-A9CB-B0B89F1C53FE}"/>
+          <p:cNvPr id="11" name="footer">
+            <a:extLst xmlns:a="http://schemas.openxmlformats.org/drawingml/2006/main">
+              <a:ext uri="{FF2B5EF4-FFF2-40B4-BE49-F238E27FC236}">
+                <a16:creationId xmlns:a16="http://schemas.microsoft.com/office/drawing/2014/main" id="{F62C842D-C9C9-4AF5-85DA-C21B7D1462E0}"/>
               </a:ext>
             </a:extLst>
           </p:cNvPr>
@@ -13806,10 +15027,10 @@
       </p:sp>
       <p:sp>
         <p:nvSpPr>
-          <p:cNvPr id="10" name="page-number">
-            <a:extLst xmlns:a="http://schemas.openxmlformats.org/drawingml/2006/main">
-              <a:ext uri="{FF2B5EF4-FFF2-40B4-BE49-F238E27FC236}">
-                <a16:creationId xmlns:a16="http://schemas.microsoft.com/office/drawing/2014/main" id="{B326EC25-5C23-4C7B-8E42-88ED5E8E822A}"/>
+          <p:cNvPr id="12" name="page-number">
+            <a:extLst xmlns:a="http://schemas.openxmlformats.org/drawingml/2006/main">
+              <a:ext uri="{FF2B5EF4-FFF2-40B4-BE49-F238E27FC236}">
+                <a16:creationId xmlns:a16="http://schemas.microsoft.com/office/drawing/2014/main" id="{3B2D2EEA-F39D-4B2F-8C3B-43EB4F04A733}"/>
               </a:ext>
             </a:extLst>
           </p:cNvPr>
@@ -13862,7 +15083,7 @@
     </p:spTree>
     <p:extLst>
       <p:ext uri="{BB962C8B-B14F-4D97-AF65-F5344CB8AC3E}">
-        <p14:creationId xmlns:p14="http://schemas.microsoft.com/office/powerpoint/2010/main" val="133380341"/>
+        <p14:creationId xmlns:p14="http://schemas.microsoft.com/office/powerpoint/2010/main" val="1972465268"/>
       </p:ext>
     </p:extLst>
   </p:cSld>
@@ -13890,10 +15111,10 @@
       </p:grpSpPr>
       <p:sp>
         <p:nvSpPr>
-          <p:cNvPr id="11" name="slide-title">
-            <a:extLst xmlns:a="http://schemas.openxmlformats.org/drawingml/2006/main">
-              <a:ext uri="{FF2B5EF4-FFF2-40B4-BE49-F238E27FC236}">
-                <a16:creationId xmlns:a16="http://schemas.microsoft.com/office/drawing/2014/main" id="{6F38340B-0D4E-4805-BA07-7E5703B5069A}"/>
+          <p:cNvPr id="13" name="slide-title">
+            <a:extLst xmlns:a="http://schemas.openxmlformats.org/drawingml/2006/main">
+              <a:ext uri="{FF2B5EF4-FFF2-40B4-BE49-F238E27FC236}">
+                <a16:creationId xmlns:a16="http://schemas.microsoft.com/office/drawing/2014/main" id="{7DBA6B6F-0352-443F-98E5-F885D9A13BB6}"/>
               </a:ext>
             </a:extLst>
           </p:cNvPr>
@@ -13944,7 +15165,7 @@
           <p:cNvPr id="2" name="slide-subtitle">
             <a:extLst xmlns:a="http://schemas.openxmlformats.org/drawingml/2006/main">
               <a:ext uri="{FF2B5EF4-FFF2-40B4-BE49-F238E27FC236}">
-                <a16:creationId xmlns:a16="http://schemas.microsoft.com/office/drawing/2014/main" id="{2916855B-CC63-445C-A9A2-4CF928CB0F5D}"/>
+                <a16:creationId xmlns:a16="http://schemas.microsoft.com/office/drawing/2014/main" id="{918BD0A7-B09A-4FED-85D2-8AD0083977C0}"/>
               </a:ext>
             </a:extLst>
           </p:cNvPr>
@@ -13995,7 +15216,7 @@
           <p:cNvPr id="3" name="bullets">
             <a:extLst xmlns:a="http://schemas.openxmlformats.org/drawingml/2006/main">
               <a:ext uri="{FF2B5EF4-FFF2-40B4-BE49-F238E27FC236}">
-                <a16:creationId xmlns:a16="http://schemas.microsoft.com/office/drawing/2014/main" id="{7B8D623C-58F1-49CC-8064-BE246D87E9C7}"/>
+                <a16:creationId xmlns:a16="http://schemas.microsoft.com/office/drawing/2014/main" id="{ADD24A07-B66D-4798-84E7-FE863CAAB7AD}"/>
               </a:ext>
             </a:extLst>
           </p:cNvPr>
@@ -14082,7 +15303,7 @@
           <p:cNvPr id="4" name="ambient-glow">
             <a:extLst xmlns:a="http://schemas.openxmlformats.org/drawingml/2006/main">
               <a:ext uri="{FF2B5EF4-FFF2-40B4-BE49-F238E27FC236}">
-                <a16:creationId xmlns:a16="http://schemas.microsoft.com/office/drawing/2014/main" id="{627FC0E6-F590-4AC8-B50B-17107C7BC08B}"/>
+                <a16:creationId xmlns:a16="http://schemas.microsoft.com/office/drawing/2014/main" id="{B9FF9C4A-8F2B-4006-BE3B-B1267A1D1861}"/>
               </a:ext>
             </a:extLst>
           </p:cNvPr>
@@ -14119,7 +15340,7 @@
           <p:cNvPr id="5" name="ambient-core">
             <a:extLst xmlns:a="http://schemas.openxmlformats.org/drawingml/2006/main">
               <a:ext uri="{FF2B5EF4-FFF2-40B4-BE49-F238E27FC236}">
-                <a16:creationId xmlns:a16="http://schemas.microsoft.com/office/drawing/2014/main" id="{4A5247DE-8AB4-4534-8D08-80F263973CE0}"/>
+                <a16:creationId xmlns:a16="http://schemas.microsoft.com/office/drawing/2014/main" id="{CAC66D7A-4B29-4583-828C-FCC5E2A4CB53}"/>
               </a:ext>
             </a:extLst>
           </p:cNvPr>
@@ -14156,7 +15377,7 @@
           <p:cNvPr id="6" name="section-number">
             <a:extLst xmlns:a="http://schemas.openxmlformats.org/drawingml/2006/main">
               <a:ext uri="{FF2B5EF4-FFF2-40B4-BE49-F238E27FC236}">
-                <a16:creationId xmlns:a16="http://schemas.microsoft.com/office/drawing/2014/main" id="{496C5784-ABF9-4154-A00E-4B19C2D49EF7}"/>
+                <a16:creationId xmlns:a16="http://schemas.microsoft.com/office/drawing/2014/main" id="{A9E3F778-BE46-4A0D-B97E-00CB7D4FC27E}"/>
               </a:ext>
             </a:extLst>
           </p:cNvPr>
@@ -14207,7 +15428,7 @@
           <p:cNvPr id="7" name="eyebrow">
             <a:extLst xmlns:a="http://schemas.openxmlformats.org/drawingml/2006/main">
               <a:ext uri="{FF2B5EF4-FFF2-40B4-BE49-F238E27FC236}">
-                <a16:creationId xmlns:a16="http://schemas.microsoft.com/office/drawing/2014/main" id="{94514614-B9F4-4E53-B881-3745730A6AD6}"/>
+                <a16:creationId xmlns:a16="http://schemas.microsoft.com/office/drawing/2014/main" id="{FDB896A3-C16F-40D3-B2BA-03C4C982D652}"/>
               </a:ext>
             </a:extLst>
           </p:cNvPr>
@@ -14255,10 +15476,69 @@
       </p:sp>
       <p:sp>
         <p:nvSpPr>
-          <p:cNvPr id="8" name="footer-rule">
-            <a:extLst xmlns:a="http://schemas.openxmlformats.org/drawingml/2006/main">
-              <a:ext uri="{FF2B5EF4-FFF2-40B4-BE49-F238E27FC236}">
-                <a16:creationId xmlns:a16="http://schemas.microsoft.com/office/drawing/2014/main" id="{454F1968-1ECD-4450-A1CB-84F06FAF9304}"/>
+          <p:cNvPr id="8" name="rescue-point-logo-background">
+            <a:extLst xmlns:a="http://schemas.openxmlformats.org/drawingml/2006/main">
+              <a:ext uri="{FF2B5EF4-FFF2-40B4-BE49-F238E27FC236}">
+                <a16:creationId xmlns:a16="http://schemas.microsoft.com/office/drawing/2014/main" id="{BC145D8E-4D6F-48B1-AB16-99CFA46E0566}"/>
+              </a:ext>
+            </a:extLst>
+          </p:cNvPr>
+          <p:cNvSpPr>
+            <a:spLocks xmlns:a="http://schemas.openxmlformats.org/drawingml/2006/main" noGrp="1"/>
+          </p:cNvSpPr>
+          <p:nvPr/>
+        </p:nvSpPr>
+        <p:spPr>
+          <a:xfrm xmlns:a="http://schemas.openxmlformats.org/drawingml/2006/main">
+            <a:off x="9772650" y="133350"/>
+            <a:ext cx="1733550" cy="457200"/>
+          </a:xfrm>
+          <a:prstGeom xmlns:a="http://schemas.openxmlformats.org/drawingml/2006/main" prst="roundRect">
+            <a:avLst>
+              <a:gd name="adj" fmla="val 16667"/>
+            </a:avLst>
+          </a:prstGeom>
+          <a:solidFill xmlns:a="http://schemas.openxmlformats.org/drawingml/2006/main">
+            <a:srgbClr val="06142E"/>
+          </a:solidFill>
+          <a:ln xmlns:a="http://schemas.openxmlformats.org/drawingml/2006/main" w="9525">
+            <a:solidFill>
+              <a:srgbClr val="1EC5FF">
+                <a:alpha val="33333"/>
+              </a:srgbClr>
+            </a:solidFill>
+            <a:prstDash val="solid"/>
+          </a:ln>
+        </p:spPr>
+      </p:sp>
+      <p:pic>
+        <p:nvPicPr>
+          <p:cNvPr id="23" name="" descr="Figura oficial da documentação dbt usada para explicar: Defer reutiliza relações de outro estado — Modelos não construídos localmente podem apontar para produção ou staging.."/>
+          <p:cNvPicPr>
+            <a:picLocks xmlns:a="http://schemas.openxmlformats.org/drawingml/2006/main" noChangeAspect="1"/>
+          </p:cNvPicPr>
+          <p:nvPr/>
+        </p:nvPicPr>
+        <p:blipFill>
+          <a:blip xmlns:r="http://schemas.openxmlformats.org/officeDocument/2006/relationships" xmlns:a="http://schemas.openxmlformats.org/drawingml/2006/main" r:embed="R0dd8c8943f3d4a70"/>
+          <a:stretch xmlns:a="http://schemas.openxmlformats.org/drawingml/2006/main"/>
+        </p:blipFill>
+        <p:spPr>
+          <a:xfrm xmlns:a="http://schemas.openxmlformats.org/drawingml/2006/main">
+            <a:off x="9893718" y="209550"/>
+            <a:ext cx="1491414" cy="323850"/>
+          </a:xfrm>
+          <a:prstGeom xmlns:a="http://schemas.openxmlformats.org/drawingml/2006/main" prst="rect">
+            <a:avLst/>
+          </a:prstGeom>
+        </p:spPr>
+      </p:pic>
+      <p:sp>
+        <p:nvSpPr>
+          <p:cNvPr id="10" name="footer-rule">
+            <a:extLst xmlns:a="http://schemas.openxmlformats.org/drawingml/2006/main">
+              <a:ext uri="{FF2B5EF4-FFF2-40B4-BE49-F238E27FC236}">
+                <a16:creationId xmlns:a16="http://schemas.microsoft.com/office/drawing/2014/main" id="{E391A342-9BF4-4171-BFE7-DE8C7200DCBB}"/>
               </a:ext>
             </a:extLst>
           </p:cNvPr>
@@ -14288,10 +15568,10 @@
       </p:sp>
       <p:sp>
         <p:nvSpPr>
-          <p:cNvPr id="9" name="footer">
-            <a:extLst xmlns:a="http://schemas.openxmlformats.org/drawingml/2006/main">
-              <a:ext uri="{FF2B5EF4-FFF2-40B4-BE49-F238E27FC236}">
-                <a16:creationId xmlns:a16="http://schemas.microsoft.com/office/drawing/2014/main" id="{D0D6C530-11DE-45AA-BFA0-420132B494B3}"/>
+          <p:cNvPr id="11" name="footer">
+            <a:extLst xmlns:a="http://schemas.openxmlformats.org/drawingml/2006/main">
+              <a:ext uri="{FF2B5EF4-FFF2-40B4-BE49-F238E27FC236}">
+                <a16:creationId xmlns:a16="http://schemas.microsoft.com/office/drawing/2014/main" id="{E3363A9B-F876-490E-92DE-EEFF03543809}"/>
               </a:ext>
             </a:extLst>
           </p:cNvPr>
@@ -14343,10 +15623,10 @@
       </p:sp>
       <p:sp>
         <p:nvSpPr>
-          <p:cNvPr id="10" name="page-number">
-            <a:extLst xmlns:a="http://schemas.openxmlformats.org/drawingml/2006/main">
-              <a:ext uri="{FF2B5EF4-FFF2-40B4-BE49-F238E27FC236}">
-                <a16:creationId xmlns:a16="http://schemas.microsoft.com/office/drawing/2014/main" id="{499A6D20-AA58-42CB-BAAA-51D55F520FB8}"/>
+          <p:cNvPr id="12" name="page-number">
+            <a:extLst xmlns:a="http://schemas.openxmlformats.org/drawingml/2006/main">
+              <a:ext uri="{FF2B5EF4-FFF2-40B4-BE49-F238E27FC236}">
+                <a16:creationId xmlns:a16="http://schemas.microsoft.com/office/drawing/2014/main" id="{63294EC3-CB8F-4BCE-B662-0531C8705A26}"/>
               </a:ext>
             </a:extLst>
           </p:cNvPr>
@@ -14399,7 +15679,7 @@
     </p:spTree>
     <p:extLst>
       <p:ext uri="{BB962C8B-B14F-4D97-AF65-F5344CB8AC3E}">
-        <p14:creationId xmlns:p14="http://schemas.microsoft.com/office/powerpoint/2010/main" val="93558532"/>
+        <p14:creationId xmlns:p14="http://schemas.microsoft.com/office/powerpoint/2010/main" val="976830060"/>
       </p:ext>
     </p:extLst>
   </p:cSld>
